--- a/proposition-deck/AToure Mother Africa Festival Proposition.pptx
+++ b/proposition-deck/AToure Mother Africa Festival Proposition.pptx
@@ -118,50 +118,50 @@
   <p:extLst>
     <p:ext uri="{521415D9-36F7-43E2-AB2F-B90AF26B5E84}">
       <p14:sectionLst xmlns:p14="http://schemas.microsoft.com/office/powerpoint/2010/main">
-        <p14:section name="Ouverture" id="{a21b68c1-5b4a-bd0c-ca97-356339d7c2ab}">
+        <p14:section name="Ouverture" id="{4443d6f0-7e64-7ed4-c918-6e75ea2fc1ed}">
           <p14:sldIdLst>
             <p14:sldId id="256"/>
           </p14:sldIdLst>
         </p14:section>
-        <p14:section name="Où en est le festival" id="{17af34d1-8217-3b1f-3151-3501175e82d4}">
+        <p14:section name="Où en est le festival" id="{bd6d38eb-6d5d-aed3-30f8-5b15558f47f8}">
           <p14:sldIdLst>
             <p14:sldId id="257"/>
             <p14:sldId id="258"/>
           </p14:sldIdLst>
         </p14:section>
-        <p14:section name="La réponse AToure" id="{1bf574f5-c8cb-1163-0005-ff36fd896088}">
+        <p14:section name="La réponse AToure" id="{37447549-9151-663f-4c70-ecf3692fcbc3}">
           <p14:sldIdLst>
             <p14:sldId id="259"/>
             <p14:sldId id="260"/>
           </p14:sldIdLst>
         </p14:section>
-        <p14:section name="Visibilité" id="{9d0abc83-5e36-5bba-aadf-43bf07e0beb5}">
+        <p14:section name="Visibilité" id="{5a8f4a07-50c6-a587-744a-52dea6b902ef}">
           <p14:sldIdLst>
             <p14:sldId id="261"/>
             <p14:sldId id="262"/>
           </p14:sldIdLst>
         </p14:section>
-        <p14:section name="Le rapport de visibilité" id="{c8898bf5-8182-9361-e22d-50f4ef1a7508}">
+        <p14:section name="Le rapport de visibilité" id="{0eb55174-0d05-30a1-1b01-a062359fbaaf}">
           <p14:sldIdLst>
             <p14:sldId id="263"/>
           </p14:sldIdLst>
         </p14:section>
-        <p14:section name="La proposition" id="{5b8b42f8-08ed-3c53-6c4b-21a41cab6018}">
+        <p14:section name="La proposition" id="{f3912270-df46-bd6d-f08a-55944bbc0000}">
           <p14:sldIdLst>
             <p14:sldId id="264"/>
           </p14:sldIdLst>
         </p14:section>
-        <p14:section name="Références" id="{098d596c-659e-8bec-1d76-12bada8525d5}">
+        <p14:section name="Références" id="{7322c26c-e6e6-88c5-9232-59c0ecae736f}">
           <p14:sldIdLst>
             <p14:sldId id="265"/>
           </p14:sldIdLst>
         </p14:section>
-        <p14:section name="La demande" id="{1b334c9e-497f-e0d8-330c-0ab17249245f}">
+        <p14:section name="La demande" id="{669cef29-f193-2b47-886f-96b765ad2403}">
           <p14:sldIdLst>
             <p14:sldId id="266"/>
           </p14:sldIdLst>
         </p14:section>
-        <p14:section name="Annexe" id="{3a9ebee9-b1a9-8cbc-a860-f452a8189297}">
+        <p14:section name="Annexe" id="{0a60a166-7f39-f6bc-60ac-54f30a100128}">
           <p14:sldIdLst>
             <p14:sldId id="267"/>
           </p14:sldIdLst>
@@ -570,7 +570,7 @@
           <a:p>
             <a:r>
               <a:rPr lang="en-US" dirty="0"/>
-              <a:t>Remerciez l’équipe de Mother Africa pour son temps. Cette proposition porte sur une seule chose : rendre mesurable la visibilité que les créateurs apportent au festival, pour que le festival puisse la montrer à ses sponsors. Tout ce qui figure sur la diapositive suivante vient des affiches et de la communication du festival : demandez à l’équipe de corriger ce qui serait inexact.</a:t>
+              <a:t>Remerciez l’équipe de Mother Africa pour son temps. Cette proposition porte sur une seule chose : rendre mesurable la visibilité que les créateurs apportent au festival, pour que le festival puisse la montrer à ses sponsors. Tout ce qui figure sur la diapositive suivante vient des affiches et de la communication du festival : demandez à l’équipe de corriger ce qui serait inexact. Les images de la couverture et des diapositives 5, 6 et 9 sont des illustrations, pas des photos du festival.</a:t>
             </a:r>
             <a:endParaRPr lang="en-US" dirty="0"/>
           </a:p>
@@ -1274,7 +1274,7 @@
           <a:p>
             <a:r>
               <a:rPr lang="en-US" dirty="0"/>
-              <a:t>La visibilité arrive en trois vagues. La montée en puissance dure environ cinq semaines et n’a qu’un objectif : vendre des billets. Les deux soirs du festival visent l’attention en direct, pour que ceux qui ne sont pas là regrettent de ne pas y être. L’après festival garde Mother Africa dans les fils d’actualité jusqu’en janvier et donne aux sponsors du contenu à montrer. Si le festival prévoit une annonce pour 2027, c’est là qu’elle trouve sa place.</a:t>
+              <a:t>La visibilité arrive en trois vagues. La montée en puissance dure environ cinq semaines et n’a qu’un objectif : vendre des billets. Les deux soirs du festival visent l’attention en direct, pour que ceux qui ne sont pas là regrettent de ne pas y être. L’après festival garde Mother Africa dans les fils d’actualité jusqu’en janvier et donne aux sponsors du contenu à montrer. Si le festival prévoit une annonce pour 2027, c’est là qu’elle trouve sa place. Chaque vague suit un seul calendrier de contenus, validé par le festival avant toute publication. Les images sont des illustrations.</a:t>
             </a:r>
             <a:endParaRPr lang="en-US" dirty="0"/>
           </a:p>
@@ -1693,7 +1693,7 @@
         <p:spPr>
           <a:xfrm>
             <a:off x="548640" y="2377440"/>
-            <a:ext cx="6949440" cy="1600200"/>
+            <a:ext cx="4846320" cy="1600200"/>
           </a:xfrm>
           <a:prstGeom prst="rect">
             <a:avLst/>
@@ -1709,7 +1709,7 @@
                 <a:spcPct val="95000"/>
               </a:lnSpc>
               <a:buNone/>
-              <a:defRPr lang="en-US" sz="5000" dirty="0">
+              <a:defRPr lang="en-US" sz="4600" dirty="0">
                 <a:solidFill>
                   <a:schemeClr val="bg1"/>
                 </a:solidFill>
@@ -1723,7 +1723,7 @@
               </a:lnSpc>
               <a:buNone/>
             </a:pPr>
-            <a:endParaRPr lang="en-US" sz="5000" dirty="0"/>
+            <a:endParaRPr lang="en-US" sz="4600" dirty="0"/>
           </a:p>
         </p:txBody>
       </p:sp>
@@ -3034,7 +3034,7 @@
       </p:grpSpPr>
       <p:pic>
         <p:nvPicPr>
-          <p:cNvPr id="2" name="Background stripes" descr="/home/user/Mother-Africa/proposition-deck/build/assets/stripes.png">    </p:cNvPr>
+          <p:cNvPr id="2" name="Photo ai_phone" descr="Illustration : une festivalière filme la scène avec son téléphone, au milieu d’une foule de téléphones levés">    </p:cNvPr>
           <p:cNvPicPr>
             <a:picLocks noChangeAspect="1"/>
           </p:cNvPicPr>
@@ -3048,39 +3048,17 @@
         </p:blipFill>
         <p:spPr>
           <a:xfrm>
-            <a:off x="0" y="0"/>
-            <a:ext cx="12191695" cy="6858000"/>
+            <a:off x="0" y="-634898"/>
+            <a:ext cx="12191695" cy="8127797"/>
           </a:xfrm>
           <a:prstGeom prst="rect">
             <a:avLst/>
           </a:prstGeom>
         </p:spPr>
       </p:pic>
-      <p:sp>
-        <p:nvSpPr>
-          <p:cNvPr id="3" name="Shape 0"/>
-          <p:cNvSpPr/>
-          <p:nvPr/>
-        </p:nvSpPr>
-        <p:spPr>
-          <a:xfrm>
-            <a:off x="8362372" y="1472184"/>
-            <a:ext cx="3134380" cy="4206240"/>
-          </a:xfrm>
-          <a:prstGeom prst="rect">
-            <a:avLst/>
-          </a:prstGeom>
-          <a:ln w="15875">
-            <a:solidFill>
-              <a:schemeClr val="accent1"/>
-            </a:solidFill>
-            <a:prstDash val="solid"/>
-          </a:ln>
-        </p:spPr>
-      </p:sp>
       <p:pic>
         <p:nvPicPr>
-          <p:cNvPr id="4" name="Photo poster2026" descr="Affiche Mother Africa Festival 2026 : Davido, 27 et 28 décembre, Marcory Zone 4, Abidjan, 5e édition anniversaire">    </p:cNvPr>
+          <p:cNvPr id="3" name="Fade overlay" descr="preencoded.png">    </p:cNvPr>
           <p:cNvPicPr>
             <a:picLocks noChangeAspect="1"/>
           </p:cNvPicPr>
@@ -3094,152 +3072,17 @@
         </p:blipFill>
         <p:spPr>
           <a:xfrm>
-            <a:off x="8508676" y="1325880"/>
-            <a:ext cx="3134380" cy="4206240"/>
+            <a:off x="0" y="0"/>
+            <a:ext cx="6949440" cy="6858000"/>
           </a:xfrm>
           <a:prstGeom prst="rect">
             <a:avLst/>
           </a:prstGeom>
         </p:spPr>
       </p:pic>
-      <p:sp>
-        <p:nvSpPr>
-          <p:cNvPr id="5" name="Text 0"/>
-          <p:cNvSpPr/>
-          <p:nvPr>
-            <p:ph idx="100" type="title" hasCustomPrompt="1"/>
-          </p:nvPr>
-        </p:nvSpPr>
-        <p:spPr>
-          <a:xfrm>
-            <a:off x="548640" y="2377440"/>
-            <a:ext cx="6949440" cy="1600200"/>
-          </a:xfrm>
-          <a:prstGeom prst="rect">
-            <a:avLst/>
-          </a:prstGeom>
-          <a:noFill/>
-          <a:ln/>
-        </p:spPr>
-        <p:txBody>
-          <a:bodyPr wrap="square" lIns="0" tIns="0" rIns="0" bIns="0" rtlCol="0" anchor="t"/>
-          <a:lstStyle/>
-          <a:p>
-            <a:pPr algn="l" indent="0" marL="0">
-              <a:lnSpc>
-                <a:spcPct val="95000"/>
-              </a:lnSpc>
-              <a:buNone/>
-            </a:pPr>
-            <a:r>
-              <a:rPr lang="fr-FR" altLang="en-US" sz="5000" dirty="0">
-                <a:solidFill>
-                  <a:schemeClr val="bg1"/>
-                </a:solidFill>
-              </a:rPr>
-              <a:t>Maximiser la visibilité de Mother Africa</a:t>
-            </a:r>
-            <a:endParaRPr lang="fr-FR" sz="5000" dirty="0"/>
-          </a:p>
-        </p:txBody>
-      </p:sp>
-      <p:sp>
-        <p:nvSpPr>
-          <p:cNvPr id="6" name="Text 0"/>
-          <p:cNvSpPr/>
-          <p:nvPr>
-            <p:ph idx="101" type="body" hasCustomPrompt="1"/>
-          </p:nvPr>
-        </p:nvSpPr>
-        <p:spPr>
-          <a:xfrm>
-            <a:off x="548640" y="4206240"/>
-            <a:ext cx="5760720" cy="1371600"/>
-          </a:xfrm>
-          <a:prstGeom prst="rect">
-            <a:avLst/>
-          </a:prstGeom>
-          <a:noFill/>
-          <a:ln/>
-        </p:spPr>
-        <p:txBody>
-          <a:bodyPr wrap="square" lIns="0" tIns="0" rIns="0" bIns="0" rtlCol="0" anchor="t"/>
-          <a:lstStyle/>
-          <a:p>
-            <a:pPr algn="l" indent="0" marL="0">
-              <a:lnSpc>
-                <a:spcPct val="115000"/>
-              </a:lnSpc>
-              <a:buNone/>
-            </a:pPr>
-            <a:r>
-              <a:rPr lang="fr-FR" altLang="en-US" sz="1600" dirty="0">
-                <a:solidFill>
-                  <a:schemeClr val="accent5"/>
-                </a:solidFill>
-              </a:rPr>
-              <a:t>Une proposition pour la 5e édition de Mother Africa Festival : accès aux talents, gestion des créateurs sur le terrain et un rapport de visibilité.</a:t>
-            </a:r>
-            <a:endParaRPr lang="fr-FR" sz="1600" dirty="0"/>
-          </a:p>
-          <a:p>
-            <a:pPr algn="l" indent="0" marL="0">
-              <a:lnSpc>
-                <a:spcPct val="115000"/>
-              </a:lnSpc>
-              <a:buNone/>
-            </a:pPr>
-            <a:r>
-              <a:rPr lang="fr-FR" altLang="en-US" sz="1600" dirty="0">
-                <a:solidFill>
-                  <a:schemeClr val="accent5"/>
-                </a:solidFill>
-              </a:rPr>
-              <a:t>27 et 28 décembre 2026, Marcory Zone 4, Abidjan.</a:t>
-            </a:r>
-            <a:endParaRPr lang="fr-FR" sz="1600" dirty="0"/>
-          </a:p>
-        </p:txBody>
-      </p:sp>
-      <p:sp>
-        <p:nvSpPr>
-          <p:cNvPr id="8" name="Text 3"/>
-          <p:cNvSpPr txBox="1"/>
-          <p:nvPr/>
-        </p:nvSpPr>
-        <p:spPr>
-          <a:xfrm>
-            <a:off x="548640" y="411480"/>
-            <a:ext cx="3657600" cy="237744"/>
-          </a:xfrm>
-          <a:prstGeom prst="rect">
-            <a:avLst/>
-          </a:prstGeom>
-          <a:noFill/>
-          <a:ln/>
-        </p:spPr>
-        <p:txBody>
-          <a:bodyPr wrap="square" lIns="0" tIns="0" rIns="0" bIns="0" rtlCol="0" anchor="t"/>
-          <a:lstStyle/>
-          <a:p>
-            <a:pPr indent="0" marL="0">
-              <a:buNone/>
-            </a:pPr>
-            <a:r>
-              <a:rPr lang="fr-FR" altLang="en-US" sz="1000" dirty="0">
-                <a:solidFill>
-                  <a:schemeClr val="accent5"/>
-                </a:solidFill>
-              </a:rPr>
-              <a:t>atoureconsulting.com</a:t>
-            </a:r>
-            <a:endParaRPr lang="fr-FR" sz="1000" dirty="0"/>
-          </a:p>
-        </p:txBody>
-      </p:sp>
       <p:pic>
         <p:nvPicPr>
-          <p:cNvPr id="9" name="Image 2" descr="AToure Management &amp; Consulting">    </p:cNvPr>
+          <p:cNvPr id="4" name="Fade overlay" descr="preencoded.png">    </p:cNvPr>
           <p:cNvPicPr>
             <a:picLocks noChangeAspect="1"/>
           </p:cNvPicPr>
@@ -3253,8 +3096,8 @@
         </p:blipFill>
         <p:spPr>
           <a:xfrm>
-            <a:off x="548640" y="1371600"/>
-            <a:ext cx="2377440" cy="380390"/>
+            <a:off x="0" y="4846320"/>
+            <a:ext cx="12191695" cy="2011680"/>
           </a:xfrm>
           <a:prstGeom prst="rect">
             <a:avLst/>
@@ -3263,43 +3106,84 @@
       </p:pic>
       <p:sp>
         <p:nvSpPr>
-          <p:cNvPr id="10" name="Text 4"/>
-          <p:cNvSpPr txBox="1"/>
-          <p:nvPr/>
-        </p:nvSpPr>
-        <p:spPr>
-          <a:xfrm>
-            <a:off x="3017520" y="1261872"/>
-            <a:ext cx="365760" cy="365760"/>
-          </a:xfrm>
-          <a:prstGeom prst="rect">
-            <a:avLst/>
-          </a:prstGeom>
-          <a:noFill/>
-          <a:ln/>
-        </p:spPr>
-        <p:txBody>
-          <a:bodyPr wrap="square" lIns="0" tIns="0" rIns="0" bIns="0" rtlCol="0" anchor="ctr"/>
-          <a:lstStyle/>
-          <a:p>
-            <a:pPr algn="ctr" indent="0" marL="0">
-              <a:buNone/>
-            </a:pPr>
-            <a:r>
-              <a:rPr lang="fr-FR" altLang="en-US" sz="2000" dirty="0">
-                <a:solidFill>
-                  <a:schemeClr val="accent1"/>
-                </a:solidFill>
-              </a:rPr>
-              <a:t>×</a:t>
-            </a:r>
-            <a:endParaRPr lang="fr-FR" sz="2000" dirty="0"/>
+          <p:cNvPr id="5" name="Text 0"/>
+          <p:cNvSpPr/>
+          <p:nvPr>
+            <p:ph idx="100" type="title" hasCustomPrompt="1"/>
+          </p:nvPr>
+        </p:nvSpPr>
+        <p:spPr>
+          <a:xfrm>
+            <a:off x="548640" y="2377440"/>
+            <a:ext cx="4846320" cy="1600200"/>
+          </a:xfrm>
+          <a:prstGeom prst="rect">
+            <a:avLst/>
+          </a:prstGeom>
+          <a:noFill/>
+          <a:ln/>
+        </p:spPr>
+        <p:txBody>
+          <a:bodyPr wrap="square" lIns="0" tIns="0" rIns="0" bIns="0" rtlCol="0" anchor="t"/>
+          <a:lstStyle/>
+          <a:p>
+            <a:pPr algn="l" indent="0" marL="0">
+              <a:lnSpc>
+                <a:spcPct val="95000"/>
+              </a:lnSpc>
+              <a:buNone/>
+            </a:pPr>
+            <a:r>
+              <a:rPr lang="fr-FR" altLang="en-US" sz="4600" dirty="0">
+                <a:solidFill>
+                  <a:schemeClr val="bg1"/>
+                </a:solidFill>
+              </a:rPr>
+              <a:t>Mother Africa, plus visible que jamais</a:t>
+            </a:r>
+            <a:endParaRPr lang="fr-FR" sz="4600" dirty="0"/>
+          </a:p>
+        </p:txBody>
+      </p:sp>
+      <p:sp>
+        <p:nvSpPr>
+          <p:cNvPr id="7" name="Text 1"/>
+          <p:cNvSpPr txBox="1"/>
+          <p:nvPr/>
+        </p:nvSpPr>
+        <p:spPr>
+          <a:xfrm>
+            <a:off x="548640" y="411480"/>
+            <a:ext cx="3657600" cy="237744"/>
+          </a:xfrm>
+          <a:prstGeom prst="rect">
+            <a:avLst/>
+          </a:prstGeom>
+          <a:noFill/>
+          <a:ln/>
+        </p:spPr>
+        <p:txBody>
+          <a:bodyPr wrap="square" lIns="0" tIns="0" rIns="0" bIns="0" rtlCol="0" anchor="t"/>
+          <a:lstStyle/>
+          <a:p>
+            <a:pPr indent="0" marL="0">
+              <a:buNone/>
+            </a:pPr>
+            <a:r>
+              <a:rPr lang="fr-FR" altLang="en-US" sz="1000" dirty="0">
+                <a:solidFill>
+                  <a:schemeClr val="accent5"/>
+                </a:solidFill>
+              </a:rPr>
+              <a:t>atoureconsulting.com</a:t>
+            </a:r>
+            <a:endParaRPr lang="fr-FR" sz="1000" dirty="0"/>
           </a:p>
         </p:txBody>
       </p:sp>
       <p:pic>
         <p:nvPicPr>
-          <p:cNvPr id="11" name="Image 3" descr="Mother Africa Festival">    </p:cNvPr>
+          <p:cNvPr id="8" name="Image 3" descr="AToure Management &amp; Consulting">    </p:cNvPr>
           <p:cNvPicPr>
             <a:picLocks noChangeAspect="1"/>
           </p:cNvPicPr>
@@ -3313,6 +3197,66 @@
         </p:blipFill>
         <p:spPr>
           <a:xfrm>
+            <a:off x="548640" y="1371600"/>
+            <a:ext cx="2377440" cy="380390"/>
+          </a:xfrm>
+          <a:prstGeom prst="rect">
+            <a:avLst/>
+          </a:prstGeom>
+        </p:spPr>
+      </p:pic>
+      <p:sp>
+        <p:nvSpPr>
+          <p:cNvPr id="9" name="Text 2"/>
+          <p:cNvSpPr txBox="1"/>
+          <p:nvPr/>
+        </p:nvSpPr>
+        <p:spPr>
+          <a:xfrm>
+            <a:off x="3017520" y="1261872"/>
+            <a:ext cx="365760" cy="365760"/>
+          </a:xfrm>
+          <a:prstGeom prst="rect">
+            <a:avLst/>
+          </a:prstGeom>
+          <a:noFill/>
+          <a:ln/>
+        </p:spPr>
+        <p:txBody>
+          <a:bodyPr wrap="square" lIns="0" tIns="0" rIns="0" bIns="0" rtlCol="0" anchor="ctr"/>
+          <a:lstStyle/>
+          <a:p>
+            <a:pPr algn="ctr" indent="0" marL="0">
+              <a:buNone/>
+            </a:pPr>
+            <a:r>
+              <a:rPr lang="fr-FR" altLang="en-US" sz="2000" dirty="0">
+                <a:solidFill>
+                  <a:schemeClr val="accent1"/>
+                </a:solidFill>
+              </a:rPr>
+              <a:t>×</a:t>
+            </a:r>
+            <a:endParaRPr lang="fr-FR" sz="2000" dirty="0"/>
+          </a:p>
+        </p:txBody>
+      </p:sp>
+      <p:pic>
+        <p:nvPicPr>
+          <p:cNvPr id="10" name="Image 4" descr="Mother Africa Festival">    </p:cNvPr>
+          <p:cNvPicPr>
+            <a:picLocks noChangeAspect="1"/>
+          </p:cNvPicPr>
+          <p:nvPr/>
+        </p:nvPicPr>
+        <p:blipFill>
+          <a:blip r:embed="rId5"/>
+          <a:stretch>
+            <a:fillRect/>
+          </a:stretch>
+        </p:blipFill>
+        <p:spPr>
+          <a:xfrm>
             <a:off x="3474720" y="1005840"/>
             <a:ext cx="1224254" cy="868680"/>
           </a:xfrm>
@@ -3323,7 +3267,82 @@
       </p:pic>
       <p:sp>
         <p:nvSpPr>
-          <p:cNvPr id="12" name="Shape 5"/>
+          <p:cNvPr id="11" name="Text 3"/>
+          <p:cNvSpPr txBox="1"/>
+          <p:nvPr/>
+        </p:nvSpPr>
+        <p:spPr>
+          <a:xfrm>
+            <a:off x="548640" y="4224528"/>
+            <a:ext cx="4480560" cy="868680"/>
+          </a:xfrm>
+          <a:prstGeom prst="rect">
+            <a:avLst/>
+          </a:prstGeom>
+          <a:noFill/>
+          <a:ln/>
+        </p:spPr>
+        <p:txBody>
+          <a:bodyPr wrap="square" lIns="0" tIns="0" rIns="0" bIns="0" rtlCol="0" anchor="t"/>
+          <a:lstStyle/>
+          <a:p>
+            <a:pPr indent="0" marL="0">
+              <a:lnSpc>
+                <a:spcPct val="115000"/>
+              </a:lnSpc>
+              <a:buNone/>
+            </a:pPr>
+            <a:r>
+              <a:rPr lang="fr-FR" altLang="en-US" sz="1500" dirty="0">
+                <a:solidFill>
+                  <a:schemeClr val="bg1"/>
+                </a:solidFill>
+              </a:rPr>
+              <a:t>Une proposition pour la 5e édition de Mother Africa Festival : accès aux talents, gestion des créateurs sur le terrain et un rapport de visibilité.</a:t>
+            </a:r>
+            <a:endParaRPr lang="fr-FR" sz="1500" dirty="0"/>
+          </a:p>
+        </p:txBody>
+      </p:sp>
+      <p:sp>
+        <p:nvSpPr>
+          <p:cNvPr id="12" name="Text 4"/>
+          <p:cNvSpPr txBox="1"/>
+          <p:nvPr/>
+        </p:nvSpPr>
+        <p:spPr>
+          <a:xfrm>
+            <a:off x="548640" y="5138928"/>
+            <a:ext cx="4480560" cy="274320"/>
+          </a:xfrm>
+          <a:prstGeom prst="rect">
+            <a:avLst/>
+          </a:prstGeom>
+          <a:noFill/>
+          <a:ln/>
+        </p:spPr>
+        <p:txBody>
+          <a:bodyPr wrap="square" lIns="0" tIns="0" rIns="0" bIns="0" rtlCol="0" anchor="t"/>
+          <a:lstStyle/>
+          <a:p>
+            <a:pPr indent="0" marL="0">
+              <a:buNone/>
+            </a:pPr>
+            <a:r>
+              <a:rPr lang="fr-FR" altLang="en-US" sz="1500" b="1" dirty="0">
+                <a:solidFill>
+                  <a:schemeClr val="accent4"/>
+                </a:solidFill>
+              </a:rPr>
+              <a:t>27 et 28 décembre 2026, Marcory Zone 4, Abidjan.</a:t>
+            </a:r>
+            <a:endParaRPr lang="fr-FR" sz="1500" dirty="0"/>
+          </a:p>
+        </p:txBody>
+      </p:sp>
+      <p:sp>
+        <p:nvSpPr>
+          <p:cNvPr id="13" name="Shape 5"/>
           <p:cNvSpPr/>
           <p:nvPr/>
         </p:nvSpPr>
@@ -3346,7 +3365,7 @@
       </p:sp>
       <p:sp>
         <p:nvSpPr>
-          <p:cNvPr id="13" name="Text 6"/>
+          <p:cNvPr id="14" name="Text 6"/>
           <p:cNvSpPr txBox="1"/>
           <p:nvPr/>
         </p:nvSpPr>
@@ -3377,6 +3396,39 @@
               <a:t>Préparé par Baba Touré, Directeur  ·  30.10.2026</a:t>
             </a:r>
             <a:endParaRPr lang="fr-FR" sz="1200" dirty="0"/>
+          </a:p>
+        </p:txBody>
+      </p:sp>
+      <p:sp>
+        <p:nvSpPr>
+          <p:cNvPr id="15" name="Text 0"/>
+          <p:cNvSpPr/>
+          <p:nvPr>
+            <p:ph idx="101" type="body" hasCustomPrompt="1"/>
+          </p:nvPr>
+        </p:nvSpPr>
+        <p:spPr>
+          <a:xfrm>
+            <a:off x="548640" y="4206240"/>
+            <a:ext cx="5760720" cy="1371600"/>
+          </a:xfrm>
+          <a:prstGeom prst="rect">
+            <a:avLst/>
+          </a:prstGeom>
+          <a:noFill/>
+          <a:ln/>
+        </p:spPr>
+        <p:txBody>
+          <a:bodyPr wrap="square" lIns="0" tIns="0" rIns="0" bIns="0" rtlCol="0" anchor="t"/>
+          <a:lstStyle/>
+          <a:p>
+            <a:pPr algn="l" indent="0" marL="0">
+              <a:lnSpc>
+                <a:spcPct val="115000"/>
+              </a:lnSpc>
+              <a:buNone/>
+            </a:pPr>
+            <a:endParaRPr lang="en-US" sz="1600" dirty="0"/>
           </a:p>
         </p:txBody>
       </p:sp>
@@ -14894,7 +14946,7 @@
         <p:spPr>
           <a:xfrm>
             <a:off x="548640" y="4709160"/>
-            <a:ext cx="5486400" cy="1463040"/>
+            <a:ext cx="4572000" cy="1463040"/>
           </a:xfrm>
           <a:prstGeom prst="roundRect">
             <a:avLst>
@@ -14916,7 +14968,7 @@
         <p:spPr>
           <a:xfrm>
             <a:off x="822960" y="4846320"/>
-            <a:ext cx="4572000" cy="256032"/>
+            <a:ext cx="4023360" cy="256032"/>
           </a:xfrm>
           <a:prstGeom prst="rect">
             <a:avLst/>
@@ -14952,7 +15004,7 @@
         <p:spPr>
           <a:xfrm>
             <a:off x="822960" y="5138928"/>
-            <a:ext cx="5029200" cy="548640"/>
+            <a:ext cx="4160520" cy="548640"/>
           </a:xfrm>
           <a:prstGeom prst="rect">
             <a:avLst/>
@@ -14972,14 +15024,14 @@
               <a:buChar char="•"/>
             </a:pPr>
             <a:r>
-              <a:rPr lang="fr-FR" altLang="en-US" sz="1300" dirty="0">
+              <a:rPr lang="fr-FR" altLang="en-US" sz="1200" dirty="0">
                 <a:solidFill>
                   <a:schemeClr val="bg1"/>
                 </a:solidFill>
               </a:rPr>
-              <a:t>Chaque créateur vérifié par rapport au brief sous 48 heures</a:t>
-            </a:r>
-            <a:endParaRPr lang="fr-FR" sz="1300" dirty="0"/>
+              <a:t>Chaque créateur vérifié selon le brief sous 48 heures</a:t>
+            </a:r>
+            <a:endParaRPr lang="fr-FR" sz="1200" dirty="0"/>
           </a:p>
           <a:p>
             <a:pPr marL="177800" indent="-177800">
@@ -14990,14 +15042,14 @@
               <a:buChar char="•"/>
             </a:pPr>
             <a:r>
-              <a:rPr lang="fr-FR" altLang="en-US" sz="1300" dirty="0">
+              <a:rPr lang="fr-FR" altLang="en-US" sz="1200" dirty="0">
                 <a:solidFill>
                   <a:schemeClr val="bg1"/>
                 </a:solidFill>
               </a:rPr>
               <a:t>Statistiques collectées par enregistrement d’écran</a:t>
             </a:r>
-            <a:endParaRPr lang="fr-FR" sz="1300" dirty="0"/>
+            <a:endParaRPr lang="fr-FR" sz="1200" dirty="0"/>
           </a:p>
         </p:txBody>
       </p:sp>
@@ -15039,7 +15091,7 @@
       </p:sp>
       <p:pic>
         <p:nvPicPr>
-          <p:cNvPr id="46" name="Image 2" descr="preencoded.png">    </p:cNvPr>
+          <p:cNvPr id="46" name="Photo ai_briefing" descr="Illustration : un responsable de production briefe des créateurs avec une tablette, en coulisses, avant l’ouverture">    </p:cNvPr>
           <p:cNvPicPr>
             <a:picLocks noChangeAspect="1"/>
           </p:cNvPicPr>
@@ -15053,53 +15105,17 @@
         </p:blipFill>
         <p:spPr>
           <a:xfrm>
-            <a:off x="6355080" y="4818888"/>
-            <a:ext cx="274320" cy="274320"/>
+            <a:off x="5394960" y="4709160"/>
+            <a:ext cx="2599578" cy="1463040"/>
           </a:xfrm>
           <a:prstGeom prst="rect">
             <a:avLst/>
           </a:prstGeom>
         </p:spPr>
       </p:pic>
-      <p:sp>
-        <p:nvSpPr>
-          <p:cNvPr id="47" name="Text 41"/>
-          <p:cNvSpPr txBox="1"/>
-          <p:nvPr/>
-        </p:nvSpPr>
-        <p:spPr>
-          <a:xfrm>
-            <a:off x="6766560" y="4800600"/>
-            <a:ext cx="4846320" cy="365760"/>
-          </a:xfrm>
-          <a:prstGeom prst="rect">
-            <a:avLst/>
-          </a:prstGeom>
-          <a:noFill/>
-          <a:ln/>
-        </p:spPr>
-        <p:txBody>
-          <a:bodyPr wrap="square" lIns="0" tIns="0" rIns="0" bIns="0" rtlCol="0" anchor="t"/>
-          <a:lstStyle/>
-          <a:p>
-            <a:pPr indent="0" marL="0">
-              <a:buNone/>
-            </a:pPr>
-            <a:r>
-              <a:rPr lang="fr-FR" altLang="en-US" sz="1400" dirty="0">
-                <a:solidFill>
-                  <a:schemeClr val="tx1"/>
-                </a:solidFill>
-              </a:rPr>
-              <a:t>Un seul interlocuteur pour l’équipe du festival</a:t>
-            </a:r>
-            <a:endParaRPr lang="fr-FR" sz="1400" dirty="0"/>
-          </a:p>
-        </p:txBody>
-      </p:sp>
       <p:pic>
         <p:nvPicPr>
-          <p:cNvPr id="48" name="Image 3" descr="preencoded.png">    </p:cNvPr>
+          <p:cNvPr id="47" name="Image 3" descr="preencoded.png">    </p:cNvPr>
           <p:cNvPicPr>
             <a:picLocks noChangeAspect="1"/>
           </p:cNvPicPr>
@@ -15113,8 +15129,8 @@
         </p:blipFill>
         <p:spPr>
           <a:xfrm>
-            <a:off x="6355080" y="5294376"/>
-            <a:ext cx="274320" cy="274320"/>
+            <a:off x="8268858" y="4727448"/>
+            <a:ext cx="256032" cy="256032"/>
           </a:xfrm>
           <a:prstGeom prst="rect">
             <a:avLst/>
@@ -15123,14 +15139,14 @@
       </p:pic>
       <p:sp>
         <p:nvSpPr>
-          <p:cNvPr id="49" name="Text 42"/>
-          <p:cNvSpPr txBox="1"/>
-          <p:nvPr/>
-        </p:nvSpPr>
-        <p:spPr>
-          <a:xfrm>
-            <a:off x="6766560" y="5276088"/>
-            <a:ext cx="4846320" cy="365760"/>
+          <p:cNvPr id="48" name="Text 41"/>
+          <p:cNvSpPr txBox="1"/>
+          <p:nvPr/>
+        </p:nvSpPr>
+        <p:spPr>
+          <a:xfrm>
+            <a:off x="8634618" y="4709160"/>
+            <a:ext cx="3008437" cy="438912"/>
           </a:xfrm>
           <a:prstGeom prst="rect">
             <a:avLst/>
@@ -15146,20 +15162,20 @@
               <a:buNone/>
             </a:pPr>
             <a:r>
-              <a:rPr lang="fr-FR" altLang="en-US" sz="1400" dirty="0">
+              <a:rPr lang="fr-FR" altLang="en-US" sz="1250" dirty="0">
                 <a:solidFill>
                   <a:schemeClr val="tx1"/>
                 </a:solidFill>
               </a:rPr>
-              <a:t>Un suivi partagé de chaque créateur et publication</a:t>
-            </a:r>
-            <a:endParaRPr lang="fr-FR" sz="1400" dirty="0"/>
+              <a:t>Un seul interlocuteur pour l’équipe du festival</a:t>
+            </a:r>
+            <a:endParaRPr lang="fr-FR" sz="1250" dirty="0"/>
           </a:p>
         </p:txBody>
       </p:sp>
       <p:pic>
         <p:nvPicPr>
-          <p:cNvPr id="50" name="Image 4" descr="preencoded.png">    </p:cNvPr>
+          <p:cNvPr id="49" name="Image 4" descr="preencoded.png">    </p:cNvPr>
           <p:cNvPicPr>
             <a:picLocks noChangeAspect="1"/>
           </p:cNvPicPr>
@@ -15173,8 +15189,8 @@
         </p:blipFill>
         <p:spPr>
           <a:xfrm>
-            <a:off x="6355080" y="5769864"/>
-            <a:ext cx="274320" cy="274320"/>
+            <a:off x="8268858" y="5230368"/>
+            <a:ext cx="256032" cy="256032"/>
           </a:xfrm>
           <a:prstGeom prst="rect">
             <a:avLst/>
@@ -15183,14 +15199,14 @@
       </p:pic>
       <p:sp>
         <p:nvSpPr>
-          <p:cNvPr id="51" name="Text 43"/>
-          <p:cNvSpPr txBox="1"/>
-          <p:nvPr/>
-        </p:nvSpPr>
-        <p:spPr>
-          <a:xfrm>
-            <a:off x="6766560" y="5751576"/>
-            <a:ext cx="4846320" cy="365760"/>
+          <p:cNvPr id="50" name="Text 42"/>
+          <p:cNvSpPr txBox="1"/>
+          <p:nvPr/>
+        </p:nvSpPr>
+        <p:spPr>
+          <a:xfrm>
+            <a:off x="8634618" y="5212080"/>
+            <a:ext cx="3008437" cy="438912"/>
           </a:xfrm>
           <a:prstGeom prst="rect">
             <a:avLst/>
@@ -15206,14 +15222,74 @@
               <a:buNone/>
             </a:pPr>
             <a:r>
-              <a:rPr lang="fr-FR" altLang="en-US" sz="1400" dirty="0">
+              <a:rPr lang="fr-FR" altLang="en-US" sz="1250" dirty="0">
                 <a:solidFill>
                   <a:schemeClr val="tx1"/>
                 </a:solidFill>
               </a:rPr>
+              <a:t>Un suivi partagé de chaque créateur et publication</a:t>
+            </a:r>
+            <a:endParaRPr lang="fr-FR" sz="1250" dirty="0"/>
+          </a:p>
+        </p:txBody>
+      </p:sp>
+      <p:pic>
+        <p:nvPicPr>
+          <p:cNvPr id="51" name="Image 5" descr="preencoded.png">    </p:cNvPr>
+          <p:cNvPicPr>
+            <a:picLocks noChangeAspect="1"/>
+          </p:cNvPicPr>
+          <p:nvPr/>
+        </p:nvPicPr>
+        <p:blipFill>
+          <a:blip r:embed="rId6"/>
+          <a:stretch>
+            <a:fillRect/>
+          </a:stretch>
+        </p:blipFill>
+        <p:spPr>
+          <a:xfrm>
+            <a:off x="8268858" y="5733288"/>
+            <a:ext cx="256032" cy="256032"/>
+          </a:xfrm>
+          <a:prstGeom prst="rect">
+            <a:avLst/>
+          </a:prstGeom>
+        </p:spPr>
+      </p:pic>
+      <p:sp>
+        <p:nvSpPr>
+          <p:cNvPr id="52" name="Text 43"/>
+          <p:cNvSpPr txBox="1"/>
+          <p:nvPr/>
+        </p:nvSpPr>
+        <p:spPr>
+          <a:xfrm>
+            <a:off x="8634618" y="5715000"/>
+            <a:ext cx="3008437" cy="438912"/>
+          </a:xfrm>
+          <a:prstGeom prst="rect">
+            <a:avLst/>
+          </a:prstGeom>
+          <a:noFill/>
+          <a:ln/>
+        </p:spPr>
+        <p:txBody>
+          <a:bodyPr wrap="square" lIns="0" tIns="0" rIns="0" bIns="0" rtlCol="0" anchor="t"/>
+          <a:lstStyle/>
+          <a:p>
+            <a:pPr indent="0" marL="0">
+              <a:buNone/>
+            </a:pPr>
+            <a:r>
+              <a:rPr lang="fr-FR" altLang="en-US" sz="1250" dirty="0">
+                <a:solidFill>
+                  <a:schemeClr val="tx1"/>
+                </a:solidFill>
+              </a:rPr>
               <a:t>Des règles de marque validées avec vous avant publication</a:t>
             </a:r>
-            <a:endParaRPr lang="fr-FR" sz="1400" dirty="0"/>
+            <a:endParaRPr lang="fr-FR" sz="1250" dirty="0"/>
           </a:p>
         </p:txBody>
       </p:sp>
@@ -15558,12 +15634,12 @@
         </p:nvSpPr>
         <p:spPr>
           <a:xfrm>
-            <a:off x="548640" y="2286000"/>
-            <a:ext cx="4218127" cy="2971800"/>
+            <a:off x="548640" y="2240280"/>
+            <a:ext cx="4218127" cy="3931920"/>
           </a:xfrm>
           <a:prstGeom prst="roundRect">
             <a:avLst>
-              <a:gd name="adj" fmla="val 3077"/>
+              <a:gd name="adj" fmla="val 2326"/>
             </a:avLst>
           </a:prstGeom>
           <a:solidFill>
@@ -15572,15 +15648,39 @@
           <a:ln/>
         </p:spPr>
       </p:sp>
-      <p:sp>
-        <p:nvSpPr>
-          <p:cNvPr id="13" name="Text 7"/>
-          <p:cNvSpPr txBox="1"/>
-          <p:nvPr/>
-        </p:nvSpPr>
-        <p:spPr>
-          <a:xfrm>
-            <a:off x="822960" y="2542032"/>
+      <p:pic>
+        <p:nvPicPr>
+          <p:cNvPr id="13" name="Photo ai_grwm" descr="Illustration : une créatrice filme sa préparation avant le festival">    </p:cNvPr>
+          <p:cNvPicPr>
+            <a:picLocks noChangeAspect="1"/>
+          </p:cNvPicPr>
+          <p:nvPr/>
+        </p:nvPicPr>
+        <p:blipFill>
+          <a:blip r:embed="rId4"/>
+          <a:stretch>
+            <a:fillRect/>
+          </a:stretch>
+        </p:blipFill>
+        <p:spPr>
+          <a:xfrm>
+            <a:off x="822960" y="2487168"/>
+            <a:ext cx="1783080" cy="1188720"/>
+          </a:xfrm>
+          <a:prstGeom prst="rect">
+            <a:avLst/>
+          </a:prstGeom>
+        </p:spPr>
+      </p:pic>
+      <p:sp>
+        <p:nvSpPr>
+          <p:cNvPr id="14" name="Text 7"/>
+          <p:cNvSpPr txBox="1"/>
+          <p:nvPr/>
+        </p:nvSpPr>
+        <p:spPr>
+          <a:xfrm>
+            <a:off x="822960" y="3822192"/>
             <a:ext cx="3669487" cy="256032"/>
           </a:xfrm>
           <a:prstGeom prst="rect">
@@ -15610,14 +15710,14 @@
       </p:sp>
       <p:sp>
         <p:nvSpPr>
-          <p:cNvPr id="14" name="Text 8"/>
-          <p:cNvSpPr txBox="1"/>
-          <p:nvPr/>
-        </p:nvSpPr>
-        <p:spPr>
-          <a:xfrm>
-            <a:off x="822960" y="2852928"/>
-            <a:ext cx="3669487" cy="457200"/>
+          <p:cNvPr id="15" name="Text 8"/>
+          <p:cNvSpPr txBox="1"/>
+          <p:nvPr/>
+        </p:nvSpPr>
+        <p:spPr>
+          <a:xfrm>
+            <a:off x="822960" y="4069080"/>
+            <a:ext cx="3669487" cy="411480"/>
           </a:xfrm>
           <a:prstGeom prst="rect">
             <a:avLst/>
@@ -15633,7 +15733,7 @@
               <a:buNone/>
             </a:pPr>
             <a:r>
-              <a:rPr lang="fr-FR" altLang="en-US" sz="2600" dirty="0">
+              <a:rPr lang="fr-FR" altLang="en-US" sz="2400" dirty="0">
                 <a:solidFill>
                   <a:schemeClr val="bg1"/>
                 </a:solidFill>
@@ -15643,20 +15743,20 @@
               </a:rPr>
               <a:t>Avant le festival</a:t>
             </a:r>
-            <a:endParaRPr lang="fr-FR" sz="2600" dirty="0"/>
-          </a:p>
-        </p:txBody>
-      </p:sp>
-      <p:sp>
-        <p:nvSpPr>
-          <p:cNvPr id="15" name="Text 9"/>
-          <p:cNvSpPr txBox="1"/>
-          <p:nvPr/>
-        </p:nvSpPr>
-        <p:spPr>
-          <a:xfrm>
-            <a:off x="822960" y="3383280"/>
-            <a:ext cx="3669487" cy="320040"/>
+            <a:endParaRPr lang="fr-FR" sz="2400" dirty="0"/>
+          </a:p>
+        </p:txBody>
+      </p:sp>
+      <p:sp>
+        <p:nvSpPr>
+          <p:cNvPr id="16" name="Text 9"/>
+          <p:cNvSpPr txBox="1"/>
+          <p:nvPr/>
+        </p:nvSpPr>
+        <p:spPr>
+          <a:xfrm>
+            <a:off x="822960" y="4526280"/>
+            <a:ext cx="3669487" cy="292608"/>
           </a:xfrm>
           <a:prstGeom prst="rect">
             <a:avLst/>
@@ -15672,27 +15772,27 @@
               <a:buNone/>
             </a:pPr>
             <a:r>
-              <a:rPr lang="fr-FR" altLang="en-US" sz="1400" b="1" dirty="0">
+              <a:rPr lang="fr-FR" altLang="en-US" sz="1300" b="1" dirty="0">
                 <a:solidFill>
                   <a:schemeClr val="accent4"/>
                 </a:solidFill>
               </a:rPr>
               <a:t>Objectif : notoriété et ventes de billets</a:t>
             </a:r>
-            <a:endParaRPr lang="fr-FR" sz="1400" dirty="0"/>
-          </a:p>
-        </p:txBody>
-      </p:sp>
-      <p:sp>
-        <p:nvSpPr>
-          <p:cNvPr id="16" name="Text 10"/>
-          <p:cNvSpPr txBox="1"/>
-          <p:nvPr/>
-        </p:nvSpPr>
-        <p:spPr>
-          <a:xfrm>
-            <a:off x="822960" y="3840480"/>
-            <a:ext cx="3669487" cy="1325880"/>
+            <a:endParaRPr lang="fr-FR" sz="1300" dirty="0"/>
+          </a:p>
+        </p:txBody>
+      </p:sp>
+      <p:sp>
+        <p:nvSpPr>
+          <p:cNvPr id="17" name="Text 10"/>
+          <p:cNvSpPr txBox="1"/>
+          <p:nvPr/>
+        </p:nvSpPr>
+        <p:spPr>
+          <a:xfrm>
+            <a:off x="822960" y="4892040"/>
+            <a:ext cx="3669487" cy="1188720"/>
           </a:xfrm>
           <a:prstGeom prst="rect">
             <a:avLst/>
@@ -15706,80 +15806,80 @@
           <a:p>
             <a:pPr marL="177800" indent="-177800">
               <a:spcAft>
-                <a:spcPts val="600"/>
+                <a:spcPts val="400"/>
               </a:spcAft>
               <a:buSzPct val="100000"/>
               <a:buChar char="•"/>
             </a:pPr>
             <a:r>
-              <a:rPr lang="fr-FR" altLang="en-US" sz="1300" dirty="0">
+              <a:rPr lang="fr-FR" altLang="en-US" sz="1250" dirty="0">
                 <a:solidFill>
                   <a:schemeClr val="accent5"/>
                 </a:solidFill>
               </a:rPr>
               <a:t>Annonce des créateurs</a:t>
             </a:r>
-            <a:endParaRPr lang="fr-FR" sz="1300" dirty="0"/>
+            <a:endParaRPr lang="fr-FR" sz="1250" dirty="0"/>
           </a:p>
           <a:p>
             <a:pPr marL="177800" indent="-177800">
               <a:spcAft>
-                <a:spcPts val="600"/>
+                <a:spcPts val="400"/>
               </a:spcAft>
               <a:buSzPct val="100000"/>
               <a:buChar char="•"/>
             </a:pPr>
             <a:r>
-              <a:rPr lang="fr-FR" altLang="en-US" sz="1300" dirty="0">
+              <a:rPr lang="fr-FR" altLang="en-US" sz="1250" dirty="0">
                 <a:solidFill>
                   <a:schemeClr val="accent5"/>
                 </a:solidFill>
               </a:rPr>
               <a:t>Compte à rebours Davido</a:t>
             </a:r>
-            <a:endParaRPr lang="fr-FR" sz="1300" dirty="0"/>
+            <a:endParaRPr lang="fr-FR" sz="1250" dirty="0"/>
           </a:p>
           <a:p>
             <a:pPr marL="177800" indent="-177800">
               <a:spcAft>
-                <a:spcPts val="600"/>
+                <a:spcPts val="400"/>
               </a:spcAft>
               <a:buSzPct val="100000"/>
               <a:buChar char="•"/>
             </a:pPr>
             <a:r>
-              <a:rPr lang="fr-FR" altLang="en-US" sz="1300" dirty="0">
+              <a:rPr lang="fr-FR" altLang="en-US" sz="1250" dirty="0">
                 <a:solidFill>
                   <a:schemeClr val="accent5"/>
                 </a:solidFill>
               </a:rPr>
               <a:t>Relances billetterie chaque semaine, liens suivis</a:t>
             </a:r>
-            <a:endParaRPr lang="fr-FR" sz="1300" dirty="0"/>
+            <a:endParaRPr lang="fr-FR" sz="1250" dirty="0"/>
           </a:p>
           <a:p>
             <a:pPr marL="177800" indent="-177800">
               <a:spcAft>
-                <a:spcPts val="600"/>
+                <a:spcPts val="400"/>
               </a:spcAft>
               <a:buSzPct val="100000"/>
               <a:buChar char="•"/>
             </a:pPr>
             <a:r>
-              <a:rPr lang="fr-FR" altLang="en-US" sz="1300" dirty="0">
+              <a:rPr lang="fr-FR" altLang="en-US" sz="1250" dirty="0">
                 <a:solidFill>
                   <a:schemeClr val="accent5"/>
                 </a:solidFill>
               </a:rPr>
               <a:t>Un dernier appel avant Noël</a:t>
             </a:r>
-            <a:endParaRPr lang="fr-FR" sz="1300" dirty="0"/>
-          </a:p>
-        </p:txBody>
-      </p:sp>
-      <p:sp>
-        <p:nvSpPr>
-          <p:cNvPr id="17" name="Shape 11"/>
+            <a:endParaRPr lang="fr-FR" sz="1250" dirty="0"/>
+          </a:p>
+        </p:txBody>
+      </p:sp>
+      <p:sp>
+        <p:nvSpPr>
+          <p:cNvPr id="18" name="Shape 11"/>
           <p:cNvSpPr/>
           <p:nvPr/>
         </p:nvSpPr>
@@ -15799,18 +15899,18 @@
       </p:sp>
       <p:sp>
         <p:nvSpPr>
-          <p:cNvPr id="18" name="Shape 12"/>
+          <p:cNvPr id="19" name="Shape 12"/>
           <p:cNvSpPr/>
           <p:nvPr/>
         </p:nvSpPr>
         <p:spPr>
           <a:xfrm>
-            <a:off x="5041087" y="2286000"/>
-            <a:ext cx="3163824" cy="2971800"/>
+            <a:off x="5041087" y="2240280"/>
+            <a:ext cx="3163824" cy="3931920"/>
           </a:xfrm>
           <a:prstGeom prst="roundRect">
             <a:avLst>
-              <a:gd name="adj" fmla="val 3077"/>
+              <a:gd name="adj" fmla="val 2890"/>
             </a:avLst>
           </a:prstGeom>
           <a:solidFill>
@@ -15819,15 +15919,39 @@
           <a:ln/>
         </p:spPr>
       </p:sp>
-      <p:sp>
-        <p:nvSpPr>
-          <p:cNvPr id="19" name="Text 13"/>
-          <p:cNvSpPr txBox="1"/>
-          <p:nvPr/>
-        </p:nvSpPr>
-        <p:spPr>
-          <a:xfrm>
-            <a:off x="5315407" y="2542032"/>
+      <p:pic>
+        <p:nvPicPr>
+          <p:cNvPr id="20" name="Photo ai_floor" descr="Illustration : un créateur se filme avec un stabilisateur au milieu de la foule">    </p:cNvPr>
+          <p:cNvPicPr>
+            <a:picLocks noChangeAspect="1"/>
+          </p:cNvPicPr>
+          <p:nvPr/>
+        </p:nvPicPr>
+        <p:blipFill>
+          <a:blip r:embed="rId5"/>
+          <a:stretch>
+            <a:fillRect/>
+          </a:stretch>
+        </p:blipFill>
+        <p:spPr>
+          <a:xfrm>
+            <a:off x="5315407" y="2487168"/>
+            <a:ext cx="2114404" cy="1188720"/>
+          </a:xfrm>
+          <a:prstGeom prst="rect">
+            <a:avLst/>
+          </a:prstGeom>
+        </p:spPr>
+      </p:pic>
+      <p:sp>
+        <p:nvSpPr>
+          <p:cNvPr id="21" name="Text 13"/>
+          <p:cNvSpPr txBox="1"/>
+          <p:nvPr/>
+        </p:nvSpPr>
+        <p:spPr>
+          <a:xfrm>
+            <a:off x="5315407" y="3822192"/>
             <a:ext cx="2615184" cy="256032"/>
           </a:xfrm>
           <a:prstGeom prst="rect">
@@ -15857,14 +15981,14 @@
       </p:sp>
       <p:sp>
         <p:nvSpPr>
-          <p:cNvPr id="20" name="Text 14"/>
-          <p:cNvSpPr txBox="1"/>
-          <p:nvPr/>
-        </p:nvSpPr>
-        <p:spPr>
-          <a:xfrm>
-            <a:off x="5315407" y="2852928"/>
-            <a:ext cx="2615184" cy="457200"/>
+          <p:cNvPr id="22" name="Text 14"/>
+          <p:cNvSpPr txBox="1"/>
+          <p:nvPr/>
+        </p:nvSpPr>
+        <p:spPr>
+          <a:xfrm>
+            <a:off x="5315407" y="4069080"/>
+            <a:ext cx="2615184" cy="411480"/>
           </a:xfrm>
           <a:prstGeom prst="rect">
             <a:avLst/>
@@ -15880,7 +16004,7 @@
               <a:buNone/>
             </a:pPr>
             <a:r>
-              <a:rPr lang="fr-FR" altLang="en-US" sz="2600" dirty="0">
+              <a:rPr lang="fr-FR" altLang="en-US" sz="2400" dirty="0">
                 <a:solidFill>
                   <a:schemeClr val="tx1"/>
                 </a:solidFill>
@@ -15890,20 +16014,20 @@
               </a:rPr>
               <a:t>Les deux soirs</a:t>
             </a:r>
-            <a:endParaRPr lang="fr-FR" sz="2600" dirty="0"/>
-          </a:p>
-        </p:txBody>
-      </p:sp>
-      <p:sp>
-        <p:nvSpPr>
-          <p:cNvPr id="21" name="Text 15"/>
-          <p:cNvSpPr txBox="1"/>
-          <p:nvPr/>
-        </p:nvSpPr>
-        <p:spPr>
-          <a:xfrm>
-            <a:off x="5315407" y="3383280"/>
-            <a:ext cx="2615184" cy="320040"/>
+            <a:endParaRPr lang="fr-FR" sz="2400" dirty="0"/>
+          </a:p>
+        </p:txBody>
+      </p:sp>
+      <p:sp>
+        <p:nvSpPr>
+          <p:cNvPr id="23" name="Text 15"/>
+          <p:cNvSpPr txBox="1"/>
+          <p:nvPr/>
+        </p:nvSpPr>
+        <p:spPr>
+          <a:xfrm>
+            <a:off x="5315407" y="4526280"/>
+            <a:ext cx="2615184" cy="292608"/>
           </a:xfrm>
           <a:prstGeom prst="rect">
             <a:avLst/>
@@ -15919,27 +16043,27 @@
               <a:buNone/>
             </a:pPr>
             <a:r>
-              <a:rPr lang="fr-FR" altLang="en-US" sz="1400" b="1" dirty="0">
+              <a:rPr lang="fr-FR" altLang="en-US" sz="1300" b="1" dirty="0">
                 <a:solidFill>
                   <a:schemeClr val="tx1"/>
                 </a:solidFill>
               </a:rPr>
               <a:t>Objectif : l’attention en direct</a:t>
             </a:r>
-            <a:endParaRPr lang="fr-FR" sz="1400" dirty="0"/>
-          </a:p>
-        </p:txBody>
-      </p:sp>
-      <p:sp>
-        <p:nvSpPr>
-          <p:cNvPr id="22" name="Text 16"/>
-          <p:cNvSpPr txBox="1"/>
-          <p:nvPr/>
-        </p:nvSpPr>
-        <p:spPr>
-          <a:xfrm>
-            <a:off x="5315407" y="3840480"/>
-            <a:ext cx="2615184" cy="1325880"/>
+            <a:endParaRPr lang="fr-FR" sz="1300" dirty="0"/>
+          </a:p>
+        </p:txBody>
+      </p:sp>
+      <p:sp>
+        <p:nvSpPr>
+          <p:cNvPr id="24" name="Text 16"/>
+          <p:cNvSpPr txBox="1"/>
+          <p:nvPr/>
+        </p:nvSpPr>
+        <p:spPr>
+          <a:xfrm>
+            <a:off x="5315407" y="4892040"/>
+            <a:ext cx="2615184" cy="1188720"/>
           </a:xfrm>
           <a:prstGeom prst="rect">
             <a:avLst/>
@@ -15953,80 +16077,80 @@
           <a:p>
             <a:pPr marL="177800" indent="-177800">
               <a:spcAft>
-                <a:spcPts val="600"/>
+                <a:spcPts val="400"/>
               </a:spcAft>
               <a:buSzPct val="100000"/>
               <a:buChar char="•"/>
             </a:pPr>
             <a:r>
-              <a:rPr lang="fr-FR" altLang="en-US" sz="1300" dirty="0">
+              <a:rPr lang="fr-FR" altLang="en-US" sz="1250" dirty="0">
                 <a:solidFill>
                   <a:schemeClr val="tx1"/>
                 </a:solidFill>
               </a:rPr>
               <a:t>Arrivées et tenues du festival</a:t>
             </a:r>
-            <a:endParaRPr lang="fr-FR" sz="1300" dirty="0"/>
+            <a:endParaRPr lang="fr-FR" sz="1250" dirty="0"/>
           </a:p>
           <a:p>
             <a:pPr marL="177800" indent="-177800">
               <a:spcAft>
-                <a:spcPts val="600"/>
+                <a:spcPts val="400"/>
               </a:spcAft>
               <a:buSzPct val="100000"/>
               <a:buChar char="•"/>
             </a:pPr>
             <a:r>
-              <a:rPr lang="fr-FR" altLang="en-US" sz="1300" dirty="0">
+              <a:rPr lang="fr-FR" altLang="en-US" sz="1250" dirty="0">
                 <a:solidFill>
                   <a:schemeClr val="tx1"/>
                 </a:solidFill>
               </a:rPr>
               <a:t>La foule filmée pendant les têtes d’affiche</a:t>
             </a:r>
-            <a:endParaRPr lang="fr-FR" sz="1300" dirty="0"/>
+            <a:endParaRPr lang="fr-FR" sz="1250" dirty="0"/>
           </a:p>
           <a:p>
             <a:pPr marL="177800" indent="-177800">
               <a:spcAft>
-                <a:spcPts val="600"/>
+                <a:spcPts val="400"/>
               </a:spcAft>
               <a:buSzPct val="100000"/>
               <a:buChar char="•"/>
             </a:pPr>
             <a:r>
-              <a:rPr lang="fr-FR" altLang="en-US" sz="1300" dirty="0">
+              <a:rPr lang="fr-FR" altLang="en-US" sz="1250" dirty="0">
                 <a:solidFill>
                   <a:schemeClr val="tx1"/>
                 </a:solidFill>
               </a:rPr>
               <a:t>Activations sponsors à l’image</a:t>
             </a:r>
-            <a:endParaRPr lang="fr-FR" sz="1300" dirty="0"/>
+            <a:endParaRPr lang="fr-FR" sz="1250" dirty="0"/>
           </a:p>
           <a:p>
             <a:pPr marL="177800" indent="-177800">
               <a:spcAft>
-                <a:spcPts val="600"/>
+                <a:spcPts val="400"/>
               </a:spcAft>
               <a:buSzPct val="100000"/>
               <a:buChar char="•"/>
             </a:pPr>
             <a:r>
-              <a:rPr lang="fr-FR" altLang="en-US" sz="1300" dirty="0">
+              <a:rPr lang="fr-FR" altLang="en-US" sz="1250" dirty="0">
                 <a:solidFill>
                   <a:schemeClr val="tx1"/>
                 </a:solidFill>
               </a:rPr>
               <a:t>Un récap chaque soir</a:t>
             </a:r>
-            <a:endParaRPr lang="fr-FR" sz="1300" dirty="0"/>
-          </a:p>
-        </p:txBody>
-      </p:sp>
-      <p:sp>
-        <p:nvSpPr>
-          <p:cNvPr id="23" name="Shape 17"/>
+            <a:endParaRPr lang="fr-FR" sz="1250" dirty="0"/>
+          </a:p>
+        </p:txBody>
+      </p:sp>
+      <p:sp>
+        <p:nvSpPr>
+          <p:cNvPr id="25" name="Shape 17"/>
           <p:cNvSpPr/>
           <p:nvPr/>
         </p:nvSpPr>
@@ -16046,18 +16170,18 @@
       </p:sp>
       <p:sp>
         <p:nvSpPr>
-          <p:cNvPr id="24" name="Shape 18"/>
+          <p:cNvPr id="26" name="Shape 18"/>
           <p:cNvSpPr/>
           <p:nvPr/>
         </p:nvSpPr>
         <p:spPr>
           <a:xfrm>
-            <a:off x="8479231" y="2286000"/>
-            <a:ext cx="3163824" cy="2971800"/>
+            <a:off x="8479231" y="2240280"/>
+            <a:ext cx="3163824" cy="3931920"/>
           </a:xfrm>
           <a:prstGeom prst="roundRect">
             <a:avLst>
-              <a:gd name="adj" fmla="val 3077"/>
+              <a:gd name="adj" fmla="val 2890"/>
             </a:avLst>
           </a:prstGeom>
           <a:solidFill>
@@ -16066,15 +16190,39 @@
           <a:ln/>
         </p:spPr>
       </p:sp>
-      <p:sp>
-        <p:nvSpPr>
-          <p:cNvPr id="25" name="Text 19"/>
-          <p:cNvSpPr txBox="1"/>
-          <p:nvPr/>
-        </p:nvSpPr>
-        <p:spPr>
-          <a:xfrm>
-            <a:off x="8753551" y="2542032"/>
+      <p:pic>
+        <p:nvPicPr>
+          <p:cNvPr id="27" name="Photo ai_afterglow" descr="Illustration : une créatrice monte un reel récap sur un balcon, le lendemain matin">    </p:cNvPr>
+          <p:cNvPicPr>
+            <a:picLocks noChangeAspect="1"/>
+          </p:cNvPicPr>
+          <p:nvPr/>
+        </p:nvPicPr>
+        <p:blipFill>
+          <a:blip r:embed="rId6"/>
+          <a:stretch>
+            <a:fillRect/>
+          </a:stretch>
+        </p:blipFill>
+        <p:spPr>
+          <a:xfrm>
+            <a:off x="8753551" y="2487168"/>
+            <a:ext cx="1559321" cy="1188720"/>
+          </a:xfrm>
+          <a:prstGeom prst="rect">
+            <a:avLst/>
+          </a:prstGeom>
+        </p:spPr>
+      </p:pic>
+      <p:sp>
+        <p:nvSpPr>
+          <p:cNvPr id="28" name="Text 19"/>
+          <p:cNvSpPr txBox="1"/>
+          <p:nvPr/>
+        </p:nvSpPr>
+        <p:spPr>
+          <a:xfrm>
+            <a:off x="8753551" y="3822192"/>
             <a:ext cx="2615184" cy="256032"/>
           </a:xfrm>
           <a:prstGeom prst="rect">
@@ -16104,14 +16252,14 @@
       </p:sp>
       <p:sp>
         <p:nvSpPr>
-          <p:cNvPr id="26" name="Text 20"/>
-          <p:cNvSpPr txBox="1"/>
-          <p:nvPr/>
-        </p:nvSpPr>
-        <p:spPr>
-          <a:xfrm>
-            <a:off x="8753551" y="2852928"/>
-            <a:ext cx="2615184" cy="457200"/>
+          <p:cNvPr id="29" name="Text 20"/>
+          <p:cNvSpPr txBox="1"/>
+          <p:nvPr/>
+        </p:nvSpPr>
+        <p:spPr>
+          <a:xfrm>
+            <a:off x="8753551" y="4069080"/>
+            <a:ext cx="2615184" cy="411480"/>
           </a:xfrm>
           <a:prstGeom prst="rect">
             <a:avLst/>
@@ -16127,7 +16275,7 @@
               <a:buNone/>
             </a:pPr>
             <a:r>
-              <a:rPr lang="fr-FR" altLang="en-US" sz="2600" dirty="0">
+              <a:rPr lang="fr-FR" altLang="en-US" sz="2400" dirty="0">
                 <a:solidFill>
                   <a:schemeClr val="bg1"/>
                 </a:solidFill>
@@ -16137,20 +16285,20 @@
               </a:rPr>
               <a:t>Après le festival</a:t>
             </a:r>
-            <a:endParaRPr lang="fr-FR" sz="2600" dirty="0"/>
-          </a:p>
-        </p:txBody>
-      </p:sp>
-      <p:sp>
-        <p:nvSpPr>
-          <p:cNvPr id="27" name="Text 21"/>
-          <p:cNvSpPr txBox="1"/>
-          <p:nvPr/>
-        </p:nvSpPr>
-        <p:spPr>
-          <a:xfrm>
-            <a:off x="8753551" y="3383280"/>
-            <a:ext cx="2615184" cy="320040"/>
+            <a:endParaRPr lang="fr-FR" sz="2400" dirty="0"/>
+          </a:p>
+        </p:txBody>
+      </p:sp>
+      <p:sp>
+        <p:nvSpPr>
+          <p:cNvPr id="30" name="Text 21"/>
+          <p:cNvSpPr txBox="1"/>
+          <p:nvPr/>
+        </p:nvSpPr>
+        <p:spPr>
+          <a:xfrm>
+            <a:off x="8753551" y="4526280"/>
+            <a:ext cx="2615184" cy="292608"/>
           </a:xfrm>
           <a:prstGeom prst="rect">
             <a:avLst/>
@@ -16166,27 +16314,27 @@
               <a:buNone/>
             </a:pPr>
             <a:r>
-              <a:rPr lang="fr-FR" altLang="en-US" sz="1400" b="1" dirty="0">
+              <a:rPr lang="fr-FR" altLang="en-US" sz="1300" b="1" dirty="0">
                 <a:solidFill>
                   <a:schemeClr val="accent4"/>
                 </a:solidFill>
               </a:rPr>
               <a:t>Objectif : faire durer l’histoire</a:t>
             </a:r>
-            <a:endParaRPr lang="fr-FR" sz="1400" dirty="0"/>
-          </a:p>
-        </p:txBody>
-      </p:sp>
-      <p:sp>
-        <p:nvSpPr>
-          <p:cNvPr id="28" name="Text 22"/>
-          <p:cNvSpPr txBox="1"/>
-          <p:nvPr/>
-        </p:nvSpPr>
-        <p:spPr>
-          <a:xfrm>
-            <a:off x="8753551" y="3840480"/>
-            <a:ext cx="2615184" cy="1325880"/>
+            <a:endParaRPr lang="fr-FR" sz="1300" dirty="0"/>
+          </a:p>
+        </p:txBody>
+      </p:sp>
+      <p:sp>
+        <p:nvSpPr>
+          <p:cNvPr id="31" name="Text 22"/>
+          <p:cNvSpPr txBox="1"/>
+          <p:nvPr/>
+        </p:nvSpPr>
+        <p:spPr>
+          <a:xfrm>
+            <a:off x="8753551" y="4892040"/>
+            <a:ext cx="2615184" cy="1188720"/>
           </a:xfrm>
           <a:prstGeom prst="rect">
             <a:avLst/>
@@ -16200,133 +16348,74 @@
           <a:p>
             <a:pPr marL="177800" indent="-177800">
               <a:spcAft>
-                <a:spcPts val="600"/>
+                <a:spcPts val="400"/>
               </a:spcAft>
               <a:buSzPct val="100000"/>
               <a:buChar char="•"/>
             </a:pPr>
             <a:r>
-              <a:rPr lang="fr-FR" altLang="en-US" sz="1300" dirty="0">
+              <a:rPr lang="fr-FR" altLang="en-US" sz="1250" dirty="0">
                 <a:solidFill>
                   <a:schemeClr val="accent5"/>
                 </a:solidFill>
               </a:rPr>
               <a:t>Reels récap et meilleurs moments</a:t>
             </a:r>
-            <a:endParaRPr lang="fr-FR" sz="1300" dirty="0"/>
+            <a:endParaRPr lang="fr-FR" sz="1250" dirty="0"/>
           </a:p>
           <a:p>
             <a:pPr marL="177800" indent="-177800">
               <a:spcAft>
-                <a:spcPts val="600"/>
+                <a:spcPts val="400"/>
               </a:spcAft>
               <a:buSzPct val="100000"/>
               <a:buChar char="•"/>
             </a:pPr>
             <a:r>
-              <a:rPr lang="fr-FR" altLang="en-US" sz="1300" dirty="0">
+              <a:rPr lang="fr-FR" altLang="en-US" sz="1250" dirty="0">
                 <a:solidFill>
                   <a:schemeClr val="accent5"/>
                 </a:solidFill>
               </a:rPr>
               <a:t>Remerciements des créateurs</a:t>
             </a:r>
-            <a:endParaRPr lang="fr-FR" sz="1300" dirty="0"/>
+            <a:endParaRPr lang="fr-FR" sz="1250" dirty="0"/>
           </a:p>
           <a:p>
             <a:pPr marL="177800" indent="-177800">
               <a:spcAft>
-                <a:spcPts val="600"/>
+                <a:spcPts val="400"/>
               </a:spcAft>
               <a:buSzPct val="100000"/>
               <a:buChar char="•"/>
             </a:pPr>
             <a:r>
-              <a:rPr lang="fr-FR" altLang="en-US" sz="1300" dirty="0">
+              <a:rPr lang="fr-FR" altLang="en-US" sz="1250" dirty="0">
                 <a:solidFill>
                   <a:schemeClr val="accent5"/>
                 </a:solidFill>
               </a:rPr>
-              <a:t>Résultats partagés avec fans et partenaires</a:t>
-            </a:r>
-            <a:endParaRPr lang="fr-FR" sz="1300" dirty="0"/>
+              <a:t>Résultats aux partenaires</a:t>
+            </a:r>
+            <a:endParaRPr lang="fr-FR" sz="1250" dirty="0"/>
           </a:p>
           <a:p>
             <a:pPr marL="177800" indent="-177800">
               <a:spcAft>
-                <a:spcPts val="600"/>
+                <a:spcPts val="400"/>
               </a:spcAft>
               <a:buSzPct val="100000"/>
               <a:buChar char="•"/>
             </a:pPr>
             <a:r>
-              <a:rPr lang="fr-FR" altLang="en-US" sz="1300" dirty="0">
+              <a:rPr lang="fr-FR" altLang="en-US" sz="1250" dirty="0">
                 <a:solidFill>
                   <a:schemeClr val="accent5"/>
                 </a:solidFill>
               </a:rPr>
-              <a:t>Une date 2027 à retenir, si prévue</a:t>
-            </a:r>
-            <a:endParaRPr lang="fr-FR" sz="1300" dirty="0"/>
-          </a:p>
-        </p:txBody>
-      </p:sp>
-      <p:sp>
-        <p:nvSpPr>
-          <p:cNvPr id="29" name="Shape 23"/>
-          <p:cNvSpPr/>
-          <p:nvPr/>
-        </p:nvSpPr>
-        <p:spPr>
-          <a:xfrm>
-            <a:off x="548640" y="5532120"/>
-            <a:ext cx="54864" cy="548640"/>
-          </a:xfrm>
-          <a:prstGeom prst="rect">
-            <a:avLst/>
-          </a:prstGeom>
-          <a:solidFill>
-            <a:schemeClr val="accent1"/>
-          </a:solidFill>
-          <a:ln/>
-        </p:spPr>
-      </p:sp>
-      <p:sp>
-        <p:nvSpPr>
-          <p:cNvPr id="30" name="Text 24"/>
-          <p:cNvSpPr txBox="1"/>
-          <p:nvPr/>
-        </p:nvSpPr>
-        <p:spPr>
-          <a:xfrm>
-            <a:off x="777240" y="5532120"/>
-            <a:ext cx="10789920" cy="548640"/>
-          </a:xfrm>
-          <a:prstGeom prst="rect">
-            <a:avLst/>
-          </a:prstGeom>
-          <a:noFill/>
-          <a:ln/>
-        </p:spPr>
-        <p:txBody>
-          <a:bodyPr wrap="square" lIns="0" tIns="0" rIns="0" bIns="0" rtlCol="0" anchor="ctr"/>
-          <a:lstStyle/>
-          <a:p>
-            <a:pPr indent="0" marL="0">
-              <a:buNone/>
-            </a:pPr>
-            <a:r>
-              <a:rPr lang="fr-FR" altLang="en-US" sz="2000" dirty="0">
-                <a:solidFill>
-                  <a:schemeClr val="bg1"/>
-                </a:solidFill>
-                <a:latin typeface="+mj-lt" pitchFamily="34" charset="0"/>
-                <a:ea typeface="+mj-lt" pitchFamily="34" charset="-122"/>
-                <a:cs typeface="+mj-lt" pitchFamily="34" charset="-120"/>
-              </a:rPr>
-              <a:t>Chaque vague suit un seul calendrier, validé par le festival avant toute publication.</a:t>
-            </a:r>
-            <a:endParaRPr lang="fr-FR" sz="2000" dirty="0"/>
+              <a:t>Une date 2027 à retenir</a:t>
+            </a:r>
+            <a:endParaRPr lang="fr-FR" sz="1250" dirty="0"/>
           </a:p>
         </p:txBody>
       </p:sp>
@@ -19861,31 +19950,9 @@
           </a:p>
         </p:txBody>
       </p:sp>
-      <p:sp>
-        <p:nvSpPr>
-          <p:cNvPr id="18" name="Shape 13"/>
-          <p:cNvSpPr/>
-          <p:nvPr/>
-        </p:nvSpPr>
-        <p:spPr>
-          <a:xfrm>
-            <a:off x="7452360" y="1783080"/>
-            <a:ext cx="4190695" cy="4251960"/>
-          </a:xfrm>
-          <a:prstGeom prst="roundRect">
-            <a:avLst>
-              <a:gd name="adj" fmla="val 2182"/>
-            </a:avLst>
-          </a:prstGeom>
-          <a:solidFill>
-            <a:schemeClr val="tx1"/>
-          </a:solidFill>
-          <a:ln/>
-        </p:spPr>
-      </p:sp>
       <p:pic>
         <p:nvPicPr>
-          <p:cNvPr id="19" name="Image 2" descr="Mother Africa Festival">    </p:cNvPr>
+          <p:cNvPr id="18" name="Photo ai_pass" descr="Illustration : un pass d’accréditation créateur Mother Africa Festival, sur son cordon">    </p:cNvPr>
           <p:cNvPicPr>
             <a:picLocks noChangeAspect="1"/>
           </p:cNvPicPr>
@@ -19899,8 +19966,8 @@
         </p:blipFill>
         <p:spPr>
           <a:xfrm>
-            <a:off x="8548974" y="2240280"/>
-            <a:ext cx="1997467" cy="1417320"/>
+            <a:off x="7452360" y="1783080"/>
+            <a:ext cx="4190695" cy="3143021"/>
           </a:xfrm>
           <a:prstGeom prst="rect">
             <a:avLst/>
@@ -19909,43 +19976,29 @@
       </p:pic>
       <p:sp>
         <p:nvSpPr>
-          <p:cNvPr id="20" name="Text 14"/>
-          <p:cNvSpPr txBox="1"/>
-          <p:nvPr/>
-        </p:nvSpPr>
-        <p:spPr>
-          <a:xfrm>
-            <a:off x="7452360" y="3749040"/>
-            <a:ext cx="4190695" cy="548640"/>
-          </a:xfrm>
-          <a:prstGeom prst="rect">
-            <a:avLst/>
-          </a:prstGeom>
-          <a:noFill/>
-          <a:ln/>
-        </p:spPr>
-        <p:txBody>
-          <a:bodyPr wrap="square" lIns="0" tIns="0" rIns="0" bIns="0" rtlCol="0" anchor="ctr"/>
-          <a:lstStyle/>
-          <a:p>
-            <a:pPr algn="ctr" indent="0" marL="0">
-              <a:buNone/>
-            </a:pPr>
-            <a:r>
-              <a:rPr lang="fr-FR" altLang="en-US" sz="3000" dirty="0">
-                <a:solidFill>
-                  <a:schemeClr val="accent1"/>
-                </a:solidFill>
-              </a:rPr>
-              <a:t>×</a:t>
-            </a:r>
-            <a:endParaRPr lang="fr-FR" sz="3000" dirty="0"/>
-          </a:p>
-        </p:txBody>
+          <p:cNvPr id="19" name="Shape 13"/>
+          <p:cNvSpPr/>
+          <p:nvPr/>
+        </p:nvSpPr>
+        <p:spPr>
+          <a:xfrm>
+            <a:off x="7452360" y="5063261"/>
+            <a:ext cx="4190695" cy="971779"/>
+          </a:xfrm>
+          <a:prstGeom prst="roundRect">
+            <a:avLst>
+              <a:gd name="adj" fmla="val 7528"/>
+            </a:avLst>
+          </a:prstGeom>
+          <a:solidFill>
+            <a:schemeClr val="tx1"/>
+          </a:solidFill>
+          <a:ln/>
+        </p:spPr>
       </p:sp>
       <p:pic>
         <p:nvPicPr>
-          <p:cNvPr id="21" name="Image 3" descr="AToure Management &amp; Consulting">    </p:cNvPr>
+          <p:cNvPr id="20" name="Image 3" descr="Mother Africa Festival">    </p:cNvPr>
           <p:cNvPicPr>
             <a:picLocks noChangeAspect="1"/>
           </p:cNvPicPr>
@@ -19959,8 +20012,8 @@
         </p:blipFill>
         <p:spPr>
           <a:xfrm>
-            <a:off x="7993228" y="4480560"/>
-            <a:ext cx="3108960" cy="497434"/>
+            <a:off x="7726680" y="5265687"/>
+            <a:ext cx="798987" cy="566928"/>
           </a:xfrm>
           <a:prstGeom prst="rect">
             <a:avLst/>
@@ -19969,40 +20022,64 @@
       </p:pic>
       <p:sp>
         <p:nvSpPr>
-          <p:cNvPr id="22" name="Text 15"/>
-          <p:cNvSpPr txBox="1"/>
-          <p:nvPr/>
-        </p:nvSpPr>
-        <p:spPr>
-          <a:xfrm>
-            <a:off x="7452360" y="5349240"/>
-            <a:ext cx="4190695" cy="274320"/>
-          </a:xfrm>
-          <a:prstGeom prst="rect">
-            <a:avLst/>
-          </a:prstGeom>
-          <a:noFill/>
-          <a:ln/>
-        </p:spPr>
-        <p:txBody>
-          <a:bodyPr wrap="square" lIns="0" tIns="0" rIns="0" bIns="0" rtlCol="0" anchor="t"/>
+          <p:cNvPr id="21" name="Text 14"/>
+          <p:cNvSpPr txBox="1"/>
+          <p:nvPr/>
+        </p:nvSpPr>
+        <p:spPr>
+          <a:xfrm>
+            <a:off x="8595360" y="5063261"/>
+            <a:ext cx="365760" cy="971779"/>
+          </a:xfrm>
+          <a:prstGeom prst="rect">
+            <a:avLst/>
+          </a:prstGeom>
+          <a:noFill/>
+          <a:ln/>
+        </p:spPr>
+        <p:txBody>
+          <a:bodyPr wrap="square" lIns="0" tIns="0" rIns="0" bIns="0" rtlCol="0" anchor="ctr"/>
           <a:lstStyle/>
           <a:p>
             <a:pPr algn="ctr" indent="0" marL="0">
               <a:buNone/>
             </a:pPr>
             <a:r>
-              <a:rPr lang="fr-FR" altLang="en-US" sz="1100" dirty="0">
-                <a:solidFill>
-                  <a:schemeClr val="accent4"/>
-                </a:solidFill>
-              </a:rPr>
-              <a:t>27 et 28 décembre 2026  ·  Marcory Zone 4</a:t>
-            </a:r>
-            <a:endParaRPr lang="fr-FR" sz="1100" dirty="0"/>
-          </a:p>
-        </p:txBody>
-      </p:sp>
+              <a:rPr lang="fr-FR" altLang="en-US" sz="2000" dirty="0">
+                <a:solidFill>
+                  <a:schemeClr val="accent1"/>
+                </a:solidFill>
+              </a:rPr>
+              <a:t>×</a:t>
+            </a:r>
+            <a:endParaRPr lang="fr-FR" sz="2000" dirty="0"/>
+          </a:p>
+        </p:txBody>
+      </p:sp>
+      <p:pic>
+        <p:nvPicPr>
+          <p:cNvPr id="22" name="Image 4" descr="AToure Management &amp; Consulting">    </p:cNvPr>
+          <p:cNvPicPr>
+            <a:picLocks noChangeAspect="1"/>
+          </p:cNvPicPr>
+          <p:nvPr/>
+        </p:nvPicPr>
+        <p:blipFill>
+          <a:blip r:embed="rId5"/>
+          <a:stretch>
+            <a:fillRect/>
+          </a:stretch>
+        </p:blipFill>
+        <p:spPr>
+          <a:xfrm>
+            <a:off x="9098280" y="5366271"/>
+            <a:ext cx="2286000" cy="365760"/>
+          </a:xfrm>
+          <a:prstGeom prst="rect">
+            <a:avLst/>
+          </a:prstGeom>
+        </p:spPr>
+      </p:pic>
       <p:sp>
         <p:nvSpPr>
           <p:cNvPr id="25" name="Slide Number Placeholder 0"/>

--- a/proposition-deck/AToure Mother Africa Festival Proposition.pptx
+++ b/proposition-deck/AToure Mother Africa Festival Proposition.pptx
@@ -16,10 +16,9 @@
     <p:sldId id="264" r:id="rId10"/>
     <p:sldId id="265" r:id="rId11"/>
     <p:sldId id="266" r:id="rId12"/>
-    <p:sldId id="267" r:id="rId13"/>
   </p:sldIdLst>
   <p:notesMasterIdLst>
-    <p:notesMasterId r:id="rId14"/>
+    <p:notesMasterId r:id="rId13"/>
   </p:notesMasterIdLst>
   <p:sldSz cx="12192000" cy="6858000"/>
   <p:notesSz cx="6858000" cy="12192000"/>
@@ -118,52 +117,47 @@
   <p:extLst>
     <p:ext uri="{521415D9-36F7-43E2-AB2F-B90AF26B5E84}">
       <p14:sectionLst xmlns:p14="http://schemas.microsoft.com/office/powerpoint/2010/main">
-        <p14:section name="Ouverture" id="{4443d6f0-7e64-7ed4-c918-6e75ea2fc1ed}">
+        <p14:section name="Ouverture" id="{08a9d837-92de-7623-a0ec-bc67f42d092a}">
           <p14:sldIdLst>
             <p14:sldId id="256"/>
           </p14:sldIdLst>
         </p14:section>
-        <p14:section name="Où en est le festival" id="{bd6d38eb-6d5d-aed3-30f8-5b15558f47f8}">
+        <p14:section name="Où en est le festival" id="{79c5a66e-b3e3-de1a-99ea-4c88f45c8122}">
           <p14:sldIdLst>
             <p14:sldId id="257"/>
             <p14:sldId id="258"/>
           </p14:sldIdLst>
         </p14:section>
-        <p14:section name="La réponse AToure" id="{37447549-9151-663f-4c70-ecf3692fcbc3}">
+        <p14:section name="La réponse AToure" id="{81344f10-5ed3-341d-2d46-ab1ce4ae3bb8}">
           <p14:sldIdLst>
             <p14:sldId id="259"/>
             <p14:sldId id="260"/>
           </p14:sldIdLst>
         </p14:section>
-        <p14:section name="Visibilité" id="{5a8f4a07-50c6-a587-744a-52dea6b902ef}">
+        <p14:section name="Visibilité" id="{793ef9b3-8d9f-0dfa-6d85-5cc63085888d}">
           <p14:sldIdLst>
             <p14:sldId id="261"/>
             <p14:sldId id="262"/>
           </p14:sldIdLst>
         </p14:section>
-        <p14:section name="Le rapport de visibilité" id="{0eb55174-0d05-30a1-1b01-a062359fbaaf}">
+        <p14:section name="Le rapport de visibilité" id="{6ce68016-12d6-d306-1a18-1506c25aabf2}">
           <p14:sldIdLst>
             <p14:sldId id="263"/>
           </p14:sldIdLst>
         </p14:section>
-        <p14:section name="La proposition" id="{f3912270-df46-bd6d-f08a-55944bbc0000}">
+        <p14:section name="La proposition" id="{7bd4eac2-8e3d-8423-90fb-5672eeb720e1}">
           <p14:sldIdLst>
             <p14:sldId id="264"/>
           </p14:sldIdLst>
         </p14:section>
-        <p14:section name="Références" id="{7322c26c-e6e6-88c5-9232-59c0ecae736f}">
+        <p14:section name="Références" id="{87a5c1d9-24d7-b3fa-7bab-a07cb6e06b16}">
           <p14:sldIdLst>
             <p14:sldId id="265"/>
           </p14:sldIdLst>
         </p14:section>
-        <p14:section name="La demande" id="{669cef29-f193-2b47-886f-96b765ad2403}">
+        <p14:section name="La demande" id="{32ad4d10-b2a4-3285-9bf1-1fdbd224e463}">
           <p14:sldIdLst>
             <p14:sldId id="266"/>
-          </p14:sldIdLst>
-        </p14:section>
-        <p14:section name="Annexe" id="{0a60a166-7f39-f6bc-60ac-54f30a100128}">
-          <p14:sldIdLst>
-            <p14:sldId id="267"/>
           </p14:sldIdLst>
         </p14:section>
       </p14:sectionLst>
@@ -658,7 +652,7 @@
           <a:p>
             <a:r>
               <a:rPr lang="en-US" dirty="0"/>
-              <a:t>Ce n’est pas une capacité nouvelle. À Abidjan, AToure a monté l’opération IShowSpeed à partir de zéro. Au Maroc, elle a livré la révélation de la mascotte de la CAN avec la CAF et la Fédération Royale Marocaine de Football. La tournée Ashton Hall a couvert cinq pays, gérée de bout en bout.</a:t>
+              <a:t>Ce n’est pas une capacité nouvelle. En Côte d’Ivoire, AToure a monté l’opération IShowSpeed à partir de zéro, en relation directe avec le ministre du Tourisme. Au Maroc, elle a livré la révélation de la mascotte lors de la finale de la CAN avec la CAF et la Fédération Royale Marocaine de Football. L’Ashton Hall Africa Tour a couvert cinq pays, gérés de bout en bout : Ghana, Cameroun, Nigeria, Bénin et Rwanda.</a:t>
             </a:r>
             <a:endParaRPr lang="en-US" dirty="0"/>
           </a:p>
@@ -746,7 +740,7 @@
           <a:p>
             <a:r>
               <a:rPr lang="en-US" dirty="0"/>
-              <a:t>Concluez ici. Pour être prêts le 27 décembre, le travail commence le lundi 2 novembre. Quatre étapes : valider le périmètre et les objectifs cette semaine, approuver la sélection de créateurs avant le 13 novembre, créateurs engagés et briefés avant le 20 novembre, premiers contenus en ligne à partir du 23 novembre. N’allez pas plus loin que cette diapositive : laissez la demande faire son effet, et laissez l’équipe de Mother Africa répondre.</a:t>
+              <a:t>Concluez ici. Quatre étapes : valider le périmètre et fixer les objectifs, approuver la sélection de créateurs, engager et briefer les créateurs, puis mettre en ligne les premiers contenus. N’allez pas plus loin que cette diapositive : laissez la demande faire son effet, et laissez l’équipe de Mother Africa répondre.</a:t>
             </a:r>
             <a:endParaRPr lang="en-US" dirty="0"/>
           </a:p>
@@ -770,94 +764,6 @@
             <a:fld id="{F7021451-1387-4CA6-816F-3879F97B5CBC}" type="slidenum">
               <a:rPr lang="en-US"/>
               <a:t>11</a:t>
-            </a:fld>
-            <a:endParaRPr lang="en-US"/>
-          </a:p>
-        </p:txBody>
-      </p:sp>
-    </p:spTree>
-    <p:extLst>
-      <p:ext uri="{BB962C8B-B14F-4D97-AF65-F5344CB8AC3E}">
-        <p14:creationId xmlns:p14="http://schemas.microsoft.com/office/powerpoint/2010/main" val="1024086991"/>
-      </p:ext>
-    </p:extLst>
-  </p:cSld>
-  <p:clrMapOvr>
-    <a:masterClrMapping/>
-  </p:clrMapOvr>
-</p:notes>
-</file>
-
-<file path=ppt/notesSlides/notesSlide12.xml><?xml version="1.0" encoding="utf-8"?>
-<p:notes xmlns:a="http://schemas.openxmlformats.org/drawingml/2006/main" xmlns:r="http://schemas.openxmlformats.org/officeDocument/2006/relationships" xmlns:p="http://schemas.openxmlformats.org/presentationml/2006/main">
-  <p:cSld>
-    <p:spTree>
-      <p:nvGrpSpPr>
-        <p:cNvPr id="1" name=""/>
-        <p:cNvGrpSpPr/>
-        <p:nvPr/>
-      </p:nvGrpSpPr>
-      <p:grpSpPr>
-        <a:xfrm>
-          <a:off x="0" y="0"/>
-          <a:ext cx="0" cy="0"/>
-          <a:chOff x="0" y="0"/>
-          <a:chExt cx="0" cy="0"/>
-        </a:xfrm>
-      </p:grpSpPr>
-      <p:sp>
-        <p:nvSpPr>
-          <p:cNvPr id="2" name="Slide Image Placeholder 1"/>
-          <p:cNvSpPr>
-            <a:spLocks noGrp="1" noRot="1" noChangeAspect="1"/>
-          </p:cNvSpPr>
-          <p:nvPr>
-            <p:ph type="sldImg"/>
-          </p:nvPr>
-        </p:nvSpPr>
-        <p:spPr/>
-      </p:sp>
-      <p:sp>
-        <p:nvSpPr>
-          <p:cNvPr id="3" name="Notes Placeholder 2"/>
-          <p:cNvSpPr>
-            <a:spLocks noGrp="1"/>
-          </p:cNvSpPr>
-          <p:nvPr>
-            <p:ph type="body" idx="1"/>
-          </p:nvPr>
-        </p:nvSpPr>
-        <p:spPr/>
-        <p:txBody>
-          <a:bodyPr/>
-          <a:lstStyle/>
-          <a:p>
-            <a:r>
-              <a:rPr lang="en-US" dirty="0"/>
-              <a:t>La page 2 de l’exemple de rapport, pour montrer le détail derrière les chiffres clés : chaque créateur avec ses posts, vues, interactions et clics billetterie, d’où venait le public, et ce que chaque partenaire a reçu. Les chiffres sont fictifs et correspondent à la page 1 ; ce ne sont pas des prévisions. Le rapport complet liste aussi chaque publication avec son lien et son horaire, et se termine par des recommandations pour l’édition suivante.</a:t>
-            </a:r>
-            <a:endParaRPr lang="en-US" dirty="0"/>
-          </a:p>
-        </p:txBody>
-      </p:sp>
-      <p:sp>
-        <p:nvSpPr>
-          <p:cNvPr id="4" name="Slide Number Placeholder 3"/>
-          <p:cNvSpPr>
-            <a:spLocks noGrp="1"/>
-          </p:cNvSpPr>
-          <p:nvPr>
-            <p:ph type="sldNum" sz="quarter" idx="10"/>
-          </p:nvPr>
-        </p:nvSpPr>
-        <p:spPr/>
-        <p:txBody>
-          <a:bodyPr/>
-          <a:lstStyle/>
-          <a:p>
-            <a:fld id="{F7021451-1387-4CA6-816F-3879F97B5CBC}" type="slidenum">
-              <a:rPr lang="en-US"/>
-              <a:t>12</a:t>
             </a:fld>
             <a:endParaRPr lang="en-US"/>
           </a:p>
@@ -1450,7 +1356,7 @@
           <a:p>
             <a:r>
               <a:rPr lang="en-US" dirty="0"/>
-              <a:t>Trois dates fixes. Un point hebdomadaire d’une page pendant la montée en puissance, pour concentrer l’effort sur les créateurs qui performent. Un point 48 heures après le festival : qui a publié, où, et selon quel brief. Le rapport complet au 14e jour, le 11 janvier 2027, en PDF pour la direction et les sponsors, avec une version web. La page de droite est un exemple de mise en page : ses chiffres sont fictifs, pour montrer le format, et ne sont pas une prévision pour le festival.</a:t>
+              <a:t>Trois points fixes. Chaque publication des créateurs pendant la montée en puissance est suivie dès sa mise en ligne, pour que le rapport couvre les semaines avant le festival, pas seulement les deux soirs. Un point 48 heures après le festival : qui a publié, où, et selon quel brief. Le rapport complet au 14e jour, le 11 janvier 2027, en PDF pour la direction et les sponsors, avec une version web. La page de droite est un exemple de mise en page : ses chiffres sont fictifs, pour montrer le format, et ne sont pas une prévision pour le festival.</a:t>
             </a:r>
             <a:endParaRPr lang="en-US" dirty="0"/>
           </a:p>
@@ -1538,7 +1444,7 @@
           <a:p>
             <a:r>
               <a:rPr lang="en-US" dirty="0"/>
-              <a:t>C’est un essai, pas un engagement long. Une édition : AToure gère les créateurs et livre un rapport complet à date fixe. L’essai est ce qui ouvre la discussion sur 2027. Il n’y a volontairement aucun prix sur cette diapositive : le périmètre et les honoraires se fixent une fois que le festival dit oui.</a:t>
+              <a:t>C’est un essai, pas un engagement long. Si le festival travaille déjà avec des créateurs, ils restent : AToure les gère sur le terrain avec les nouveaux, met chaque créateur sous contrat avec des livrables pour l’événement, suit chaque publication dès l’avant festival et livre un rapport complet à date fixe. L’essai est ce qui ouvre la discussion sur 2027. Il n’y a volontairement aucun prix sur cette diapositive : le périmètre et les honoraires se fixent une fois que le festival dit oui.</a:t>
             </a:r>
             <a:endParaRPr lang="en-US" dirty="0"/>
           </a:p>
@@ -3306,43 +3212,7 @@
       </p:sp>
       <p:sp>
         <p:nvSpPr>
-          <p:cNvPr id="12" name="Text 4"/>
-          <p:cNvSpPr txBox="1"/>
-          <p:nvPr/>
-        </p:nvSpPr>
-        <p:spPr>
-          <a:xfrm>
-            <a:off x="548640" y="5138928"/>
-            <a:ext cx="4480560" cy="274320"/>
-          </a:xfrm>
-          <a:prstGeom prst="rect">
-            <a:avLst/>
-          </a:prstGeom>
-          <a:noFill/>
-          <a:ln/>
-        </p:spPr>
-        <p:txBody>
-          <a:bodyPr wrap="square" lIns="0" tIns="0" rIns="0" bIns="0" rtlCol="0" anchor="t"/>
-          <a:lstStyle/>
-          <a:p>
-            <a:pPr indent="0" marL="0">
-              <a:buNone/>
-            </a:pPr>
-            <a:r>
-              <a:rPr lang="fr-FR" altLang="en-US" sz="1500" b="1" dirty="0">
-                <a:solidFill>
-                  <a:schemeClr val="accent4"/>
-                </a:solidFill>
-              </a:rPr>
-              <a:t>27 et 28 décembre 2026, Marcory Zone 4, Abidjan.</a:t>
-            </a:r>
-            <a:endParaRPr lang="fr-FR" sz="1500" dirty="0"/>
-          </a:p>
-        </p:txBody>
-      </p:sp>
-      <p:sp>
-        <p:nvSpPr>
-          <p:cNvPr id="13" name="Shape 5"/>
+          <p:cNvPr id="12" name="Shape 4"/>
           <p:cNvSpPr/>
           <p:nvPr/>
         </p:nvSpPr>
@@ -3365,7 +3235,7 @@
       </p:sp>
       <p:sp>
         <p:nvSpPr>
-          <p:cNvPr id="14" name="Text 6"/>
+          <p:cNvPr id="13" name="Text 5"/>
           <p:cNvSpPr txBox="1"/>
           <p:nvPr/>
         </p:nvSpPr>
@@ -3401,7 +3271,7 @@
       </p:sp>
       <p:sp>
         <p:nvSpPr>
-          <p:cNvPr id="15" name="Text 0"/>
+          <p:cNvPr id="14" name="Text 0"/>
           <p:cNvSpPr/>
           <p:nvPr>
             <p:ph idx="101" type="body" hasCustomPrompt="1"/>
@@ -3587,7 +3457,7 @@
                   <a:schemeClr val="bg1"/>
                 </a:solidFill>
               </a:rPr>
-              <a:t>Nous l’avons déjà fait, et mesuré</a:t>
+              <a:t>Ce n’est pas une capacité nouvelle : nous l’avons déjà fait, et mesuré</a:t>
             </a:r>
             <a:endParaRPr lang="fr-FR" sz="3800" dirty="0"/>
           </a:p>
@@ -3677,9 +3547,29 @@
           </a:prstGeom>
         </p:spPr>
       </p:pic>
+      <p:sp>
+        <p:nvSpPr>
+          <p:cNvPr id="10" name="Shape 4"/>
+          <p:cNvSpPr/>
+          <p:nvPr/>
+        </p:nvSpPr>
+        <p:spPr>
+          <a:xfrm>
+            <a:off x="548640" y="2057400"/>
+            <a:ext cx="3511296" cy="3931920"/>
+          </a:xfrm>
+          <a:prstGeom prst="rect">
+            <a:avLst/>
+          </a:prstGeom>
+          <a:solidFill>
+            <a:schemeClr val="accent6"/>
+          </a:solidFill>
+          <a:ln/>
+        </p:spPr>
+      </p:sp>
       <p:pic>
         <p:nvPicPr>
-          <p:cNvPr id="10" name="Photo speed_ci" descr="IShowSpeed en Côte d’Ivoire, Abidjan">    </p:cNvPr>
+          <p:cNvPr id="11" name="Photo card_ci" descr="IShowSpeed en Côte d’Ivoire, Abidjan">    </p:cNvPr>
           <p:cNvPicPr>
             <a:picLocks noChangeAspect="1"/>
           </p:cNvPicPr>
@@ -3693,8 +3583,8 @@
         </p:blipFill>
         <p:spPr>
           <a:xfrm>
-            <a:off x="548640" y="1783080"/>
-            <a:ext cx="4929872" cy="3429000"/>
+            <a:off x="548640" y="2057400"/>
+            <a:ext cx="3511296" cy="2468356"/>
           </a:xfrm>
           <a:prstGeom prst="rect">
             <a:avLst/>
@@ -3703,139 +3593,135 @@
       </p:pic>
       <p:sp>
         <p:nvSpPr>
-          <p:cNvPr id="11" name="Shape 4"/>
+          <p:cNvPr id="12" name="Text 5"/>
+          <p:cNvSpPr txBox="1"/>
+          <p:nvPr/>
+        </p:nvSpPr>
+        <p:spPr>
+          <a:xfrm>
+            <a:off x="777240" y="4662916"/>
+            <a:ext cx="3054096" cy="347472"/>
+          </a:xfrm>
+          <a:prstGeom prst="rect">
+            <a:avLst/>
+          </a:prstGeom>
+          <a:noFill/>
+          <a:ln/>
+        </p:spPr>
+        <p:txBody>
+          <a:bodyPr wrap="square" lIns="0" tIns="0" rIns="0" bIns="0" rtlCol="0" anchor="t"/>
+          <a:lstStyle/>
+          <a:p>
+            <a:pPr indent="0" marL="0">
+              <a:buNone/>
+            </a:pPr>
+            <a:r>
+              <a:rPr lang="fr-FR" altLang="en-US" sz="1050" b="1" spc="100" kern="0" dirty="0">
+                <a:solidFill>
+                  <a:schemeClr val="accent1"/>
+                </a:solidFill>
+              </a:rPr>
+              <a:t>CÔTE D’IVOIRE, TOURNÉE ISHOWSPEED</a:t>
+            </a:r>
+            <a:endParaRPr lang="fr-FR" sz="1050" dirty="0"/>
+          </a:p>
+        </p:txBody>
+      </p:sp>
+      <p:sp>
+        <p:nvSpPr>
+          <p:cNvPr id="13" name="Text 6"/>
+          <p:cNvSpPr txBox="1"/>
+          <p:nvPr/>
+        </p:nvSpPr>
+        <p:spPr>
+          <a:xfrm>
+            <a:off x="777240" y="5028676"/>
+            <a:ext cx="3054096" cy="411480"/>
+          </a:xfrm>
+          <a:prstGeom prst="rect">
+            <a:avLst/>
+          </a:prstGeom>
+          <a:noFill/>
+          <a:ln/>
+        </p:spPr>
+        <p:txBody>
+          <a:bodyPr wrap="square" lIns="0" tIns="0" rIns="0" bIns="0" rtlCol="0" anchor="t"/>
+          <a:lstStyle/>
+          <a:p>
+            <a:pPr indent="0" marL="0">
+              <a:buNone/>
+            </a:pPr>
+            <a:r>
+              <a:rPr lang="fr-FR" altLang="en-US" sz="2600" b="1" dirty="0">
+                <a:solidFill>
+                  <a:schemeClr val="bg1"/>
+                </a:solidFill>
+              </a:rPr>
+              <a:t>55,8 millions</a:t>
+            </a:r>
+            <a:endParaRPr lang="fr-FR" sz="2600" dirty="0"/>
+          </a:p>
+        </p:txBody>
+      </p:sp>
+      <p:sp>
+        <p:nvSpPr>
+          <p:cNvPr id="14" name="Text 7"/>
+          <p:cNvSpPr txBox="1"/>
+          <p:nvPr/>
+        </p:nvSpPr>
+        <p:spPr>
+          <a:xfrm>
+            <a:off x="777240" y="5458444"/>
+            <a:ext cx="3054096" cy="502920"/>
+          </a:xfrm>
+          <a:prstGeom prst="rect">
+            <a:avLst/>
+          </a:prstGeom>
+          <a:noFill/>
+          <a:ln/>
+        </p:spPr>
+        <p:txBody>
+          <a:bodyPr wrap="square" lIns="0" tIns="0" rIns="0" bIns="0" rtlCol="0" anchor="t"/>
+          <a:lstStyle/>
+          <a:p>
+            <a:pPr indent="0" marL="0">
+              <a:buNone/>
+            </a:pPr>
+            <a:r>
+              <a:rPr lang="fr-FR" altLang="en-US" sz="1150" dirty="0">
+                <a:solidFill>
+                  <a:schemeClr val="accent5"/>
+                </a:solidFill>
+              </a:rPr>
+              <a:t>Vues Instagram, en relation directe avec le ministre du Tourisme</a:t>
+            </a:r>
+            <a:endParaRPr lang="fr-FR" sz="1150" dirty="0"/>
+          </a:p>
+        </p:txBody>
+      </p:sp>
+      <p:sp>
+        <p:nvSpPr>
+          <p:cNvPr id="15" name="Shape 8"/>
           <p:cNvSpPr/>
           <p:nvPr/>
         </p:nvSpPr>
         <p:spPr>
           <a:xfrm>
-            <a:off x="658368" y="4809744"/>
-            <a:ext cx="796442" cy="292608"/>
-          </a:xfrm>
-          <a:prstGeom prst="roundRect">
-            <a:avLst>
-              <a:gd name="adj" fmla="val 18750"/>
-            </a:avLst>
+            <a:off x="4338828" y="2057400"/>
+            <a:ext cx="3511296" cy="3931920"/>
+          </a:xfrm>
+          <a:prstGeom prst="rect">
+            <a:avLst/>
           </a:prstGeom>
           <a:solidFill>
-            <a:schemeClr val="tx1">
-              <a:alpha val="70000"/>
-            </a:schemeClr>
+            <a:schemeClr val="accent6"/>
           </a:solidFill>
           <a:ln/>
         </p:spPr>
-      </p:sp>
-      <p:sp>
-        <p:nvSpPr>
-          <p:cNvPr id="12" name="Text 5"/>
-          <p:cNvSpPr txBox="1"/>
-          <p:nvPr/>
-        </p:nvSpPr>
-        <p:spPr>
-          <a:xfrm>
-            <a:off x="658368" y="4809744"/>
-            <a:ext cx="796442" cy="292608"/>
-          </a:xfrm>
-          <a:prstGeom prst="rect">
-            <a:avLst/>
-          </a:prstGeom>
-          <a:noFill/>
-          <a:ln/>
-        </p:spPr>
-        <p:txBody>
-          <a:bodyPr wrap="square" lIns="0" tIns="0" rIns="0" bIns="0" rtlCol="0" anchor="ctr"/>
-          <a:lstStyle/>
-          <a:p>
-            <a:pPr algn="ctr" indent="0" marL="0">
-              <a:buNone/>
-            </a:pPr>
-            <a:r>
-              <a:rPr lang="fr-FR" altLang="en-US" sz="1000" dirty="0">
-                <a:solidFill>
-                  <a:schemeClr val="bg1"/>
-                </a:solidFill>
-              </a:rPr>
-              <a:t>Abidjan</a:t>
-            </a:r>
-            <a:endParaRPr lang="fr-FR" sz="1000" dirty="0"/>
-          </a:p>
-        </p:txBody>
-      </p:sp>
-      <p:sp>
-        <p:nvSpPr>
-          <p:cNvPr id="13" name="Text 6"/>
-          <p:cNvSpPr txBox="1"/>
-          <p:nvPr/>
-        </p:nvSpPr>
-        <p:spPr>
-          <a:xfrm>
-            <a:off x="548640" y="5321808"/>
-            <a:ext cx="4929872" cy="411480"/>
-          </a:xfrm>
-          <a:prstGeom prst="rect">
-            <a:avLst/>
-          </a:prstGeom>
-          <a:noFill/>
-          <a:ln/>
-        </p:spPr>
-        <p:txBody>
-          <a:bodyPr wrap="square" lIns="0" tIns="0" rIns="0" bIns="0" rtlCol="0" anchor="t"/>
-          <a:lstStyle/>
-          <a:p>
-            <a:pPr indent="0" marL="0">
-              <a:buNone/>
-            </a:pPr>
-            <a:r>
-              <a:rPr lang="fr-FR" altLang="en-US" sz="2600" dirty="0">
-                <a:solidFill>
-                  <a:schemeClr val="accent4"/>
-                </a:solidFill>
-              </a:rPr>
-              <a:t>55,8 M</a:t>
-            </a:r>
-            <a:endParaRPr lang="fr-FR" sz="2600" dirty="0"/>
-          </a:p>
-        </p:txBody>
-      </p:sp>
-      <p:sp>
-        <p:nvSpPr>
-          <p:cNvPr id="14" name="Text 7"/>
-          <p:cNvSpPr txBox="1"/>
-          <p:nvPr/>
-        </p:nvSpPr>
-        <p:spPr>
-          <a:xfrm>
-            <a:off x="548640" y="5733288"/>
-            <a:ext cx="4929872" cy="347472"/>
-          </a:xfrm>
-          <a:prstGeom prst="rect">
-            <a:avLst/>
-          </a:prstGeom>
-          <a:noFill/>
-          <a:ln/>
-        </p:spPr>
-        <p:txBody>
-          <a:bodyPr wrap="square" lIns="0" tIns="0" rIns="0" bIns="0" rtlCol="0" anchor="t"/>
-          <a:lstStyle/>
-          <a:p>
-            <a:pPr indent="0" marL="0">
-              <a:buNone/>
-            </a:pPr>
-            <a:r>
-              <a:rPr lang="fr-FR" altLang="en-US" sz="1050" dirty="0">
-                <a:solidFill>
-                  <a:schemeClr val="accent5"/>
-                </a:solidFill>
-              </a:rPr>
-              <a:t>Vues Instagram sur un seul reel. IShowSpeed en Côte d’Ivoire.</a:t>
-            </a:r>
-            <a:endParaRPr lang="fr-FR" sz="1050" dirty="0"/>
-          </a:p>
-        </p:txBody>
       </p:sp>
       <p:pic>
         <p:nvPicPr>
-          <p:cNvPr id="15" name="Photo speed_ma" descr="IShowSpeed au Maroc pour la finale de la CAN 2025">    </p:cNvPr>
+          <p:cNvPr id="16" name="Photo card_ma" descr="IShowSpeed au Maroc pour la finale de la CAN 2025">    </p:cNvPr>
           <p:cNvPicPr>
             <a:picLocks noChangeAspect="1"/>
           </p:cNvPicPr>
@@ -3849,8 +3735,8 @@
         </p:blipFill>
         <p:spPr>
           <a:xfrm>
-            <a:off x="6044279" y="1783080"/>
-            <a:ext cx="2289810" cy="3429000"/>
+            <a:off x="4338828" y="2057400"/>
+            <a:ext cx="3511296" cy="2468424"/>
           </a:xfrm>
           <a:prstGeom prst="rect">
             <a:avLst/>
@@ -3859,139 +3745,135 @@
       </p:pic>
       <p:sp>
         <p:nvSpPr>
-          <p:cNvPr id="16" name="Shape 8"/>
+          <p:cNvPr id="17" name="Text 9"/>
+          <p:cNvSpPr txBox="1"/>
+          <p:nvPr/>
+        </p:nvSpPr>
+        <p:spPr>
+          <a:xfrm>
+            <a:off x="4567428" y="4662984"/>
+            <a:ext cx="3054096" cy="347472"/>
+          </a:xfrm>
+          <a:prstGeom prst="rect">
+            <a:avLst/>
+          </a:prstGeom>
+          <a:noFill/>
+          <a:ln/>
+        </p:spPr>
+        <p:txBody>
+          <a:bodyPr wrap="square" lIns="0" tIns="0" rIns="0" bIns="0" rtlCol="0" anchor="t"/>
+          <a:lstStyle/>
+          <a:p>
+            <a:pPr indent="0" marL="0">
+              <a:buNone/>
+            </a:pPr>
+            <a:r>
+              <a:rPr lang="fr-FR" altLang="en-US" sz="1050" b="1" spc="100" kern="0" dirty="0">
+                <a:solidFill>
+                  <a:schemeClr val="accent4"/>
+                </a:solidFill>
+              </a:rPr>
+              <a:t>MAROC, FINALE DE LA CAN : TOURNÉE ISHOWSPEED</a:t>
+            </a:r>
+            <a:endParaRPr lang="fr-FR" sz="1050" dirty="0"/>
+          </a:p>
+        </p:txBody>
+      </p:sp>
+      <p:sp>
+        <p:nvSpPr>
+          <p:cNvPr id="18" name="Text 10"/>
+          <p:cNvSpPr txBox="1"/>
+          <p:nvPr/>
+        </p:nvSpPr>
+        <p:spPr>
+          <a:xfrm>
+            <a:off x="4567428" y="5028744"/>
+            <a:ext cx="3054096" cy="411480"/>
+          </a:xfrm>
+          <a:prstGeom prst="rect">
+            <a:avLst/>
+          </a:prstGeom>
+          <a:noFill/>
+          <a:ln/>
+        </p:spPr>
+        <p:txBody>
+          <a:bodyPr wrap="square" lIns="0" tIns="0" rIns="0" bIns="0" rtlCol="0" anchor="t"/>
+          <a:lstStyle/>
+          <a:p>
+            <a:pPr indent="0" marL="0">
+              <a:buNone/>
+            </a:pPr>
+            <a:r>
+              <a:rPr lang="fr-FR" altLang="en-US" sz="2600" b="1" dirty="0">
+                <a:solidFill>
+                  <a:schemeClr val="bg1"/>
+                </a:solidFill>
+              </a:rPr>
+              <a:t>16 millions</a:t>
+            </a:r>
+            <a:endParaRPr lang="fr-FR" sz="2600" dirty="0"/>
+          </a:p>
+        </p:txBody>
+      </p:sp>
+      <p:sp>
+        <p:nvSpPr>
+          <p:cNvPr id="19" name="Text 11"/>
+          <p:cNvSpPr txBox="1"/>
+          <p:nvPr/>
+        </p:nvSpPr>
+        <p:spPr>
+          <a:xfrm>
+            <a:off x="4567428" y="5458512"/>
+            <a:ext cx="3054096" cy="502920"/>
+          </a:xfrm>
+          <a:prstGeom prst="rect">
+            <a:avLst/>
+          </a:prstGeom>
+          <a:noFill/>
+          <a:ln/>
+        </p:spPr>
+        <p:txBody>
+          <a:bodyPr wrap="square" lIns="0" tIns="0" rIns="0" bIns="0" rtlCol="0" anchor="t"/>
+          <a:lstStyle/>
+          <a:p>
+            <a:pPr indent="0" marL="0">
+              <a:buNone/>
+            </a:pPr>
+            <a:r>
+              <a:rPr lang="fr-FR" altLang="en-US" sz="1150" dirty="0">
+                <a:solidFill>
+                  <a:schemeClr val="accent5"/>
+                </a:solidFill>
+              </a:rPr>
+              <a:t>Vues en direct, livrées avec la CAF et la Fédération Royale Marocaine de Football</a:t>
+            </a:r>
+            <a:endParaRPr lang="fr-FR" sz="1150" dirty="0"/>
+          </a:p>
+        </p:txBody>
+      </p:sp>
+      <p:sp>
+        <p:nvSpPr>
+          <p:cNvPr id="20" name="Shape 12"/>
           <p:cNvSpPr/>
           <p:nvPr/>
         </p:nvSpPr>
         <p:spPr>
           <a:xfrm>
-            <a:off x="6154007" y="4809744"/>
-            <a:ext cx="1864462" cy="292608"/>
-          </a:xfrm>
-          <a:prstGeom prst="roundRect">
-            <a:avLst>
-              <a:gd name="adj" fmla="val 18750"/>
-            </a:avLst>
+            <a:off x="8129016" y="2057400"/>
+            <a:ext cx="3511296" cy="3931920"/>
+          </a:xfrm>
+          <a:prstGeom prst="rect">
+            <a:avLst/>
           </a:prstGeom>
           <a:solidFill>
-            <a:schemeClr val="tx1">
-              <a:alpha val="70000"/>
-            </a:schemeClr>
+            <a:schemeClr val="accent6"/>
           </a:solidFill>
           <a:ln/>
         </p:spPr>
-      </p:sp>
-      <p:sp>
-        <p:nvSpPr>
-          <p:cNvPr id="17" name="Text 9"/>
-          <p:cNvSpPr txBox="1"/>
-          <p:nvPr/>
-        </p:nvSpPr>
-        <p:spPr>
-          <a:xfrm>
-            <a:off x="6154007" y="4809744"/>
-            <a:ext cx="1864462" cy="292608"/>
-          </a:xfrm>
-          <a:prstGeom prst="rect">
-            <a:avLst/>
-          </a:prstGeom>
-          <a:noFill/>
-          <a:ln/>
-        </p:spPr>
-        <p:txBody>
-          <a:bodyPr wrap="square" lIns="0" tIns="0" rIns="0" bIns="0" rtlCol="0" anchor="ctr"/>
-          <a:lstStyle/>
-          <a:p>
-            <a:pPr algn="ctr" indent="0" marL="0">
-              <a:buNone/>
-            </a:pPr>
-            <a:r>
-              <a:rPr lang="fr-FR" altLang="en-US" sz="1000" dirty="0">
-                <a:solidFill>
-                  <a:schemeClr val="bg1"/>
-                </a:solidFill>
-              </a:rPr>
-              <a:t>Maroc, finale de la CAN</a:t>
-            </a:r>
-            <a:endParaRPr lang="fr-FR" sz="1000" dirty="0"/>
-          </a:p>
-        </p:txBody>
-      </p:sp>
-      <p:sp>
-        <p:nvSpPr>
-          <p:cNvPr id="18" name="Text 10"/>
-          <p:cNvSpPr txBox="1"/>
-          <p:nvPr/>
-        </p:nvSpPr>
-        <p:spPr>
-          <a:xfrm>
-            <a:off x="6044279" y="5321808"/>
-            <a:ext cx="2289810" cy="411480"/>
-          </a:xfrm>
-          <a:prstGeom prst="rect">
-            <a:avLst/>
-          </a:prstGeom>
-          <a:noFill/>
-          <a:ln/>
-        </p:spPr>
-        <p:txBody>
-          <a:bodyPr wrap="square" lIns="0" tIns="0" rIns="0" bIns="0" rtlCol="0" anchor="t"/>
-          <a:lstStyle/>
-          <a:p>
-            <a:pPr indent="0" marL="0">
-              <a:buNone/>
-            </a:pPr>
-            <a:r>
-              <a:rPr lang="fr-FR" altLang="en-US" sz="2600" dirty="0">
-                <a:solidFill>
-                  <a:schemeClr val="accent4"/>
-                </a:solidFill>
-              </a:rPr>
-              <a:t>16 M</a:t>
-            </a:r>
-            <a:endParaRPr lang="fr-FR" sz="2600" dirty="0"/>
-          </a:p>
-        </p:txBody>
-      </p:sp>
-      <p:sp>
-        <p:nvSpPr>
-          <p:cNvPr id="19" name="Text 11"/>
-          <p:cNvSpPr txBox="1"/>
-          <p:nvPr/>
-        </p:nvSpPr>
-        <p:spPr>
-          <a:xfrm>
-            <a:off x="6044279" y="5733288"/>
-            <a:ext cx="2289810" cy="347472"/>
-          </a:xfrm>
-          <a:prstGeom prst="rect">
-            <a:avLst/>
-          </a:prstGeom>
-          <a:noFill/>
-          <a:ln/>
-        </p:spPr>
-        <p:txBody>
-          <a:bodyPr wrap="square" lIns="0" tIns="0" rIns="0" bIns="0" rtlCol="0" anchor="t"/>
-          <a:lstStyle/>
-          <a:p>
-            <a:pPr indent="0" marL="0">
-              <a:buNone/>
-            </a:pPr>
-            <a:r>
-              <a:rPr lang="fr-FR" altLang="en-US" sz="1050" dirty="0">
-                <a:solidFill>
-                  <a:schemeClr val="accent5"/>
-                </a:solidFill>
-              </a:rPr>
-              <a:t>Vues en direct de la révélation de la mascotte de la CAN.</a:t>
-            </a:r>
-            <a:endParaRPr lang="fr-FR" sz="1050" dirty="0"/>
-          </a:p>
-        </p:txBody>
       </p:sp>
       <p:pic>
         <p:nvPicPr>
-          <p:cNvPr id="20" name="Photo ashton" descr="Ashton Hall Africa Tour, étape du Nigeria">    </p:cNvPr>
+          <p:cNvPr id="21" name="Photo card_ashton" descr="Ashton Hall Africa Tour, étape du Nigeria">    </p:cNvPr>
           <p:cNvPicPr>
             <a:picLocks noChangeAspect="1"/>
           </p:cNvPicPr>
@@ -4005,8 +3887,8 @@
         </p:blipFill>
         <p:spPr>
           <a:xfrm>
-            <a:off x="8899855" y="1783080"/>
-            <a:ext cx="2743200" cy="3429000"/>
+            <a:off x="8129016" y="2057400"/>
+            <a:ext cx="3511296" cy="2468235"/>
           </a:xfrm>
           <a:prstGeom prst="rect">
             <a:avLst/>
@@ -4015,74 +3897,86 @@
       </p:pic>
       <p:sp>
         <p:nvSpPr>
-          <p:cNvPr id="21" name="Shape 12"/>
-          <p:cNvSpPr/>
-          <p:nvPr/>
-        </p:nvSpPr>
-        <p:spPr>
-          <a:xfrm>
-            <a:off x="9009583" y="4809744"/>
-            <a:ext cx="662940" cy="292608"/>
-          </a:xfrm>
-          <a:prstGeom prst="roundRect">
-            <a:avLst>
-              <a:gd name="adj" fmla="val 18750"/>
-            </a:avLst>
-          </a:prstGeom>
-          <a:solidFill>
-            <a:schemeClr val="tx1">
-              <a:alpha val="70000"/>
-            </a:schemeClr>
-          </a:solidFill>
-          <a:ln/>
-        </p:spPr>
-      </p:sp>
-      <p:sp>
-        <p:nvSpPr>
           <p:cNvPr id="22" name="Text 13"/>
           <p:cNvSpPr txBox="1"/>
           <p:nvPr/>
         </p:nvSpPr>
         <p:spPr>
           <a:xfrm>
-            <a:off x="9009583" y="4809744"/>
-            <a:ext cx="662940" cy="292608"/>
-          </a:xfrm>
-          <a:prstGeom prst="rect">
-            <a:avLst/>
-          </a:prstGeom>
-          <a:noFill/>
-          <a:ln/>
-        </p:spPr>
-        <p:txBody>
-          <a:bodyPr wrap="square" lIns="0" tIns="0" rIns="0" bIns="0" rtlCol="0" anchor="ctr"/>
-          <a:lstStyle/>
-          <a:p>
-            <a:pPr algn="ctr" indent="0" marL="0">
-              <a:buNone/>
-            </a:pPr>
-            <a:r>
-              <a:rPr lang="fr-FR" altLang="en-US" sz="1000" dirty="0">
+            <a:off x="8357616" y="4662795"/>
+            <a:ext cx="3054096" cy="347472"/>
+          </a:xfrm>
+          <a:prstGeom prst="rect">
+            <a:avLst/>
+          </a:prstGeom>
+          <a:noFill/>
+          <a:ln/>
+        </p:spPr>
+        <p:txBody>
+          <a:bodyPr wrap="square" lIns="0" tIns="0" rIns="0" bIns="0" rtlCol="0" anchor="t"/>
+          <a:lstStyle/>
+          <a:p>
+            <a:pPr indent="0" marL="0">
+              <a:buNone/>
+            </a:pPr>
+            <a:r>
+              <a:rPr lang="fr-FR" altLang="en-US" sz="1050" b="1" spc="100" kern="0" dirty="0">
+                <a:solidFill>
+                  <a:schemeClr val="accent5"/>
+                </a:solidFill>
+              </a:rPr>
+              <a:t>ASHTON HALL AFRICA TOUR</a:t>
+            </a:r>
+            <a:endParaRPr lang="fr-FR" sz="1050" dirty="0"/>
+          </a:p>
+        </p:txBody>
+      </p:sp>
+      <p:sp>
+        <p:nvSpPr>
+          <p:cNvPr id="23" name="Text 14"/>
+          <p:cNvSpPr txBox="1"/>
+          <p:nvPr/>
+        </p:nvSpPr>
+        <p:spPr>
+          <a:xfrm>
+            <a:off x="8357616" y="5028555"/>
+            <a:ext cx="3054096" cy="411480"/>
+          </a:xfrm>
+          <a:prstGeom prst="rect">
+            <a:avLst/>
+          </a:prstGeom>
+          <a:noFill/>
+          <a:ln/>
+        </p:spPr>
+        <p:txBody>
+          <a:bodyPr wrap="square" lIns="0" tIns="0" rIns="0" bIns="0" rtlCol="0" anchor="t"/>
+          <a:lstStyle/>
+          <a:p>
+            <a:pPr indent="0" marL="0">
+              <a:buNone/>
+            </a:pPr>
+            <a:r>
+              <a:rPr lang="fr-FR" altLang="en-US" sz="2600" b="1" dirty="0">
                 <a:solidFill>
                   <a:schemeClr val="bg1"/>
                 </a:solidFill>
               </a:rPr>
-              <a:t>Lagos</a:t>
-            </a:r>
-            <a:endParaRPr lang="fr-FR" sz="1000" dirty="0"/>
-          </a:p>
-        </p:txBody>
-      </p:sp>
-      <p:sp>
-        <p:nvSpPr>
-          <p:cNvPr id="23" name="Text 14"/>
-          <p:cNvSpPr txBox="1"/>
-          <p:nvPr/>
-        </p:nvSpPr>
-        <p:spPr>
-          <a:xfrm>
-            <a:off x="8899855" y="5321808"/>
-            <a:ext cx="2743200" cy="411480"/>
+              <a:t>1,57 milliard</a:t>
+            </a:r>
+            <a:endParaRPr lang="fr-FR" sz="2600" dirty="0"/>
+          </a:p>
+        </p:txBody>
+      </p:sp>
+      <p:sp>
+        <p:nvSpPr>
+          <p:cNvPr id="24" name="Text 15"/>
+          <p:cNvSpPr txBox="1"/>
+          <p:nvPr/>
+        </p:nvSpPr>
+        <p:spPr>
+          <a:xfrm>
+            <a:off x="8357616" y="5458323"/>
+            <a:ext cx="3054096" cy="502920"/>
           </a:xfrm>
           <a:prstGeom prst="rect">
             <a:avLst/>
@@ -4098,50 +3992,14 @@
               <a:buNone/>
             </a:pPr>
             <a:r>
-              <a:rPr lang="fr-FR" altLang="en-US" sz="2600" dirty="0">
-                <a:solidFill>
-                  <a:schemeClr val="accent4"/>
-                </a:solidFill>
-              </a:rPr>
-              <a:t>1,57 Md</a:t>
-            </a:r>
-            <a:endParaRPr lang="fr-FR" sz="2600" dirty="0"/>
-          </a:p>
-        </p:txBody>
-      </p:sp>
-      <p:sp>
-        <p:nvSpPr>
-          <p:cNvPr id="24" name="Text 15"/>
-          <p:cNvSpPr txBox="1"/>
-          <p:nvPr/>
-        </p:nvSpPr>
-        <p:spPr>
-          <a:xfrm>
-            <a:off x="8899855" y="5733288"/>
-            <a:ext cx="2743200" cy="347472"/>
-          </a:xfrm>
-          <a:prstGeom prst="rect">
-            <a:avLst/>
-          </a:prstGeom>
-          <a:noFill/>
-          <a:ln/>
-        </p:spPr>
-        <p:txBody>
-          <a:bodyPr wrap="square" lIns="0" tIns="0" rIns="0" bIns="0" rtlCol="0" anchor="t"/>
-          <a:lstStyle/>
-          <a:p>
-            <a:pPr indent="0" marL="0">
-              <a:buNone/>
-            </a:pPr>
-            <a:r>
-              <a:rPr lang="fr-FR" altLang="en-US" sz="1050" dirty="0">
+              <a:rPr lang="fr-FR" altLang="en-US" sz="1150" dirty="0">
                 <a:solidFill>
                   <a:schemeClr val="accent5"/>
                 </a:solidFill>
               </a:rPr>
-              <a:t>Vues de la tournée dans cinq pays, gérée de bout en bout.</a:t>
-            </a:r>
-            <a:endParaRPr lang="fr-FR" sz="1050" dirty="0"/>
+              <a:t>Vues totales, cinq pays gérés de bout en bout : Ghana, Cameroun, Nigeria, Bénin, Rwanda</a:t>
+            </a:r>
+            <a:endParaRPr lang="fr-FR" sz="1150" dirty="0"/>
           </a:p>
         </p:txBody>
       </p:sp>
@@ -4153,7 +4011,7 @@
         </p:nvSpPr>
         <p:spPr>
           <a:xfrm>
-            <a:off x="548640" y="6144768"/>
+            <a:off x="548640" y="6108192"/>
             <a:ext cx="11094415" cy="201168"/>
           </a:xfrm>
           <a:prstGeom prst="rect">
@@ -4386,7 +4244,7 @@
         </p:nvSpPr>
         <p:spPr>
           <a:xfrm>
-            <a:off x="548640" y="2148840"/>
+            <a:off x="548640" y="2240280"/>
             <a:ext cx="457200" cy="457200"/>
           </a:xfrm>
           <a:prstGeom prst="ellipse">
@@ -4406,7 +4264,7 @@
         </p:nvSpPr>
         <p:spPr>
           <a:xfrm>
-            <a:off x="548640" y="2148840"/>
+            <a:off x="548640" y="2240280"/>
             <a:ext cx="457200" cy="457200"/>
           </a:xfrm>
           <a:prstGeom prst="rect">
@@ -4442,17 +4300,17 @@
         </p:nvSpPr>
         <p:spPr>
           <a:xfrm>
-            <a:off x="1188720" y="2112264"/>
-            <a:ext cx="5943600" cy="329184"/>
-          </a:xfrm>
-          <a:prstGeom prst="rect">
-            <a:avLst/>
-          </a:prstGeom>
-          <a:noFill/>
-          <a:ln/>
-        </p:spPr>
-        <p:txBody>
-          <a:bodyPr wrap="square" lIns="0" tIns="0" rIns="0" bIns="0" rtlCol="0" anchor="t"/>
+            <a:off x="1188720" y="2240280"/>
+            <a:ext cx="5943600" cy="457200"/>
+          </a:xfrm>
+          <a:prstGeom prst="rect">
+            <a:avLst/>
+          </a:prstGeom>
+          <a:noFill/>
+          <a:ln/>
+        </p:spPr>
+        <p:txBody>
+          <a:bodyPr wrap="square" lIns="0" tIns="0" rIns="0" bIns="0" rtlCol="0" anchor="ctr"/>
           <a:lstStyle/>
           <a:p>
             <a:pPr indent="0" marL="0">
@@ -4475,49 +4333,13 @@
       </p:sp>
       <p:sp>
         <p:nvSpPr>
-          <p:cNvPr id="10" name="Text 5"/>
-          <p:cNvSpPr txBox="1"/>
-          <p:nvPr/>
-        </p:nvSpPr>
-        <p:spPr>
-          <a:xfrm>
-            <a:off x="1188720" y="2441448"/>
-            <a:ext cx="5943600" cy="237744"/>
-          </a:xfrm>
-          <a:prstGeom prst="rect">
-            <a:avLst/>
-          </a:prstGeom>
-          <a:noFill/>
-          <a:ln/>
-        </p:spPr>
-        <p:txBody>
-          <a:bodyPr wrap="square" lIns="0" tIns="0" rIns="0" bIns="0" rtlCol="0" anchor="t"/>
-          <a:lstStyle/>
-          <a:p>
-            <a:pPr indent="0" marL="0">
-              <a:buNone/>
-            </a:pPr>
-            <a:r>
-              <a:rPr lang="fr-FR" altLang="en-US" sz="1200" dirty="0">
-                <a:solidFill>
-                  <a:schemeClr val="accent4"/>
-                </a:solidFill>
-              </a:rPr>
-              <a:t>Cette semaine</a:t>
-            </a:r>
-            <a:endParaRPr lang="fr-FR" sz="1200" dirty="0"/>
-          </a:p>
-        </p:txBody>
-      </p:sp>
-      <p:sp>
-        <p:nvSpPr>
-          <p:cNvPr id="11" name="Shape 6"/>
+          <p:cNvPr id="10" name="Shape 5"/>
           <p:cNvSpPr/>
           <p:nvPr/>
         </p:nvSpPr>
         <p:spPr>
           <a:xfrm>
-            <a:off x="548640" y="2880360"/>
+            <a:off x="548640" y="2926080"/>
             <a:ext cx="457200" cy="457200"/>
           </a:xfrm>
           <a:prstGeom prst="ellipse">
@@ -4531,14 +4353,50 @@
       </p:sp>
       <p:sp>
         <p:nvSpPr>
+          <p:cNvPr id="11" name="Text 6"/>
+          <p:cNvSpPr txBox="1"/>
+          <p:nvPr/>
+        </p:nvSpPr>
+        <p:spPr>
+          <a:xfrm>
+            <a:off x="548640" y="2926080"/>
+            <a:ext cx="457200" cy="457200"/>
+          </a:xfrm>
+          <a:prstGeom prst="rect">
+            <a:avLst/>
+          </a:prstGeom>
+          <a:noFill/>
+          <a:ln/>
+        </p:spPr>
+        <p:txBody>
+          <a:bodyPr wrap="square" lIns="0" tIns="0" rIns="0" bIns="0" rtlCol="0" anchor="ctr"/>
+          <a:lstStyle/>
+          <a:p>
+            <a:pPr algn="ctr" indent="0" marL="0">
+              <a:buNone/>
+            </a:pPr>
+            <a:r>
+              <a:rPr lang="fr-FR" altLang="en-US" sz="1400" b="1" dirty="0">
+                <a:solidFill>
+                  <a:schemeClr val="tx1"/>
+                </a:solidFill>
+              </a:rPr>
+              <a:t>2</a:t>
+            </a:r>
+            <a:endParaRPr lang="fr-FR" sz="1400" dirty="0"/>
+          </a:p>
+        </p:txBody>
+      </p:sp>
+      <p:sp>
+        <p:nvSpPr>
           <p:cNvPr id="12" name="Text 7"/>
           <p:cNvSpPr txBox="1"/>
           <p:nvPr/>
         </p:nvSpPr>
         <p:spPr>
           <a:xfrm>
-            <a:off x="548640" y="2880360"/>
-            <a:ext cx="457200" cy="457200"/>
+            <a:off x="1188720" y="2926080"/>
+            <a:ext cx="5943600" cy="457200"/>
           </a:xfrm>
           <a:prstGeom prst="rect">
             <a:avLst/>
@@ -4548,42 +4406,6 @@
         </p:spPr>
         <p:txBody>
           <a:bodyPr wrap="square" lIns="0" tIns="0" rIns="0" bIns="0" rtlCol="0" anchor="ctr"/>
-          <a:lstStyle/>
-          <a:p>
-            <a:pPr algn="ctr" indent="0" marL="0">
-              <a:buNone/>
-            </a:pPr>
-            <a:r>
-              <a:rPr lang="fr-FR" altLang="en-US" sz="1400" b="1" dirty="0">
-                <a:solidFill>
-                  <a:schemeClr val="tx1"/>
-                </a:solidFill>
-              </a:rPr>
-              <a:t>2</a:t>
-            </a:r>
-            <a:endParaRPr lang="fr-FR" sz="1400" dirty="0"/>
-          </a:p>
-        </p:txBody>
-      </p:sp>
-      <p:sp>
-        <p:nvSpPr>
-          <p:cNvPr id="13" name="Text 8"/>
-          <p:cNvSpPr txBox="1"/>
-          <p:nvPr/>
-        </p:nvSpPr>
-        <p:spPr>
-          <a:xfrm>
-            <a:off x="1188720" y="2843784"/>
-            <a:ext cx="5943600" cy="329184"/>
-          </a:xfrm>
-          <a:prstGeom prst="rect">
-            <a:avLst/>
-          </a:prstGeom>
-          <a:noFill/>
-          <a:ln/>
-        </p:spPr>
-        <p:txBody>
-          <a:bodyPr wrap="square" lIns="0" tIns="0" rIns="0" bIns="0" rtlCol="0" anchor="t"/>
           <a:lstStyle/>
           <a:p>
             <a:pPr indent="0" marL="0">
@@ -4606,43 +4428,7 @@
       </p:sp>
       <p:sp>
         <p:nvSpPr>
-          <p:cNvPr id="14" name="Text 9"/>
-          <p:cNvSpPr txBox="1"/>
-          <p:nvPr/>
-        </p:nvSpPr>
-        <p:spPr>
-          <a:xfrm>
-            <a:off x="1188720" y="3172968"/>
-            <a:ext cx="5943600" cy="237744"/>
-          </a:xfrm>
-          <a:prstGeom prst="rect">
-            <a:avLst/>
-          </a:prstGeom>
-          <a:noFill/>
-          <a:ln/>
-        </p:spPr>
-        <p:txBody>
-          <a:bodyPr wrap="square" lIns="0" tIns="0" rIns="0" bIns="0" rtlCol="0" anchor="t"/>
-          <a:lstStyle/>
-          <a:p>
-            <a:pPr indent="0" marL="0">
-              <a:buNone/>
-            </a:pPr>
-            <a:r>
-              <a:rPr lang="fr-FR" altLang="en-US" sz="1200" dirty="0">
-                <a:solidFill>
-                  <a:schemeClr val="accent4"/>
-                </a:solidFill>
-              </a:rPr>
-              <a:t>Avant le vendredi 13 novembre</a:t>
-            </a:r>
-            <a:endParaRPr lang="fr-FR" sz="1200" dirty="0"/>
-          </a:p>
-        </p:txBody>
-      </p:sp>
-      <p:sp>
-        <p:nvSpPr>
-          <p:cNvPr id="15" name="Shape 10"/>
+          <p:cNvPr id="13" name="Shape 8"/>
           <p:cNvSpPr/>
           <p:nvPr/>
         </p:nvSpPr>
@@ -4662,7 +4448,7 @@
       </p:sp>
       <p:sp>
         <p:nvSpPr>
-          <p:cNvPr id="16" name="Text 11"/>
+          <p:cNvPr id="14" name="Text 9"/>
           <p:cNvSpPr txBox="1"/>
           <p:nvPr/>
         </p:nvSpPr>
@@ -4698,23 +4484,23 @@
       </p:sp>
       <p:sp>
         <p:nvSpPr>
-          <p:cNvPr id="17" name="Text 12"/>
-          <p:cNvSpPr txBox="1"/>
-          <p:nvPr/>
-        </p:nvSpPr>
-        <p:spPr>
-          <a:xfrm>
-            <a:off x="1188720" y="3575304"/>
-            <a:ext cx="5943600" cy="329184"/>
-          </a:xfrm>
-          <a:prstGeom prst="rect">
-            <a:avLst/>
-          </a:prstGeom>
-          <a:noFill/>
-          <a:ln/>
-        </p:spPr>
-        <p:txBody>
-          <a:bodyPr wrap="square" lIns="0" tIns="0" rIns="0" bIns="0" rtlCol="0" anchor="t"/>
+          <p:cNvPr id="15" name="Text 10"/>
+          <p:cNvSpPr txBox="1"/>
+          <p:nvPr/>
+        </p:nvSpPr>
+        <p:spPr>
+          <a:xfrm>
+            <a:off x="1188720" y="3611880"/>
+            <a:ext cx="5943600" cy="457200"/>
+          </a:xfrm>
+          <a:prstGeom prst="rect">
+            <a:avLst/>
+          </a:prstGeom>
+          <a:noFill/>
+          <a:ln/>
+        </p:spPr>
+        <p:txBody>
+          <a:bodyPr wrap="square" lIns="0" tIns="0" rIns="0" bIns="0" rtlCol="0" anchor="ctr"/>
           <a:lstStyle/>
           <a:p>
             <a:pPr indent="0" marL="0">
@@ -4737,49 +4523,13 @@
       </p:sp>
       <p:sp>
         <p:nvSpPr>
-          <p:cNvPr id="18" name="Text 13"/>
-          <p:cNvSpPr txBox="1"/>
-          <p:nvPr/>
-        </p:nvSpPr>
-        <p:spPr>
-          <a:xfrm>
-            <a:off x="1188720" y="3904488"/>
-            <a:ext cx="5943600" cy="237744"/>
-          </a:xfrm>
-          <a:prstGeom prst="rect">
-            <a:avLst/>
-          </a:prstGeom>
-          <a:noFill/>
-          <a:ln/>
-        </p:spPr>
-        <p:txBody>
-          <a:bodyPr wrap="square" lIns="0" tIns="0" rIns="0" bIns="0" rtlCol="0" anchor="t"/>
-          <a:lstStyle/>
-          <a:p>
-            <a:pPr indent="0" marL="0">
-              <a:buNone/>
-            </a:pPr>
-            <a:r>
-              <a:rPr lang="fr-FR" altLang="en-US" sz="1200" dirty="0">
-                <a:solidFill>
-                  <a:schemeClr val="accent4"/>
-                </a:solidFill>
-              </a:rPr>
-              <a:t>Avant le vendredi 20 novembre</a:t>
-            </a:r>
-            <a:endParaRPr lang="fr-FR" sz="1200" dirty="0"/>
-          </a:p>
-        </p:txBody>
-      </p:sp>
-      <p:sp>
-        <p:nvSpPr>
-          <p:cNvPr id="19" name="Shape 14"/>
+          <p:cNvPr id="16" name="Shape 11"/>
           <p:cNvSpPr/>
           <p:nvPr/>
         </p:nvSpPr>
         <p:spPr>
           <a:xfrm>
-            <a:off x="548640" y="4343400"/>
+            <a:off x="548640" y="4297680"/>
             <a:ext cx="457200" cy="457200"/>
           </a:xfrm>
           <a:prstGeom prst="ellipse">
@@ -4793,13 +4543,13 @@
       </p:sp>
       <p:sp>
         <p:nvSpPr>
-          <p:cNvPr id="20" name="Text 15"/>
-          <p:cNvSpPr txBox="1"/>
-          <p:nvPr/>
-        </p:nvSpPr>
-        <p:spPr>
-          <a:xfrm>
-            <a:off x="548640" y="4343400"/>
+          <p:cNvPr id="17" name="Text 12"/>
+          <p:cNvSpPr txBox="1"/>
+          <p:nvPr/>
+        </p:nvSpPr>
+        <p:spPr>
+          <a:xfrm>
+            <a:off x="548640" y="4297680"/>
             <a:ext cx="457200" cy="457200"/>
           </a:xfrm>
           <a:prstGeom prst="rect">
@@ -4829,23 +4579,23 @@
       </p:sp>
       <p:sp>
         <p:nvSpPr>
-          <p:cNvPr id="21" name="Text 16"/>
-          <p:cNvSpPr txBox="1"/>
-          <p:nvPr/>
-        </p:nvSpPr>
-        <p:spPr>
-          <a:xfrm>
-            <a:off x="1188720" y="4306824"/>
-            <a:ext cx="5943600" cy="329184"/>
-          </a:xfrm>
-          <a:prstGeom prst="rect">
-            <a:avLst/>
-          </a:prstGeom>
-          <a:noFill/>
-          <a:ln/>
-        </p:spPr>
-        <p:txBody>
-          <a:bodyPr wrap="square" lIns="0" tIns="0" rIns="0" bIns="0" rtlCol="0" anchor="t"/>
+          <p:cNvPr id="18" name="Text 13"/>
+          <p:cNvSpPr txBox="1"/>
+          <p:nvPr/>
+        </p:nvSpPr>
+        <p:spPr>
+          <a:xfrm>
+            <a:off x="1188720" y="4297680"/>
+            <a:ext cx="5943600" cy="457200"/>
+          </a:xfrm>
+          <a:prstGeom prst="rect">
+            <a:avLst/>
+          </a:prstGeom>
+          <a:noFill/>
+          <a:ln/>
+        </p:spPr>
+        <p:txBody>
+          <a:bodyPr wrap="square" lIns="0" tIns="0" rIns="0" bIns="0" rtlCol="0" anchor="ctr"/>
           <a:lstStyle/>
           <a:p>
             <a:pPr indent="0" marL="0">
@@ -4868,43 +4618,7 @@
       </p:sp>
       <p:sp>
         <p:nvSpPr>
-          <p:cNvPr id="22" name="Text 17"/>
-          <p:cNvSpPr txBox="1"/>
-          <p:nvPr/>
-        </p:nvSpPr>
-        <p:spPr>
-          <a:xfrm>
-            <a:off x="1188720" y="4636008"/>
-            <a:ext cx="5943600" cy="237744"/>
-          </a:xfrm>
-          <a:prstGeom prst="rect">
-            <a:avLst/>
-          </a:prstGeom>
-          <a:noFill/>
-          <a:ln/>
-        </p:spPr>
-        <p:txBody>
-          <a:bodyPr wrap="square" lIns="0" tIns="0" rIns="0" bIns="0" rtlCol="0" anchor="t"/>
-          <a:lstStyle/>
-          <a:p>
-            <a:pPr indent="0" marL="0">
-              <a:buNone/>
-            </a:pPr>
-            <a:r>
-              <a:rPr lang="fr-FR" altLang="en-US" sz="1200" dirty="0">
-                <a:solidFill>
-                  <a:schemeClr val="accent4"/>
-                </a:solidFill>
-              </a:rPr>
-              <a:t>À partir du lundi 23 novembre</a:t>
-            </a:r>
-            <a:endParaRPr lang="fr-FR" sz="1200" dirty="0"/>
-          </a:p>
-        </p:txBody>
-      </p:sp>
-      <p:sp>
-        <p:nvSpPr>
-          <p:cNvPr id="23" name="Shape 18"/>
+          <p:cNvPr id="19" name="Shape 14"/>
           <p:cNvSpPr/>
           <p:nvPr/>
         </p:nvSpPr>
@@ -4927,7 +4641,7 @@
       </p:sp>
       <p:sp>
         <p:nvSpPr>
-          <p:cNvPr id="24" name="Text 19"/>
+          <p:cNvPr id="20" name="Text 15"/>
           <p:cNvSpPr txBox="1"/>
           <p:nvPr/>
         </p:nvSpPr>
@@ -4963,7 +4677,7 @@
       </p:sp>
       <p:sp>
         <p:nvSpPr>
-          <p:cNvPr id="25" name="Text 20"/>
+          <p:cNvPr id="21" name="Text 16"/>
           <p:cNvSpPr txBox="1"/>
           <p:nvPr/>
         </p:nvSpPr>
@@ -4999,7 +4713,7 @@
       </p:sp>
       <p:sp>
         <p:nvSpPr>
-          <p:cNvPr id="26" name="Text 21"/>
+          <p:cNvPr id="22" name="Text 17"/>
           <p:cNvSpPr txBox="1"/>
           <p:nvPr/>
         </p:nvSpPr>
@@ -5035,7 +4749,7 @@
       </p:sp>
       <p:sp>
         <p:nvSpPr>
-          <p:cNvPr id="27" name="Text 22"/>
+          <p:cNvPr id="23" name="Text 18"/>
           <p:cNvSpPr txBox="1"/>
           <p:nvPr/>
         </p:nvSpPr>
@@ -5071,7 +4785,7 @@
       </p:sp>
       <p:sp>
         <p:nvSpPr>
-          <p:cNvPr id="28" name="Text 23"/>
+          <p:cNvPr id="24" name="Text 19"/>
           <p:cNvSpPr txBox="1"/>
           <p:nvPr/>
         </p:nvSpPr>
@@ -5107,7 +4821,7 @@
       </p:sp>
       <p:sp>
         <p:nvSpPr>
-          <p:cNvPr id="29" name="Text 24"/>
+          <p:cNvPr id="25" name="Text 20"/>
           <p:cNvSpPr txBox="1"/>
           <p:nvPr/>
         </p:nvSpPr>
@@ -5143,7 +4857,7 @@
       </p:sp>
       <p:sp>
         <p:nvSpPr>
-          <p:cNvPr id="30" name="Text 25"/>
+          <p:cNvPr id="26" name="Text 21"/>
           <p:cNvSpPr txBox="1"/>
           <p:nvPr/>
         </p:nvSpPr>
@@ -5179,7 +4893,7 @@
       </p:sp>
       <p:pic>
         <p:nvPicPr>
-          <p:cNvPr id="31" name="Image 2" descr="AToure Management &amp; Consulting">    </p:cNvPr>
+          <p:cNvPr id="27" name="Image 2" descr="AToure Management &amp; Consulting">    </p:cNvPr>
           <p:cNvPicPr>
             <a:picLocks noChangeAspect="1"/>
           </p:cNvPicPr>
@@ -5201,4404 +4915,6 @@
           </a:prstGeom>
         </p:spPr>
       </p:pic>
-    </p:spTree>
-  </p:cSld>
-  <p:clrMapOvr>
-    <a:masterClrMapping/>
-  </p:clrMapOvr>
-</p:sld>
-</file>
-
-<file path=ppt/slides/slide12.xml><?xml version="1.0" encoding="utf-8"?>
-<p:sld xmlns:a="http://schemas.openxmlformats.org/drawingml/2006/main" xmlns:r="http://schemas.openxmlformats.org/officeDocument/2006/relationships" xmlns:p="http://schemas.openxmlformats.org/presentationml/2006/main">
-  <p:cSld name="Slide 12">
-    <p:spTree>
-      <p:nvGrpSpPr>
-        <p:cNvPr id="1" name=""/>
-        <p:cNvGrpSpPr/>
-        <p:nvPr/>
-      </p:nvGrpSpPr>
-      <p:grpSpPr>
-        <a:xfrm>
-          <a:off x="0" y="0"/>
-          <a:ext cx="0" cy="0"/>
-          <a:chOff x="0" y="0"/>
-          <a:chExt cx="0" cy="0"/>
-        </a:xfrm>
-      </p:grpSpPr>
-      <p:sp>
-        <p:nvSpPr>
-          <p:cNvPr id="2" name="Text 0"/>
-          <p:cNvSpPr/>
-          <p:nvPr>
-            <p:ph idx="100" type="body" hasCustomPrompt="1"/>
-          </p:nvPr>
-        </p:nvSpPr>
-        <p:spPr>
-          <a:xfrm>
-            <a:off x="548640" y="411480"/>
-            <a:ext cx="11094415" cy="256032"/>
-          </a:xfrm>
-          <a:prstGeom prst="rect">
-            <a:avLst/>
-          </a:prstGeom>
-          <a:noFill/>
-          <a:ln/>
-        </p:spPr>
-        <p:txBody>
-          <a:bodyPr wrap="square" lIns="0" tIns="0" rIns="0" bIns="0" rtlCol="0" anchor="t"/>
-          <a:lstStyle/>
-          <a:p>
-            <a:pPr algn="l" indent="0" marL="0">
-              <a:buNone/>
-            </a:pPr>
-            <a:r>
-              <a:rPr lang="fr-FR" altLang="en-US" sz="1100" b="1" spc="300" kern="0" dirty="0">
-                <a:solidFill>
-                  <a:schemeClr val="accent3"/>
-                </a:solidFill>
-              </a:rPr>
-              <a:t>ANNEXE  ·  EXEMPLE DE RAPPORT, PAGE 2</a:t>
-            </a:r>
-            <a:endParaRPr lang="fr-FR" sz="1100" dirty="0"/>
-          </a:p>
-        </p:txBody>
-      </p:sp>
-      <p:sp>
-        <p:nvSpPr>
-          <p:cNvPr id="3" name="Text 0"/>
-          <p:cNvSpPr/>
-          <p:nvPr>
-            <p:ph idx="101" type="title" hasCustomPrompt="1"/>
-          </p:nvPr>
-        </p:nvSpPr>
-        <p:spPr>
-          <a:xfrm>
-            <a:off x="548640" y="676656"/>
-            <a:ext cx="11094415" cy="777240"/>
-          </a:xfrm>
-          <a:prstGeom prst="rect">
-            <a:avLst/>
-          </a:prstGeom>
-          <a:noFill/>
-          <a:ln/>
-        </p:spPr>
-        <p:txBody>
-          <a:bodyPr wrap="square" lIns="0" tIns="0" rIns="0" bIns="0" rtlCol="0" anchor="t"/>
-          <a:lstStyle/>
-          <a:p>
-            <a:pPr algn="l" indent="0" marL="0">
-              <a:buNone/>
-            </a:pPr>
-            <a:r>
-              <a:rPr lang="fr-FR" altLang="en-US" sz="3800" dirty="0">
-                <a:solidFill>
-                  <a:schemeClr val="tx1"/>
-                </a:solidFill>
-              </a:rPr>
-              <a:t>Chaque chiffre se détaille, créateur par créateur</a:t>
-            </a:r>
-            <a:endParaRPr lang="fr-FR" sz="3800" dirty="0"/>
-          </a:p>
-        </p:txBody>
-      </p:sp>
-      <p:pic>
-        <p:nvPicPr>
-          <p:cNvPr id="5" name="Image 0" descr="AToure Management &amp; Consulting">    </p:cNvPr>
-          <p:cNvPicPr>
-            <a:picLocks noChangeAspect="1"/>
-          </p:cNvPicPr>
-          <p:nvPr/>
-        </p:nvPicPr>
-        <p:blipFill>
-          <a:blip r:embed="rId1"/>
-          <a:stretch>
-            <a:fillRect/>
-          </a:stretch>
-        </p:blipFill>
-        <p:spPr>
-          <a:xfrm>
-            <a:off x="9098280" y="301752"/>
-            <a:ext cx="1417320" cy="226771"/>
-          </a:xfrm>
-          <a:prstGeom prst="rect">
-            <a:avLst/>
-          </a:prstGeom>
-        </p:spPr>
-      </p:pic>
-      <p:sp>
-        <p:nvSpPr>
-          <p:cNvPr id="6" name="Text 2"/>
-          <p:cNvSpPr txBox="1"/>
-          <p:nvPr/>
-        </p:nvSpPr>
-        <p:spPr>
-          <a:xfrm>
-            <a:off x="10570464" y="246888"/>
-            <a:ext cx="329184" cy="329184"/>
-          </a:xfrm>
-          <a:prstGeom prst="rect">
-            <a:avLst/>
-          </a:prstGeom>
-          <a:noFill/>
-          <a:ln/>
-        </p:spPr>
-        <p:txBody>
-          <a:bodyPr wrap="square" lIns="0" tIns="0" rIns="0" bIns="0" rtlCol="0" anchor="ctr"/>
-          <a:lstStyle/>
-          <a:p>
-            <a:pPr algn="ctr" indent="0" marL="0">
-              <a:buNone/>
-            </a:pPr>
-            <a:r>
-              <a:rPr lang="fr-FR" altLang="en-US" sz="1600" dirty="0">
-                <a:solidFill>
-                  <a:schemeClr val="accent3"/>
-                </a:solidFill>
-              </a:rPr>
-              <a:t>×</a:t>
-            </a:r>
-            <a:endParaRPr lang="fr-FR" sz="1600" dirty="0"/>
-          </a:p>
-        </p:txBody>
-      </p:sp>
-      <p:pic>
-        <p:nvPicPr>
-          <p:cNvPr id="7" name="Image 1" descr="Mother Africa Festival">    </p:cNvPr>
-          <p:cNvPicPr>
-            <a:picLocks noChangeAspect="1"/>
-          </p:cNvPicPr>
-          <p:nvPr/>
-        </p:nvPicPr>
-        <p:blipFill>
-          <a:blip r:embed="rId2"/>
-          <a:stretch>
-            <a:fillRect/>
-          </a:stretch>
-        </p:blipFill>
-        <p:spPr>
-          <a:xfrm>
-            <a:off x="10984687" y="182880"/>
-            <a:ext cx="657231" cy="466344"/>
-          </a:xfrm>
-          <a:prstGeom prst="rect">
-            <a:avLst/>
-          </a:prstGeom>
-        </p:spPr>
-      </p:pic>
-      <p:sp>
-        <p:nvSpPr>
-          <p:cNvPr id="8" name="Shape 3"/>
-          <p:cNvSpPr/>
-          <p:nvPr/>
-        </p:nvSpPr>
-        <p:spPr>
-          <a:xfrm>
-            <a:off x="548640" y="1783080"/>
-            <a:ext cx="11094415" cy="4434840"/>
-          </a:xfrm>
-          <a:prstGeom prst="roundRect">
-            <a:avLst>
-              <a:gd name="adj" fmla="val 1649"/>
-            </a:avLst>
-          </a:prstGeom>
-          <a:solidFill>
-            <a:schemeClr val="bg1"/>
-          </a:solidFill>
-          <a:ln w="9525">
-            <a:solidFill>
-              <a:schemeClr val="tx2">
-                <a:alpha val="28000"/>
-              </a:schemeClr>
-            </a:solidFill>
-            <a:prstDash val="solid"/>
-          </a:ln>
-          <a:effectLst>
-            <a:outerShdw sx="100000" sy="100000" kx="0" ky="0" algn="bl" rotWithShape="0" blurRad="127000" dist="38100" dir="5400000">
-              <a:srgbClr val="133524">
-                <a:alpha val="10000"/>
-              </a:srgbClr>
-            </a:outerShdw>
-          </a:effectLst>
-        </p:spPr>
-      </p:sp>
-      <p:sp>
-        <p:nvSpPr>
-          <p:cNvPr id="9" name="Text 4"/>
-          <p:cNvSpPr txBox="1"/>
-          <p:nvPr/>
-        </p:nvSpPr>
-        <p:spPr>
-          <a:xfrm>
-            <a:off x="822960" y="1984248"/>
-            <a:ext cx="3657600" cy="201168"/>
-          </a:xfrm>
-          <a:prstGeom prst="rect">
-            <a:avLst/>
-          </a:prstGeom>
-          <a:noFill/>
-          <a:ln/>
-        </p:spPr>
-        <p:txBody>
-          <a:bodyPr wrap="square" lIns="0" tIns="0" rIns="0" bIns="0" rtlCol="0" anchor="t"/>
-          <a:lstStyle/>
-          <a:p>
-            <a:pPr indent="0" marL="0">
-              <a:buNone/>
-            </a:pPr>
-            <a:r>
-              <a:rPr lang="fr-FR" altLang="en-US" sz="900" b="1" spc="300" kern="0" dirty="0">
-                <a:solidFill>
-                  <a:schemeClr val="accent3"/>
-                </a:solidFill>
-              </a:rPr>
-              <a:t>RAPPORT DE VISIBILITÉ  ·  PAGE 2</a:t>
-            </a:r>
-            <a:endParaRPr lang="fr-FR" sz="900" dirty="0"/>
-          </a:p>
-        </p:txBody>
-      </p:sp>
-      <p:sp>
-        <p:nvSpPr>
-          <p:cNvPr id="10" name="Text 5"/>
-          <p:cNvSpPr txBox="1"/>
-          <p:nvPr/>
-        </p:nvSpPr>
-        <p:spPr>
-          <a:xfrm>
-            <a:off x="822960" y="2185416"/>
-            <a:ext cx="5486400" cy="365760"/>
-          </a:xfrm>
-          <a:prstGeom prst="rect">
-            <a:avLst/>
-          </a:prstGeom>
-          <a:noFill/>
-          <a:ln/>
-        </p:spPr>
-        <p:txBody>
-          <a:bodyPr wrap="square" lIns="0" tIns="0" rIns="0" bIns="0" rtlCol="0" anchor="t"/>
-          <a:lstStyle/>
-          <a:p>
-            <a:pPr indent="0" marL="0">
-              <a:buNone/>
-            </a:pPr>
-            <a:r>
-              <a:rPr lang="fr-FR" altLang="en-US" sz="1800" dirty="0">
-                <a:solidFill>
-                  <a:schemeClr val="tx1"/>
-                </a:solidFill>
-                <a:latin typeface="+mj-lt" pitchFamily="34" charset="0"/>
-                <a:ea typeface="+mj-lt" pitchFamily="34" charset="-122"/>
-                <a:cs typeface="+mj-lt" pitchFamily="34" charset="-120"/>
-              </a:rPr>
-              <a:t>Mother Africa Festival 2026</a:t>
-            </a:r>
-            <a:endParaRPr lang="fr-FR" sz="1800" dirty="0"/>
-          </a:p>
-        </p:txBody>
-      </p:sp>
-      <p:pic>
-        <p:nvPicPr>
-          <p:cNvPr id="11" name="Image 2" descr="Mother Africa Festival">    </p:cNvPr>
-          <p:cNvPicPr>
-            <a:picLocks noChangeAspect="1"/>
-          </p:cNvPicPr>
-          <p:nvPr/>
-        </p:nvPicPr>
-        <p:blipFill>
-          <a:blip r:embed="rId3"/>
-          <a:stretch>
-            <a:fillRect/>
-          </a:stretch>
-        </p:blipFill>
-        <p:spPr>
-          <a:xfrm>
-            <a:off x="10865815" y="1984248"/>
-            <a:ext cx="541249" cy="384048"/>
-          </a:xfrm>
-          <a:prstGeom prst="rect">
-            <a:avLst/>
-          </a:prstGeom>
-        </p:spPr>
-      </p:pic>
-      <p:sp>
-        <p:nvSpPr>
-          <p:cNvPr id="12" name="Shape 6"/>
-          <p:cNvSpPr/>
-          <p:nvPr/>
-        </p:nvSpPr>
-        <p:spPr>
-          <a:xfrm>
-            <a:off x="822960" y="2624328"/>
-            <a:ext cx="10545775" cy="0"/>
-          </a:xfrm>
-          <a:prstGeom prst="line">
-            <a:avLst/>
-          </a:prstGeom>
-          <a:noFill/>
-          <a:ln w="12700">
-            <a:solidFill>
-              <a:schemeClr val="accent1"/>
-            </a:solidFill>
-            <a:prstDash val="solid"/>
-          </a:ln>
-        </p:spPr>
-      </p:sp>
-      <p:sp>
-        <p:nvSpPr>
-          <p:cNvPr id="13" name="Text 7"/>
-          <p:cNvSpPr txBox="1"/>
-          <p:nvPr/>
-        </p:nvSpPr>
-        <p:spPr>
-          <a:xfrm>
-            <a:off x="822960" y="2770632"/>
-            <a:ext cx="3657600" cy="256032"/>
-          </a:xfrm>
-          <a:prstGeom prst="rect">
-            <a:avLst/>
-          </a:prstGeom>
-          <a:noFill/>
-          <a:ln/>
-        </p:spPr>
-        <p:txBody>
-          <a:bodyPr wrap="square" lIns="0" tIns="0" rIns="0" bIns="0" rtlCol="0" anchor="t"/>
-          <a:lstStyle/>
-          <a:p>
-            <a:pPr indent="0" marL="0">
-              <a:buNone/>
-            </a:pPr>
-            <a:r>
-              <a:rPr lang="fr-FR" altLang="en-US" sz="1100" b="1" spc="300" kern="0" dirty="0">
-                <a:solidFill>
-                  <a:schemeClr val="accent3"/>
-                </a:solidFill>
-              </a:rPr>
-              <a:t>PAR CRÉATEUR</a:t>
-            </a:r>
-            <a:endParaRPr lang="fr-FR" sz="1100" dirty="0"/>
-          </a:p>
-        </p:txBody>
-      </p:sp>
-      <p:graphicFrame>
-        <p:nvGraphicFramePr>
-          <p:cNvPr id="13" name="Sample table by creator"/>
-          <p:cNvGraphicFramePr>
-            <a:graphicFrameLocks noGrp="1"/>
-          </p:cNvGraphicFramePr>
-          <p:nvPr>
-            <p:extLst>
-              <p:ext uri="{D42A27DB-BD31-4B8C-83A1-F6EECF244321}">
-                <p14:modId xmlns:p14="http://schemas.microsoft.com/office/powerpoint/2010/main" val="1579011935"/>
-              </p:ext>
-            </p:extLst>
-          </p:nvPr>
-        </p:nvGraphicFramePr>
-        <p:xfrm>
-          <a:off x="822960" y="3026664"/>
-          <a:ext cx="6126480" cy="914400"/>
-        </p:xfrm>
-        <a:graphic>
-          <a:graphicData uri="http://schemas.openxmlformats.org/drawingml/2006/table">
-            <a:tbl>
-              <a:tblPr/>
-              <a:tblGrid>
-                <a:gridCol w="1828800"/>
-                <a:gridCol w="731520"/>
-                <a:gridCol w="1188720"/>
-                <a:gridCol w="1188720"/>
-                <a:gridCol w="1188720"/>
-              </a:tblGrid>
-              <a:tr h="274320">
-                <a:tc>
-                  <a:txBody>
-                    <a:bodyPr/>
-                    <a:lstStyle/>
-                    <a:p>
-                      <a:pPr indent="0" marL="0">
-                        <a:buNone/>
-                      </a:pPr>
-                      <a:r>
-                        <a:rPr lang="en-US" sz="1000" b="1" dirty="0">
-                          <a:solidFill>
-                            <a:schemeClr val="bg1"/>
-                          </a:solidFill>
-                        </a:rPr>
-                        <a:t>Créateur</a:t>
-                      </a:r>
-                      <a:endParaRPr lang="en-US" sz="1000" dirty="0"/>
-                    </a:p>
-                  </a:txBody>
-                  <a:tcPr marL="128016" marR="128016" marT="54864" marB="54864" anchor="ctr">
-                    <a:lnL w="9525" cap="flat" cmpd="sng" algn="ctr">
-                      <a:solidFill>
-                        <a:srgbClr val="E3EDE6"/>
-                      </a:solidFill>
-                      <a:prstDash val="solid"/>
-                      <a:round/>
-                      <a:headEnd type="none" w="med" len="med"/>
-                      <a:tailEnd type="none" w="med" len="med"/>
-                    </a:lnL>
-                    <a:lnR w="9525" cap="flat" cmpd="sng" algn="ctr">
-                      <a:solidFill>
-                        <a:srgbClr val="E3EDE6"/>
-                      </a:solidFill>
-                      <a:prstDash val="solid"/>
-                      <a:round/>
-                      <a:headEnd type="none" w="med" len="med"/>
-                      <a:tailEnd type="none" w="med" len="med"/>
-                    </a:lnR>
-                    <a:lnT w="9525" cap="flat" cmpd="sng" algn="ctr">
-                      <a:solidFill>
-                        <a:srgbClr val="E3EDE6"/>
-                      </a:solidFill>
-                      <a:prstDash val="solid"/>
-                      <a:round/>
-                      <a:headEnd type="none" w="med" len="med"/>
-                      <a:tailEnd type="none" w="med" len="med"/>
-                    </a:lnT>
-                    <a:lnB w="9525" cap="flat" cmpd="sng" algn="ctr">
-                      <a:solidFill>
-                        <a:srgbClr val="E3EDE6"/>
-                      </a:solidFill>
-                      <a:prstDash val="solid"/>
-                      <a:round/>
-                      <a:headEnd type="none" w="med" len="med"/>
-                      <a:tailEnd type="none" w="med" len="med"/>
-                    </a:lnB>
-                    <a:solidFill>
-                      <a:schemeClr val="tx1"/>
-                    </a:solidFill>
-                  </a:tcPr>
-                </a:tc>
-                <a:tc>
-                  <a:txBody>
-                    <a:bodyPr/>
-                    <a:lstStyle/>
-                    <a:p>
-                      <a:pPr indent="0" marL="0">
-                        <a:buNone/>
-                      </a:pPr>
-                      <a:r>
-                        <a:rPr lang="en-US" sz="1000" b="1" dirty="0">
-                          <a:solidFill>
-                            <a:schemeClr val="bg1"/>
-                          </a:solidFill>
-                        </a:rPr>
-                        <a:t>Posts</a:t>
-                      </a:r>
-                      <a:endParaRPr lang="en-US" sz="1000" dirty="0"/>
-                    </a:p>
-                  </a:txBody>
-                  <a:tcPr marL="128016" marR="128016" marT="54864" marB="54864" anchor="ctr">
-                    <a:lnL w="9525" cap="flat" cmpd="sng" algn="ctr">
-                      <a:solidFill>
-                        <a:srgbClr val="E3EDE6"/>
-                      </a:solidFill>
-                      <a:prstDash val="solid"/>
-                      <a:round/>
-                      <a:headEnd type="none" w="med" len="med"/>
-                      <a:tailEnd type="none" w="med" len="med"/>
-                    </a:lnL>
-                    <a:lnR w="9525" cap="flat" cmpd="sng" algn="ctr">
-                      <a:solidFill>
-                        <a:srgbClr val="E3EDE6"/>
-                      </a:solidFill>
-                      <a:prstDash val="solid"/>
-                      <a:round/>
-                      <a:headEnd type="none" w="med" len="med"/>
-                      <a:tailEnd type="none" w="med" len="med"/>
-                    </a:lnR>
-                    <a:lnT w="9525" cap="flat" cmpd="sng" algn="ctr">
-                      <a:solidFill>
-                        <a:srgbClr val="E3EDE6"/>
-                      </a:solidFill>
-                      <a:prstDash val="solid"/>
-                      <a:round/>
-                      <a:headEnd type="none" w="med" len="med"/>
-                      <a:tailEnd type="none" w="med" len="med"/>
-                    </a:lnT>
-                    <a:lnB w="9525" cap="flat" cmpd="sng" algn="ctr">
-                      <a:solidFill>
-                        <a:srgbClr val="E3EDE6"/>
-                      </a:solidFill>
-                      <a:prstDash val="solid"/>
-                      <a:round/>
-                      <a:headEnd type="none" w="med" len="med"/>
-                      <a:tailEnd type="none" w="med" len="med"/>
-                    </a:lnB>
-                    <a:solidFill>
-                      <a:schemeClr val="tx1"/>
-                    </a:solidFill>
-                  </a:tcPr>
-                </a:tc>
-                <a:tc>
-                  <a:txBody>
-                    <a:bodyPr/>
-                    <a:lstStyle/>
-                    <a:p>
-                      <a:pPr indent="0" marL="0">
-                        <a:buNone/>
-                      </a:pPr>
-                      <a:r>
-                        <a:rPr lang="en-US" sz="1000" b="1" dirty="0">
-                          <a:solidFill>
-                            <a:schemeClr val="bg1"/>
-                          </a:solidFill>
-                        </a:rPr>
-                        <a:t>Vues</a:t>
-                      </a:r>
-                      <a:endParaRPr lang="en-US" sz="1000" dirty="0"/>
-                    </a:p>
-                  </a:txBody>
-                  <a:tcPr marL="128016" marR="128016" marT="54864" marB="54864" anchor="ctr">
-                    <a:lnL w="9525" cap="flat" cmpd="sng" algn="ctr">
-                      <a:solidFill>
-                        <a:srgbClr val="E3EDE6"/>
-                      </a:solidFill>
-                      <a:prstDash val="solid"/>
-                      <a:round/>
-                      <a:headEnd type="none" w="med" len="med"/>
-                      <a:tailEnd type="none" w="med" len="med"/>
-                    </a:lnL>
-                    <a:lnR w="9525" cap="flat" cmpd="sng" algn="ctr">
-                      <a:solidFill>
-                        <a:srgbClr val="E3EDE6"/>
-                      </a:solidFill>
-                      <a:prstDash val="solid"/>
-                      <a:round/>
-                      <a:headEnd type="none" w="med" len="med"/>
-                      <a:tailEnd type="none" w="med" len="med"/>
-                    </a:lnR>
-                    <a:lnT w="9525" cap="flat" cmpd="sng" algn="ctr">
-                      <a:solidFill>
-                        <a:srgbClr val="E3EDE6"/>
-                      </a:solidFill>
-                      <a:prstDash val="solid"/>
-                      <a:round/>
-                      <a:headEnd type="none" w="med" len="med"/>
-                      <a:tailEnd type="none" w="med" len="med"/>
-                    </a:lnT>
-                    <a:lnB w="9525" cap="flat" cmpd="sng" algn="ctr">
-                      <a:solidFill>
-                        <a:srgbClr val="E3EDE6"/>
-                      </a:solidFill>
-                      <a:prstDash val="solid"/>
-                      <a:round/>
-                      <a:headEnd type="none" w="med" len="med"/>
-                      <a:tailEnd type="none" w="med" len="med"/>
-                    </a:lnB>
-                    <a:solidFill>
-                      <a:schemeClr val="tx1"/>
-                    </a:solidFill>
-                  </a:tcPr>
-                </a:tc>
-                <a:tc>
-                  <a:txBody>
-                    <a:bodyPr/>
-                    <a:lstStyle/>
-                    <a:p>
-                      <a:pPr indent="0" marL="0">
-                        <a:buNone/>
-                      </a:pPr>
-                      <a:r>
-                        <a:rPr lang="en-US" sz="1000" b="1" dirty="0">
-                          <a:solidFill>
-                            <a:schemeClr val="bg1"/>
-                          </a:solidFill>
-                        </a:rPr>
-                        <a:t>Interactions</a:t>
-                      </a:r>
-                      <a:endParaRPr lang="en-US" sz="1000" dirty="0"/>
-                    </a:p>
-                  </a:txBody>
-                  <a:tcPr marL="128016" marR="128016" marT="54864" marB="54864" anchor="ctr">
-                    <a:lnL w="9525" cap="flat" cmpd="sng" algn="ctr">
-                      <a:solidFill>
-                        <a:srgbClr val="E3EDE6"/>
-                      </a:solidFill>
-                      <a:prstDash val="solid"/>
-                      <a:round/>
-                      <a:headEnd type="none" w="med" len="med"/>
-                      <a:tailEnd type="none" w="med" len="med"/>
-                    </a:lnL>
-                    <a:lnR w="9525" cap="flat" cmpd="sng" algn="ctr">
-                      <a:solidFill>
-                        <a:srgbClr val="E3EDE6"/>
-                      </a:solidFill>
-                      <a:prstDash val="solid"/>
-                      <a:round/>
-                      <a:headEnd type="none" w="med" len="med"/>
-                      <a:tailEnd type="none" w="med" len="med"/>
-                    </a:lnR>
-                    <a:lnT w="9525" cap="flat" cmpd="sng" algn="ctr">
-                      <a:solidFill>
-                        <a:srgbClr val="E3EDE6"/>
-                      </a:solidFill>
-                      <a:prstDash val="solid"/>
-                      <a:round/>
-                      <a:headEnd type="none" w="med" len="med"/>
-                      <a:tailEnd type="none" w="med" len="med"/>
-                    </a:lnT>
-                    <a:lnB w="9525" cap="flat" cmpd="sng" algn="ctr">
-                      <a:solidFill>
-                        <a:srgbClr val="E3EDE6"/>
-                      </a:solidFill>
-                      <a:prstDash val="solid"/>
-                      <a:round/>
-                      <a:headEnd type="none" w="med" len="med"/>
-                      <a:tailEnd type="none" w="med" len="med"/>
-                    </a:lnB>
-                    <a:solidFill>
-                      <a:schemeClr val="tx1"/>
-                    </a:solidFill>
-                  </a:tcPr>
-                </a:tc>
-                <a:tc>
-                  <a:txBody>
-                    <a:bodyPr/>
-                    <a:lstStyle/>
-                    <a:p>
-                      <a:pPr indent="0" marL="0">
-                        <a:buNone/>
-                      </a:pPr>
-                      <a:r>
-                        <a:rPr lang="en-US" sz="1000" b="1" dirty="0">
-                          <a:solidFill>
-                            <a:schemeClr val="bg1"/>
-                          </a:solidFill>
-                        </a:rPr>
-                        <a:t>Clics billetterie</a:t>
-                      </a:r>
-                      <a:endParaRPr lang="en-US" sz="1000" dirty="0"/>
-                    </a:p>
-                  </a:txBody>
-                  <a:tcPr marL="128016" marR="128016" marT="54864" marB="54864" anchor="ctr">
-                    <a:lnL w="9525" cap="flat" cmpd="sng" algn="ctr">
-                      <a:solidFill>
-                        <a:srgbClr val="E3EDE6"/>
-                      </a:solidFill>
-                      <a:prstDash val="solid"/>
-                      <a:round/>
-                      <a:headEnd type="none" w="med" len="med"/>
-                      <a:tailEnd type="none" w="med" len="med"/>
-                    </a:lnL>
-                    <a:lnR w="9525" cap="flat" cmpd="sng" algn="ctr">
-                      <a:solidFill>
-                        <a:srgbClr val="E3EDE6"/>
-                      </a:solidFill>
-                      <a:prstDash val="solid"/>
-                      <a:round/>
-                      <a:headEnd type="none" w="med" len="med"/>
-                      <a:tailEnd type="none" w="med" len="med"/>
-                    </a:lnR>
-                    <a:lnT w="9525" cap="flat" cmpd="sng" algn="ctr">
-                      <a:solidFill>
-                        <a:srgbClr val="E3EDE6"/>
-                      </a:solidFill>
-                      <a:prstDash val="solid"/>
-                      <a:round/>
-                      <a:headEnd type="none" w="med" len="med"/>
-                      <a:tailEnd type="none" w="med" len="med"/>
-                    </a:lnT>
-                    <a:lnB w="9525" cap="flat" cmpd="sng" algn="ctr">
-                      <a:solidFill>
-                        <a:srgbClr val="E3EDE6"/>
-                      </a:solidFill>
-                      <a:prstDash val="solid"/>
-                      <a:round/>
-                      <a:headEnd type="none" w="med" len="med"/>
-                      <a:tailEnd type="none" w="med" len="med"/>
-                    </a:lnB>
-                    <a:solidFill>
-                      <a:schemeClr val="tx1"/>
-                    </a:solidFill>
-                  </a:tcPr>
-                </a:tc>
-              </a:tr>
-              <a:tr h="274320">
-                <a:tc>
-                  <a:txBody>
-                    <a:bodyPr/>
-                    <a:lstStyle/>
-                    <a:p>
-                      <a:pPr indent="0" marL="0">
-                        <a:buNone/>
-                      </a:pPr>
-                      <a:r>
-                        <a:rPr lang="en-US" sz="1000" b="1" dirty="0">
-                          <a:solidFill>
-                            <a:schemeClr val="tx1"/>
-                          </a:solidFill>
-                        </a:rPr>
-                        <a:t>Créateur A</a:t>
-                      </a:r>
-                      <a:endParaRPr lang="en-US" sz="1000" dirty="0"/>
-                    </a:p>
-                  </a:txBody>
-                  <a:tcPr marL="128016" marR="128016" marT="54864" marB="54864" anchor="ctr">
-                    <a:lnL w="9525" cap="flat" cmpd="sng" algn="ctr">
-                      <a:solidFill>
-                        <a:srgbClr val="E3EDE6"/>
-                      </a:solidFill>
-                      <a:prstDash val="solid"/>
-                      <a:round/>
-                      <a:headEnd type="none" w="med" len="med"/>
-                      <a:tailEnd type="none" w="med" len="med"/>
-                    </a:lnL>
-                    <a:lnR w="9525" cap="flat" cmpd="sng" algn="ctr">
-                      <a:solidFill>
-                        <a:srgbClr val="E3EDE6"/>
-                      </a:solidFill>
-                      <a:prstDash val="solid"/>
-                      <a:round/>
-                      <a:headEnd type="none" w="med" len="med"/>
-                      <a:tailEnd type="none" w="med" len="med"/>
-                    </a:lnR>
-                    <a:lnT w="9525" cap="flat" cmpd="sng" algn="ctr">
-                      <a:solidFill>
-                        <a:srgbClr val="E3EDE6"/>
-                      </a:solidFill>
-                      <a:prstDash val="solid"/>
-                      <a:round/>
-                      <a:headEnd type="none" w="med" len="med"/>
-                      <a:tailEnd type="none" w="med" len="med"/>
-                    </a:lnT>
-                    <a:lnB w="9525" cap="flat" cmpd="sng" algn="ctr">
-                      <a:solidFill>
-                        <a:srgbClr val="E3EDE6"/>
-                      </a:solidFill>
-                      <a:prstDash val="solid"/>
-                      <a:round/>
-                      <a:headEnd type="none" w="med" len="med"/>
-                      <a:tailEnd type="none" w="med" len="med"/>
-                    </a:lnB>
-                    <a:solidFill>
-                      <a:schemeClr val="bg1"/>
-                    </a:solidFill>
-                  </a:tcPr>
-                </a:tc>
-                <a:tc>
-                  <a:txBody>
-                    <a:bodyPr/>
-                    <a:lstStyle/>
-                    <a:p>
-                      <a:pPr indent="0" marL="0">
-                        <a:buNone/>
-                      </a:pPr>
-                      <a:r>
-                        <a:rPr lang="en-US" sz="1000" dirty="0">
-                          <a:solidFill>
-                            <a:schemeClr val="tx2"/>
-                          </a:solidFill>
-                        </a:rPr>
-                        <a:t>6</a:t>
-                      </a:r>
-                      <a:endParaRPr lang="en-US" sz="1000" dirty="0"/>
-                    </a:p>
-                  </a:txBody>
-                  <a:tcPr marL="128016" marR="128016" marT="54864" marB="54864" anchor="ctr">
-                    <a:lnL w="9525" cap="flat" cmpd="sng" algn="ctr">
-                      <a:solidFill>
-                        <a:srgbClr val="E3EDE6"/>
-                      </a:solidFill>
-                      <a:prstDash val="solid"/>
-                      <a:round/>
-                      <a:headEnd type="none" w="med" len="med"/>
-                      <a:tailEnd type="none" w="med" len="med"/>
-                    </a:lnL>
-                    <a:lnR w="9525" cap="flat" cmpd="sng" algn="ctr">
-                      <a:solidFill>
-                        <a:srgbClr val="E3EDE6"/>
-                      </a:solidFill>
-                      <a:prstDash val="solid"/>
-                      <a:round/>
-                      <a:headEnd type="none" w="med" len="med"/>
-                      <a:tailEnd type="none" w="med" len="med"/>
-                    </a:lnR>
-                    <a:lnT w="9525" cap="flat" cmpd="sng" algn="ctr">
-                      <a:solidFill>
-                        <a:srgbClr val="E3EDE6"/>
-                      </a:solidFill>
-                      <a:prstDash val="solid"/>
-                      <a:round/>
-                      <a:headEnd type="none" w="med" len="med"/>
-                      <a:tailEnd type="none" w="med" len="med"/>
-                    </a:lnT>
-                    <a:lnB w="9525" cap="flat" cmpd="sng" algn="ctr">
-                      <a:solidFill>
-                        <a:srgbClr val="E3EDE6"/>
-                      </a:solidFill>
-                      <a:prstDash val="solid"/>
-                      <a:round/>
-                      <a:headEnd type="none" w="med" len="med"/>
-                      <a:tailEnd type="none" w="med" len="med"/>
-                    </a:lnB>
-                    <a:solidFill>
-                      <a:schemeClr val="bg1"/>
-                    </a:solidFill>
-                  </a:tcPr>
-                </a:tc>
-                <a:tc>
-                  <a:txBody>
-                    <a:bodyPr/>
-                    <a:lstStyle/>
-                    <a:p>
-                      <a:pPr indent="0" marL="0">
-                        <a:buNone/>
-                      </a:pPr>
-                      <a:r>
-                        <a:rPr lang="en-US" sz="1000" dirty="0">
-                          <a:solidFill>
-                            <a:schemeClr val="tx2"/>
-                          </a:solidFill>
-                        </a:rPr>
-                        <a:t>820 000</a:t>
-                      </a:r>
-                      <a:endParaRPr lang="en-US" sz="1000" dirty="0"/>
-                    </a:p>
-                  </a:txBody>
-                  <a:tcPr marL="128016" marR="128016" marT="54864" marB="54864" anchor="ctr">
-                    <a:lnL w="9525" cap="flat" cmpd="sng" algn="ctr">
-                      <a:solidFill>
-                        <a:srgbClr val="E3EDE6"/>
-                      </a:solidFill>
-                      <a:prstDash val="solid"/>
-                      <a:round/>
-                      <a:headEnd type="none" w="med" len="med"/>
-                      <a:tailEnd type="none" w="med" len="med"/>
-                    </a:lnL>
-                    <a:lnR w="9525" cap="flat" cmpd="sng" algn="ctr">
-                      <a:solidFill>
-                        <a:srgbClr val="E3EDE6"/>
-                      </a:solidFill>
-                      <a:prstDash val="solid"/>
-                      <a:round/>
-                      <a:headEnd type="none" w="med" len="med"/>
-                      <a:tailEnd type="none" w="med" len="med"/>
-                    </a:lnR>
-                    <a:lnT w="9525" cap="flat" cmpd="sng" algn="ctr">
-                      <a:solidFill>
-                        <a:srgbClr val="E3EDE6"/>
-                      </a:solidFill>
-                      <a:prstDash val="solid"/>
-                      <a:round/>
-                      <a:headEnd type="none" w="med" len="med"/>
-                      <a:tailEnd type="none" w="med" len="med"/>
-                    </a:lnT>
-                    <a:lnB w="9525" cap="flat" cmpd="sng" algn="ctr">
-                      <a:solidFill>
-                        <a:srgbClr val="E3EDE6"/>
-                      </a:solidFill>
-                      <a:prstDash val="solid"/>
-                      <a:round/>
-                      <a:headEnd type="none" w="med" len="med"/>
-                      <a:tailEnd type="none" w="med" len="med"/>
-                    </a:lnB>
-                    <a:solidFill>
-                      <a:schemeClr val="bg1"/>
-                    </a:solidFill>
-                  </a:tcPr>
-                </a:tc>
-                <a:tc>
-                  <a:txBody>
-                    <a:bodyPr/>
-                    <a:lstStyle/>
-                    <a:p>
-                      <a:pPr indent="0" marL="0">
-                        <a:buNone/>
-                      </a:pPr>
-                      <a:r>
-                        <a:rPr lang="en-US" sz="1000" dirty="0">
-                          <a:solidFill>
-                            <a:schemeClr val="tx2"/>
-                          </a:solidFill>
-                        </a:rPr>
-                        <a:t>61 000</a:t>
-                      </a:r>
-                      <a:endParaRPr lang="en-US" sz="1000" dirty="0"/>
-                    </a:p>
-                  </a:txBody>
-                  <a:tcPr marL="128016" marR="128016" marT="54864" marB="54864" anchor="ctr">
-                    <a:lnL w="9525" cap="flat" cmpd="sng" algn="ctr">
-                      <a:solidFill>
-                        <a:srgbClr val="E3EDE6"/>
-                      </a:solidFill>
-                      <a:prstDash val="solid"/>
-                      <a:round/>
-                      <a:headEnd type="none" w="med" len="med"/>
-                      <a:tailEnd type="none" w="med" len="med"/>
-                    </a:lnL>
-                    <a:lnR w="9525" cap="flat" cmpd="sng" algn="ctr">
-                      <a:solidFill>
-                        <a:srgbClr val="E3EDE6"/>
-                      </a:solidFill>
-                      <a:prstDash val="solid"/>
-                      <a:round/>
-                      <a:headEnd type="none" w="med" len="med"/>
-                      <a:tailEnd type="none" w="med" len="med"/>
-                    </a:lnR>
-                    <a:lnT w="9525" cap="flat" cmpd="sng" algn="ctr">
-                      <a:solidFill>
-                        <a:srgbClr val="E3EDE6"/>
-                      </a:solidFill>
-                      <a:prstDash val="solid"/>
-                      <a:round/>
-                      <a:headEnd type="none" w="med" len="med"/>
-                      <a:tailEnd type="none" w="med" len="med"/>
-                    </a:lnT>
-                    <a:lnB w="9525" cap="flat" cmpd="sng" algn="ctr">
-                      <a:solidFill>
-                        <a:srgbClr val="E3EDE6"/>
-                      </a:solidFill>
-                      <a:prstDash val="solid"/>
-                      <a:round/>
-                      <a:headEnd type="none" w="med" len="med"/>
-                      <a:tailEnd type="none" w="med" len="med"/>
-                    </a:lnB>
-                    <a:solidFill>
-                      <a:schemeClr val="bg1"/>
-                    </a:solidFill>
-                  </a:tcPr>
-                </a:tc>
-                <a:tc>
-                  <a:txBody>
-                    <a:bodyPr/>
-                    <a:lstStyle/>
-                    <a:p>
-                      <a:pPr indent="0" marL="0">
-                        <a:buNone/>
-                      </a:pPr>
-                      <a:r>
-                        <a:rPr lang="en-US" sz="1000" dirty="0">
-                          <a:solidFill>
-                            <a:schemeClr val="tx2"/>
-                          </a:solidFill>
-                        </a:rPr>
-                        <a:t>2 100</a:t>
-                      </a:r>
-                      <a:endParaRPr lang="en-US" sz="1000" dirty="0"/>
-                    </a:p>
-                  </a:txBody>
-                  <a:tcPr marL="128016" marR="128016" marT="54864" marB="54864" anchor="ctr">
-                    <a:lnL w="9525" cap="flat" cmpd="sng" algn="ctr">
-                      <a:solidFill>
-                        <a:srgbClr val="E3EDE6"/>
-                      </a:solidFill>
-                      <a:prstDash val="solid"/>
-                      <a:round/>
-                      <a:headEnd type="none" w="med" len="med"/>
-                      <a:tailEnd type="none" w="med" len="med"/>
-                    </a:lnL>
-                    <a:lnR w="9525" cap="flat" cmpd="sng" algn="ctr">
-                      <a:solidFill>
-                        <a:srgbClr val="E3EDE6"/>
-                      </a:solidFill>
-                      <a:prstDash val="solid"/>
-                      <a:round/>
-                      <a:headEnd type="none" w="med" len="med"/>
-                      <a:tailEnd type="none" w="med" len="med"/>
-                    </a:lnR>
-                    <a:lnT w="9525" cap="flat" cmpd="sng" algn="ctr">
-                      <a:solidFill>
-                        <a:srgbClr val="E3EDE6"/>
-                      </a:solidFill>
-                      <a:prstDash val="solid"/>
-                      <a:round/>
-                      <a:headEnd type="none" w="med" len="med"/>
-                      <a:tailEnd type="none" w="med" len="med"/>
-                    </a:lnT>
-                    <a:lnB w="9525" cap="flat" cmpd="sng" algn="ctr">
-                      <a:solidFill>
-                        <a:srgbClr val="E3EDE6"/>
-                      </a:solidFill>
-                      <a:prstDash val="solid"/>
-                      <a:round/>
-                      <a:headEnd type="none" w="med" len="med"/>
-                      <a:tailEnd type="none" w="med" len="med"/>
-                    </a:lnB>
-                    <a:solidFill>
-                      <a:schemeClr val="bg1"/>
-                    </a:solidFill>
-                  </a:tcPr>
-                </a:tc>
-              </a:tr>
-              <a:tr h="274320">
-                <a:tc>
-                  <a:txBody>
-                    <a:bodyPr/>
-                    <a:lstStyle/>
-                    <a:p>
-                      <a:pPr indent="0" marL="0">
-                        <a:buNone/>
-                      </a:pPr>
-                      <a:r>
-                        <a:rPr lang="en-US" sz="1000" b="1" dirty="0">
-                          <a:solidFill>
-                            <a:schemeClr val="tx1"/>
-                          </a:solidFill>
-                        </a:rPr>
-                        <a:t>Créateur B</a:t>
-                      </a:r>
-                      <a:endParaRPr lang="en-US" sz="1000" dirty="0"/>
-                    </a:p>
-                  </a:txBody>
-                  <a:tcPr marL="128016" marR="128016" marT="54864" marB="54864" anchor="ctr">
-                    <a:lnL w="9525" cap="flat" cmpd="sng" algn="ctr">
-                      <a:solidFill>
-                        <a:srgbClr val="E3EDE6"/>
-                      </a:solidFill>
-                      <a:prstDash val="solid"/>
-                      <a:round/>
-                      <a:headEnd type="none" w="med" len="med"/>
-                      <a:tailEnd type="none" w="med" len="med"/>
-                    </a:lnL>
-                    <a:lnR w="9525" cap="flat" cmpd="sng" algn="ctr">
-                      <a:solidFill>
-                        <a:srgbClr val="E3EDE6"/>
-                      </a:solidFill>
-                      <a:prstDash val="solid"/>
-                      <a:round/>
-                      <a:headEnd type="none" w="med" len="med"/>
-                      <a:tailEnd type="none" w="med" len="med"/>
-                    </a:lnR>
-                    <a:lnT w="9525" cap="flat" cmpd="sng" algn="ctr">
-                      <a:solidFill>
-                        <a:srgbClr val="E3EDE6"/>
-                      </a:solidFill>
-                      <a:prstDash val="solid"/>
-                      <a:round/>
-                      <a:headEnd type="none" w="med" len="med"/>
-                      <a:tailEnd type="none" w="med" len="med"/>
-                    </a:lnT>
-                    <a:lnB w="9525" cap="flat" cmpd="sng" algn="ctr">
-                      <a:solidFill>
-                        <a:srgbClr val="E3EDE6"/>
-                      </a:solidFill>
-                      <a:prstDash val="solid"/>
-                      <a:round/>
-                      <a:headEnd type="none" w="med" len="med"/>
-                      <a:tailEnd type="none" w="med" len="med"/>
-                    </a:lnB>
-                    <a:solidFill>
-                      <a:schemeClr val="bg1"/>
-                    </a:solidFill>
-                  </a:tcPr>
-                </a:tc>
-                <a:tc>
-                  <a:txBody>
-                    <a:bodyPr/>
-                    <a:lstStyle/>
-                    <a:p>
-                      <a:pPr indent="0" marL="0">
-                        <a:buNone/>
-                      </a:pPr>
-                      <a:r>
-                        <a:rPr lang="en-US" sz="1000" dirty="0">
-                          <a:solidFill>
-                            <a:schemeClr val="tx2"/>
-                          </a:solidFill>
-                        </a:rPr>
-                        <a:t>5</a:t>
-                      </a:r>
-                      <a:endParaRPr lang="en-US" sz="1000" dirty="0"/>
-                    </a:p>
-                  </a:txBody>
-                  <a:tcPr marL="128016" marR="128016" marT="54864" marB="54864" anchor="ctr">
-                    <a:lnL w="9525" cap="flat" cmpd="sng" algn="ctr">
-                      <a:solidFill>
-                        <a:srgbClr val="E3EDE6"/>
-                      </a:solidFill>
-                      <a:prstDash val="solid"/>
-                      <a:round/>
-                      <a:headEnd type="none" w="med" len="med"/>
-                      <a:tailEnd type="none" w="med" len="med"/>
-                    </a:lnL>
-                    <a:lnR w="9525" cap="flat" cmpd="sng" algn="ctr">
-                      <a:solidFill>
-                        <a:srgbClr val="E3EDE6"/>
-                      </a:solidFill>
-                      <a:prstDash val="solid"/>
-                      <a:round/>
-                      <a:headEnd type="none" w="med" len="med"/>
-                      <a:tailEnd type="none" w="med" len="med"/>
-                    </a:lnR>
-                    <a:lnT w="9525" cap="flat" cmpd="sng" algn="ctr">
-                      <a:solidFill>
-                        <a:srgbClr val="E3EDE6"/>
-                      </a:solidFill>
-                      <a:prstDash val="solid"/>
-                      <a:round/>
-                      <a:headEnd type="none" w="med" len="med"/>
-                      <a:tailEnd type="none" w="med" len="med"/>
-                    </a:lnT>
-                    <a:lnB w="9525" cap="flat" cmpd="sng" algn="ctr">
-                      <a:solidFill>
-                        <a:srgbClr val="E3EDE6"/>
-                      </a:solidFill>
-                      <a:prstDash val="solid"/>
-                      <a:round/>
-                      <a:headEnd type="none" w="med" len="med"/>
-                      <a:tailEnd type="none" w="med" len="med"/>
-                    </a:lnB>
-                    <a:solidFill>
-                      <a:schemeClr val="bg1"/>
-                    </a:solidFill>
-                  </a:tcPr>
-                </a:tc>
-                <a:tc>
-                  <a:txBody>
-                    <a:bodyPr/>
-                    <a:lstStyle/>
-                    <a:p>
-                      <a:pPr indent="0" marL="0">
-                        <a:buNone/>
-                      </a:pPr>
-                      <a:r>
-                        <a:rPr lang="en-US" sz="1000" dirty="0">
-                          <a:solidFill>
-                            <a:schemeClr val="tx2"/>
-                          </a:solidFill>
-                        </a:rPr>
-                        <a:t>610 000</a:t>
-                      </a:r>
-                      <a:endParaRPr lang="en-US" sz="1000" dirty="0"/>
-                    </a:p>
-                  </a:txBody>
-                  <a:tcPr marL="128016" marR="128016" marT="54864" marB="54864" anchor="ctr">
-                    <a:lnL w="9525" cap="flat" cmpd="sng" algn="ctr">
-                      <a:solidFill>
-                        <a:srgbClr val="E3EDE6"/>
-                      </a:solidFill>
-                      <a:prstDash val="solid"/>
-                      <a:round/>
-                      <a:headEnd type="none" w="med" len="med"/>
-                      <a:tailEnd type="none" w="med" len="med"/>
-                    </a:lnL>
-                    <a:lnR w="9525" cap="flat" cmpd="sng" algn="ctr">
-                      <a:solidFill>
-                        <a:srgbClr val="E3EDE6"/>
-                      </a:solidFill>
-                      <a:prstDash val="solid"/>
-                      <a:round/>
-                      <a:headEnd type="none" w="med" len="med"/>
-                      <a:tailEnd type="none" w="med" len="med"/>
-                    </a:lnR>
-                    <a:lnT w="9525" cap="flat" cmpd="sng" algn="ctr">
-                      <a:solidFill>
-                        <a:srgbClr val="E3EDE6"/>
-                      </a:solidFill>
-                      <a:prstDash val="solid"/>
-                      <a:round/>
-                      <a:headEnd type="none" w="med" len="med"/>
-                      <a:tailEnd type="none" w="med" len="med"/>
-                    </a:lnT>
-                    <a:lnB w="9525" cap="flat" cmpd="sng" algn="ctr">
-                      <a:solidFill>
-                        <a:srgbClr val="E3EDE6"/>
-                      </a:solidFill>
-                      <a:prstDash val="solid"/>
-                      <a:round/>
-                      <a:headEnd type="none" w="med" len="med"/>
-                      <a:tailEnd type="none" w="med" len="med"/>
-                    </a:lnB>
-                    <a:solidFill>
-                      <a:schemeClr val="bg1"/>
-                    </a:solidFill>
-                  </a:tcPr>
-                </a:tc>
-                <a:tc>
-                  <a:txBody>
-                    <a:bodyPr/>
-                    <a:lstStyle/>
-                    <a:p>
-                      <a:pPr indent="0" marL="0">
-                        <a:buNone/>
-                      </a:pPr>
-                      <a:r>
-                        <a:rPr lang="en-US" sz="1000" dirty="0">
-                          <a:solidFill>
-                            <a:schemeClr val="tx2"/>
-                          </a:solidFill>
-                        </a:rPr>
-                        <a:t>48 500</a:t>
-                      </a:r>
-                      <a:endParaRPr lang="en-US" sz="1000" dirty="0"/>
-                    </a:p>
-                  </a:txBody>
-                  <a:tcPr marL="128016" marR="128016" marT="54864" marB="54864" anchor="ctr">
-                    <a:lnL w="9525" cap="flat" cmpd="sng" algn="ctr">
-                      <a:solidFill>
-                        <a:srgbClr val="E3EDE6"/>
-                      </a:solidFill>
-                      <a:prstDash val="solid"/>
-                      <a:round/>
-                      <a:headEnd type="none" w="med" len="med"/>
-                      <a:tailEnd type="none" w="med" len="med"/>
-                    </a:lnL>
-                    <a:lnR w="9525" cap="flat" cmpd="sng" algn="ctr">
-                      <a:solidFill>
-                        <a:srgbClr val="E3EDE6"/>
-                      </a:solidFill>
-                      <a:prstDash val="solid"/>
-                      <a:round/>
-                      <a:headEnd type="none" w="med" len="med"/>
-                      <a:tailEnd type="none" w="med" len="med"/>
-                    </a:lnR>
-                    <a:lnT w="9525" cap="flat" cmpd="sng" algn="ctr">
-                      <a:solidFill>
-                        <a:srgbClr val="E3EDE6"/>
-                      </a:solidFill>
-                      <a:prstDash val="solid"/>
-                      <a:round/>
-                      <a:headEnd type="none" w="med" len="med"/>
-                      <a:tailEnd type="none" w="med" len="med"/>
-                    </a:lnT>
-                    <a:lnB w="9525" cap="flat" cmpd="sng" algn="ctr">
-                      <a:solidFill>
-                        <a:srgbClr val="E3EDE6"/>
-                      </a:solidFill>
-                      <a:prstDash val="solid"/>
-                      <a:round/>
-                      <a:headEnd type="none" w="med" len="med"/>
-                      <a:tailEnd type="none" w="med" len="med"/>
-                    </a:lnB>
-                    <a:solidFill>
-                      <a:schemeClr val="bg1"/>
-                    </a:solidFill>
-                  </a:tcPr>
-                </a:tc>
-                <a:tc>
-                  <a:txBody>
-                    <a:bodyPr/>
-                    <a:lstStyle/>
-                    <a:p>
-                      <a:pPr indent="0" marL="0">
-                        <a:buNone/>
-                      </a:pPr>
-                      <a:r>
-                        <a:rPr lang="en-US" sz="1000" dirty="0">
-                          <a:solidFill>
-                            <a:schemeClr val="tx2"/>
-                          </a:solidFill>
-                        </a:rPr>
-                        <a:t>1 650</a:t>
-                      </a:r>
-                      <a:endParaRPr lang="en-US" sz="1000" dirty="0"/>
-                    </a:p>
-                  </a:txBody>
-                  <a:tcPr marL="128016" marR="128016" marT="54864" marB="54864" anchor="ctr">
-                    <a:lnL w="9525" cap="flat" cmpd="sng" algn="ctr">
-                      <a:solidFill>
-                        <a:srgbClr val="E3EDE6"/>
-                      </a:solidFill>
-                      <a:prstDash val="solid"/>
-                      <a:round/>
-                      <a:headEnd type="none" w="med" len="med"/>
-                      <a:tailEnd type="none" w="med" len="med"/>
-                    </a:lnL>
-                    <a:lnR w="9525" cap="flat" cmpd="sng" algn="ctr">
-                      <a:solidFill>
-                        <a:srgbClr val="E3EDE6"/>
-                      </a:solidFill>
-                      <a:prstDash val="solid"/>
-                      <a:round/>
-                      <a:headEnd type="none" w="med" len="med"/>
-                      <a:tailEnd type="none" w="med" len="med"/>
-                    </a:lnR>
-                    <a:lnT w="9525" cap="flat" cmpd="sng" algn="ctr">
-                      <a:solidFill>
-                        <a:srgbClr val="E3EDE6"/>
-                      </a:solidFill>
-                      <a:prstDash val="solid"/>
-                      <a:round/>
-                      <a:headEnd type="none" w="med" len="med"/>
-                      <a:tailEnd type="none" w="med" len="med"/>
-                    </a:lnT>
-                    <a:lnB w="9525" cap="flat" cmpd="sng" algn="ctr">
-                      <a:solidFill>
-                        <a:srgbClr val="E3EDE6"/>
-                      </a:solidFill>
-                      <a:prstDash val="solid"/>
-                      <a:round/>
-                      <a:headEnd type="none" w="med" len="med"/>
-                      <a:tailEnd type="none" w="med" len="med"/>
-                    </a:lnB>
-                    <a:solidFill>
-                      <a:schemeClr val="bg1"/>
-                    </a:solidFill>
-                  </a:tcPr>
-                </a:tc>
-              </a:tr>
-              <a:tr h="274320">
-                <a:tc>
-                  <a:txBody>
-                    <a:bodyPr/>
-                    <a:lstStyle/>
-                    <a:p>
-                      <a:pPr indent="0" marL="0">
-                        <a:buNone/>
-                      </a:pPr>
-                      <a:r>
-                        <a:rPr lang="en-US" sz="1000" b="1" dirty="0">
-                          <a:solidFill>
-                            <a:schemeClr val="tx1"/>
-                          </a:solidFill>
-                        </a:rPr>
-                        <a:t>Créateur C</a:t>
-                      </a:r>
-                      <a:endParaRPr lang="en-US" sz="1000" dirty="0"/>
-                    </a:p>
-                  </a:txBody>
-                  <a:tcPr marL="128016" marR="128016" marT="54864" marB="54864" anchor="ctr">
-                    <a:lnL w="9525" cap="flat" cmpd="sng" algn="ctr">
-                      <a:solidFill>
-                        <a:srgbClr val="E3EDE6"/>
-                      </a:solidFill>
-                      <a:prstDash val="solid"/>
-                      <a:round/>
-                      <a:headEnd type="none" w="med" len="med"/>
-                      <a:tailEnd type="none" w="med" len="med"/>
-                    </a:lnL>
-                    <a:lnR w="9525" cap="flat" cmpd="sng" algn="ctr">
-                      <a:solidFill>
-                        <a:srgbClr val="E3EDE6"/>
-                      </a:solidFill>
-                      <a:prstDash val="solid"/>
-                      <a:round/>
-                      <a:headEnd type="none" w="med" len="med"/>
-                      <a:tailEnd type="none" w="med" len="med"/>
-                    </a:lnR>
-                    <a:lnT w="9525" cap="flat" cmpd="sng" algn="ctr">
-                      <a:solidFill>
-                        <a:srgbClr val="E3EDE6"/>
-                      </a:solidFill>
-                      <a:prstDash val="solid"/>
-                      <a:round/>
-                      <a:headEnd type="none" w="med" len="med"/>
-                      <a:tailEnd type="none" w="med" len="med"/>
-                    </a:lnT>
-                    <a:lnB w="9525" cap="flat" cmpd="sng" algn="ctr">
-                      <a:solidFill>
-                        <a:srgbClr val="E3EDE6"/>
-                      </a:solidFill>
-                      <a:prstDash val="solid"/>
-                      <a:round/>
-                      <a:headEnd type="none" w="med" len="med"/>
-                      <a:tailEnd type="none" w="med" len="med"/>
-                    </a:lnB>
-                    <a:solidFill>
-                      <a:schemeClr val="bg1"/>
-                    </a:solidFill>
-                  </a:tcPr>
-                </a:tc>
-                <a:tc>
-                  <a:txBody>
-                    <a:bodyPr/>
-                    <a:lstStyle/>
-                    <a:p>
-                      <a:pPr indent="0" marL="0">
-                        <a:buNone/>
-                      </a:pPr>
-                      <a:r>
-                        <a:rPr lang="en-US" sz="1000" dirty="0">
-                          <a:solidFill>
-                            <a:schemeClr val="tx2"/>
-                          </a:solidFill>
-                        </a:rPr>
-                        <a:t>4</a:t>
-                      </a:r>
-                      <a:endParaRPr lang="en-US" sz="1000" dirty="0"/>
-                    </a:p>
-                  </a:txBody>
-                  <a:tcPr marL="128016" marR="128016" marT="54864" marB="54864" anchor="ctr">
-                    <a:lnL w="9525" cap="flat" cmpd="sng" algn="ctr">
-                      <a:solidFill>
-                        <a:srgbClr val="E3EDE6"/>
-                      </a:solidFill>
-                      <a:prstDash val="solid"/>
-                      <a:round/>
-                      <a:headEnd type="none" w="med" len="med"/>
-                      <a:tailEnd type="none" w="med" len="med"/>
-                    </a:lnL>
-                    <a:lnR w="9525" cap="flat" cmpd="sng" algn="ctr">
-                      <a:solidFill>
-                        <a:srgbClr val="E3EDE6"/>
-                      </a:solidFill>
-                      <a:prstDash val="solid"/>
-                      <a:round/>
-                      <a:headEnd type="none" w="med" len="med"/>
-                      <a:tailEnd type="none" w="med" len="med"/>
-                    </a:lnR>
-                    <a:lnT w="9525" cap="flat" cmpd="sng" algn="ctr">
-                      <a:solidFill>
-                        <a:srgbClr val="E3EDE6"/>
-                      </a:solidFill>
-                      <a:prstDash val="solid"/>
-                      <a:round/>
-                      <a:headEnd type="none" w="med" len="med"/>
-                      <a:tailEnd type="none" w="med" len="med"/>
-                    </a:lnT>
-                    <a:lnB w="9525" cap="flat" cmpd="sng" algn="ctr">
-                      <a:solidFill>
-                        <a:srgbClr val="E3EDE6"/>
-                      </a:solidFill>
-                      <a:prstDash val="solid"/>
-                      <a:round/>
-                      <a:headEnd type="none" w="med" len="med"/>
-                      <a:tailEnd type="none" w="med" len="med"/>
-                    </a:lnB>
-                    <a:solidFill>
-                      <a:schemeClr val="bg1"/>
-                    </a:solidFill>
-                  </a:tcPr>
-                </a:tc>
-                <a:tc>
-                  <a:txBody>
-                    <a:bodyPr/>
-                    <a:lstStyle/>
-                    <a:p>
-                      <a:pPr indent="0" marL="0">
-                        <a:buNone/>
-                      </a:pPr>
-                      <a:r>
-                        <a:rPr lang="en-US" sz="1000" dirty="0">
-                          <a:solidFill>
-                            <a:schemeClr val="tx2"/>
-                          </a:solidFill>
-                        </a:rPr>
-                        <a:t>455 000</a:t>
-                      </a:r>
-                      <a:endParaRPr lang="en-US" sz="1000" dirty="0"/>
-                    </a:p>
-                  </a:txBody>
-                  <a:tcPr marL="128016" marR="128016" marT="54864" marB="54864" anchor="ctr">
-                    <a:lnL w="9525" cap="flat" cmpd="sng" algn="ctr">
-                      <a:solidFill>
-                        <a:srgbClr val="E3EDE6"/>
-                      </a:solidFill>
-                      <a:prstDash val="solid"/>
-                      <a:round/>
-                      <a:headEnd type="none" w="med" len="med"/>
-                      <a:tailEnd type="none" w="med" len="med"/>
-                    </a:lnL>
-                    <a:lnR w="9525" cap="flat" cmpd="sng" algn="ctr">
-                      <a:solidFill>
-                        <a:srgbClr val="E3EDE6"/>
-                      </a:solidFill>
-                      <a:prstDash val="solid"/>
-                      <a:round/>
-                      <a:headEnd type="none" w="med" len="med"/>
-                      <a:tailEnd type="none" w="med" len="med"/>
-                    </a:lnR>
-                    <a:lnT w="9525" cap="flat" cmpd="sng" algn="ctr">
-                      <a:solidFill>
-                        <a:srgbClr val="E3EDE6"/>
-                      </a:solidFill>
-                      <a:prstDash val="solid"/>
-                      <a:round/>
-                      <a:headEnd type="none" w="med" len="med"/>
-                      <a:tailEnd type="none" w="med" len="med"/>
-                    </a:lnT>
-                    <a:lnB w="9525" cap="flat" cmpd="sng" algn="ctr">
-                      <a:solidFill>
-                        <a:srgbClr val="E3EDE6"/>
-                      </a:solidFill>
-                      <a:prstDash val="solid"/>
-                      <a:round/>
-                      <a:headEnd type="none" w="med" len="med"/>
-                      <a:tailEnd type="none" w="med" len="med"/>
-                    </a:lnB>
-                    <a:solidFill>
-                      <a:schemeClr val="bg1"/>
-                    </a:solidFill>
-                  </a:tcPr>
-                </a:tc>
-                <a:tc>
-                  <a:txBody>
-                    <a:bodyPr/>
-                    <a:lstStyle/>
-                    <a:p>
-                      <a:pPr indent="0" marL="0">
-                        <a:buNone/>
-                      </a:pPr>
-                      <a:r>
-                        <a:rPr lang="en-US" sz="1000" dirty="0">
-                          <a:solidFill>
-                            <a:schemeClr val="tx2"/>
-                          </a:solidFill>
-                        </a:rPr>
-                        <a:t>39 200</a:t>
-                      </a:r>
-                      <a:endParaRPr lang="en-US" sz="1000" dirty="0"/>
-                    </a:p>
-                  </a:txBody>
-                  <a:tcPr marL="128016" marR="128016" marT="54864" marB="54864" anchor="ctr">
-                    <a:lnL w="9525" cap="flat" cmpd="sng" algn="ctr">
-                      <a:solidFill>
-                        <a:srgbClr val="E3EDE6"/>
-                      </a:solidFill>
-                      <a:prstDash val="solid"/>
-                      <a:round/>
-                      <a:headEnd type="none" w="med" len="med"/>
-                      <a:tailEnd type="none" w="med" len="med"/>
-                    </a:lnL>
-                    <a:lnR w="9525" cap="flat" cmpd="sng" algn="ctr">
-                      <a:solidFill>
-                        <a:srgbClr val="E3EDE6"/>
-                      </a:solidFill>
-                      <a:prstDash val="solid"/>
-                      <a:round/>
-                      <a:headEnd type="none" w="med" len="med"/>
-                      <a:tailEnd type="none" w="med" len="med"/>
-                    </a:lnR>
-                    <a:lnT w="9525" cap="flat" cmpd="sng" algn="ctr">
-                      <a:solidFill>
-                        <a:srgbClr val="E3EDE6"/>
-                      </a:solidFill>
-                      <a:prstDash val="solid"/>
-                      <a:round/>
-                      <a:headEnd type="none" w="med" len="med"/>
-                      <a:tailEnd type="none" w="med" len="med"/>
-                    </a:lnT>
-                    <a:lnB w="9525" cap="flat" cmpd="sng" algn="ctr">
-                      <a:solidFill>
-                        <a:srgbClr val="E3EDE6"/>
-                      </a:solidFill>
-                      <a:prstDash val="solid"/>
-                      <a:round/>
-                      <a:headEnd type="none" w="med" len="med"/>
-                      <a:tailEnd type="none" w="med" len="med"/>
-                    </a:lnB>
-                    <a:solidFill>
-                      <a:schemeClr val="bg1"/>
-                    </a:solidFill>
-                  </a:tcPr>
-                </a:tc>
-                <a:tc>
-                  <a:txBody>
-                    <a:bodyPr/>
-                    <a:lstStyle/>
-                    <a:p>
-                      <a:pPr indent="0" marL="0">
-                        <a:buNone/>
-                      </a:pPr>
-                      <a:r>
-                        <a:rPr lang="en-US" sz="1000" dirty="0">
-                          <a:solidFill>
-                            <a:schemeClr val="tx2"/>
-                          </a:solidFill>
-                        </a:rPr>
-                        <a:t>1 240</a:t>
-                      </a:r>
-                      <a:endParaRPr lang="en-US" sz="1000" dirty="0"/>
-                    </a:p>
-                  </a:txBody>
-                  <a:tcPr marL="128016" marR="128016" marT="54864" marB="54864" anchor="ctr">
-                    <a:lnL w="9525" cap="flat" cmpd="sng" algn="ctr">
-                      <a:solidFill>
-                        <a:srgbClr val="E3EDE6"/>
-                      </a:solidFill>
-                      <a:prstDash val="solid"/>
-                      <a:round/>
-                      <a:headEnd type="none" w="med" len="med"/>
-                      <a:tailEnd type="none" w="med" len="med"/>
-                    </a:lnL>
-                    <a:lnR w="9525" cap="flat" cmpd="sng" algn="ctr">
-                      <a:solidFill>
-                        <a:srgbClr val="E3EDE6"/>
-                      </a:solidFill>
-                      <a:prstDash val="solid"/>
-                      <a:round/>
-                      <a:headEnd type="none" w="med" len="med"/>
-                      <a:tailEnd type="none" w="med" len="med"/>
-                    </a:lnR>
-                    <a:lnT w="9525" cap="flat" cmpd="sng" algn="ctr">
-                      <a:solidFill>
-                        <a:srgbClr val="E3EDE6"/>
-                      </a:solidFill>
-                      <a:prstDash val="solid"/>
-                      <a:round/>
-                      <a:headEnd type="none" w="med" len="med"/>
-                      <a:tailEnd type="none" w="med" len="med"/>
-                    </a:lnT>
-                    <a:lnB w="9525" cap="flat" cmpd="sng" algn="ctr">
-                      <a:solidFill>
-                        <a:srgbClr val="E3EDE6"/>
-                      </a:solidFill>
-                      <a:prstDash val="solid"/>
-                      <a:round/>
-                      <a:headEnd type="none" w="med" len="med"/>
-                      <a:tailEnd type="none" w="med" len="med"/>
-                    </a:lnB>
-                    <a:solidFill>
-                      <a:schemeClr val="bg1"/>
-                    </a:solidFill>
-                  </a:tcPr>
-                </a:tc>
-              </a:tr>
-              <a:tr h="274320">
-                <a:tc>
-                  <a:txBody>
-                    <a:bodyPr/>
-                    <a:lstStyle/>
-                    <a:p>
-                      <a:pPr indent="0" marL="0">
-                        <a:buNone/>
-                      </a:pPr>
-                      <a:r>
-                        <a:rPr lang="en-US" sz="1000" b="1" dirty="0">
-                          <a:solidFill>
-                            <a:schemeClr val="tx1"/>
-                          </a:solidFill>
-                        </a:rPr>
-                        <a:t>Créateur D</a:t>
-                      </a:r>
-                      <a:endParaRPr lang="en-US" sz="1000" dirty="0"/>
-                    </a:p>
-                  </a:txBody>
-                  <a:tcPr marL="128016" marR="128016" marT="54864" marB="54864" anchor="ctr">
-                    <a:lnL w="9525" cap="flat" cmpd="sng" algn="ctr">
-                      <a:solidFill>
-                        <a:srgbClr val="E3EDE6"/>
-                      </a:solidFill>
-                      <a:prstDash val="solid"/>
-                      <a:round/>
-                      <a:headEnd type="none" w="med" len="med"/>
-                      <a:tailEnd type="none" w="med" len="med"/>
-                    </a:lnL>
-                    <a:lnR w="9525" cap="flat" cmpd="sng" algn="ctr">
-                      <a:solidFill>
-                        <a:srgbClr val="E3EDE6"/>
-                      </a:solidFill>
-                      <a:prstDash val="solid"/>
-                      <a:round/>
-                      <a:headEnd type="none" w="med" len="med"/>
-                      <a:tailEnd type="none" w="med" len="med"/>
-                    </a:lnR>
-                    <a:lnT w="9525" cap="flat" cmpd="sng" algn="ctr">
-                      <a:solidFill>
-                        <a:srgbClr val="E3EDE6"/>
-                      </a:solidFill>
-                      <a:prstDash val="solid"/>
-                      <a:round/>
-                      <a:headEnd type="none" w="med" len="med"/>
-                      <a:tailEnd type="none" w="med" len="med"/>
-                    </a:lnT>
-                    <a:lnB w="9525" cap="flat" cmpd="sng" algn="ctr">
-                      <a:solidFill>
-                        <a:srgbClr val="E3EDE6"/>
-                      </a:solidFill>
-                      <a:prstDash val="solid"/>
-                      <a:round/>
-                      <a:headEnd type="none" w="med" len="med"/>
-                      <a:tailEnd type="none" w="med" len="med"/>
-                    </a:lnB>
-                    <a:solidFill>
-                      <a:schemeClr val="bg1"/>
-                    </a:solidFill>
-                  </a:tcPr>
-                </a:tc>
-                <a:tc>
-                  <a:txBody>
-                    <a:bodyPr/>
-                    <a:lstStyle/>
-                    <a:p>
-                      <a:pPr indent="0" marL="0">
-                        <a:buNone/>
-                      </a:pPr>
-                      <a:r>
-                        <a:rPr lang="en-US" sz="1000" dirty="0">
-                          <a:solidFill>
-                            <a:schemeClr val="tx2"/>
-                          </a:solidFill>
-                        </a:rPr>
-                        <a:t>4</a:t>
-                      </a:r>
-                      <a:endParaRPr lang="en-US" sz="1000" dirty="0"/>
-                    </a:p>
-                  </a:txBody>
-                  <a:tcPr marL="128016" marR="128016" marT="54864" marB="54864" anchor="ctr">
-                    <a:lnL w="9525" cap="flat" cmpd="sng" algn="ctr">
-                      <a:solidFill>
-                        <a:srgbClr val="E3EDE6"/>
-                      </a:solidFill>
-                      <a:prstDash val="solid"/>
-                      <a:round/>
-                      <a:headEnd type="none" w="med" len="med"/>
-                      <a:tailEnd type="none" w="med" len="med"/>
-                    </a:lnL>
-                    <a:lnR w="9525" cap="flat" cmpd="sng" algn="ctr">
-                      <a:solidFill>
-                        <a:srgbClr val="E3EDE6"/>
-                      </a:solidFill>
-                      <a:prstDash val="solid"/>
-                      <a:round/>
-                      <a:headEnd type="none" w="med" len="med"/>
-                      <a:tailEnd type="none" w="med" len="med"/>
-                    </a:lnR>
-                    <a:lnT w="9525" cap="flat" cmpd="sng" algn="ctr">
-                      <a:solidFill>
-                        <a:srgbClr val="E3EDE6"/>
-                      </a:solidFill>
-                      <a:prstDash val="solid"/>
-                      <a:round/>
-                      <a:headEnd type="none" w="med" len="med"/>
-                      <a:tailEnd type="none" w="med" len="med"/>
-                    </a:lnT>
-                    <a:lnB w="9525" cap="flat" cmpd="sng" algn="ctr">
-                      <a:solidFill>
-                        <a:srgbClr val="E3EDE6"/>
-                      </a:solidFill>
-                      <a:prstDash val="solid"/>
-                      <a:round/>
-                      <a:headEnd type="none" w="med" len="med"/>
-                      <a:tailEnd type="none" w="med" len="med"/>
-                    </a:lnB>
-                    <a:solidFill>
-                      <a:schemeClr val="bg1"/>
-                    </a:solidFill>
-                  </a:tcPr>
-                </a:tc>
-                <a:tc>
-                  <a:txBody>
-                    <a:bodyPr/>
-                    <a:lstStyle/>
-                    <a:p>
-                      <a:pPr indent="0" marL="0">
-                        <a:buNone/>
-                      </a:pPr>
-                      <a:r>
-                        <a:rPr lang="en-US" sz="1000" dirty="0">
-                          <a:solidFill>
-                            <a:schemeClr val="tx2"/>
-                          </a:solidFill>
-                        </a:rPr>
-                        <a:t>380 000</a:t>
-                      </a:r>
-                      <a:endParaRPr lang="en-US" sz="1000" dirty="0"/>
-                    </a:p>
-                  </a:txBody>
-                  <a:tcPr marL="128016" marR="128016" marT="54864" marB="54864" anchor="ctr">
-                    <a:lnL w="9525" cap="flat" cmpd="sng" algn="ctr">
-                      <a:solidFill>
-                        <a:srgbClr val="E3EDE6"/>
-                      </a:solidFill>
-                      <a:prstDash val="solid"/>
-                      <a:round/>
-                      <a:headEnd type="none" w="med" len="med"/>
-                      <a:tailEnd type="none" w="med" len="med"/>
-                    </a:lnL>
-                    <a:lnR w="9525" cap="flat" cmpd="sng" algn="ctr">
-                      <a:solidFill>
-                        <a:srgbClr val="E3EDE6"/>
-                      </a:solidFill>
-                      <a:prstDash val="solid"/>
-                      <a:round/>
-                      <a:headEnd type="none" w="med" len="med"/>
-                      <a:tailEnd type="none" w="med" len="med"/>
-                    </a:lnR>
-                    <a:lnT w="9525" cap="flat" cmpd="sng" algn="ctr">
-                      <a:solidFill>
-                        <a:srgbClr val="E3EDE6"/>
-                      </a:solidFill>
-                      <a:prstDash val="solid"/>
-                      <a:round/>
-                      <a:headEnd type="none" w="med" len="med"/>
-                      <a:tailEnd type="none" w="med" len="med"/>
-                    </a:lnT>
-                    <a:lnB w="9525" cap="flat" cmpd="sng" algn="ctr">
-                      <a:solidFill>
-                        <a:srgbClr val="E3EDE6"/>
-                      </a:solidFill>
-                      <a:prstDash val="solid"/>
-                      <a:round/>
-                      <a:headEnd type="none" w="med" len="med"/>
-                      <a:tailEnd type="none" w="med" len="med"/>
-                    </a:lnB>
-                    <a:solidFill>
-                      <a:schemeClr val="bg1"/>
-                    </a:solidFill>
-                  </a:tcPr>
-                </a:tc>
-                <a:tc>
-                  <a:txBody>
-                    <a:bodyPr/>
-                    <a:lstStyle/>
-                    <a:p>
-                      <a:pPr indent="0" marL="0">
-                        <a:buNone/>
-                      </a:pPr>
-                      <a:r>
-                        <a:rPr lang="en-US" sz="1000" dirty="0">
-                          <a:solidFill>
-                            <a:schemeClr val="tx2"/>
-                          </a:solidFill>
-                        </a:rPr>
-                        <a:t>27 800</a:t>
-                      </a:r>
-                      <a:endParaRPr lang="en-US" sz="1000" dirty="0"/>
-                    </a:p>
-                  </a:txBody>
-                  <a:tcPr marL="128016" marR="128016" marT="54864" marB="54864" anchor="ctr">
-                    <a:lnL w="9525" cap="flat" cmpd="sng" algn="ctr">
-                      <a:solidFill>
-                        <a:srgbClr val="E3EDE6"/>
-                      </a:solidFill>
-                      <a:prstDash val="solid"/>
-                      <a:round/>
-                      <a:headEnd type="none" w="med" len="med"/>
-                      <a:tailEnd type="none" w="med" len="med"/>
-                    </a:lnL>
-                    <a:lnR w="9525" cap="flat" cmpd="sng" algn="ctr">
-                      <a:solidFill>
-                        <a:srgbClr val="E3EDE6"/>
-                      </a:solidFill>
-                      <a:prstDash val="solid"/>
-                      <a:round/>
-                      <a:headEnd type="none" w="med" len="med"/>
-                      <a:tailEnd type="none" w="med" len="med"/>
-                    </a:lnR>
-                    <a:lnT w="9525" cap="flat" cmpd="sng" algn="ctr">
-                      <a:solidFill>
-                        <a:srgbClr val="E3EDE6"/>
-                      </a:solidFill>
-                      <a:prstDash val="solid"/>
-                      <a:round/>
-                      <a:headEnd type="none" w="med" len="med"/>
-                      <a:tailEnd type="none" w="med" len="med"/>
-                    </a:lnT>
-                    <a:lnB w="9525" cap="flat" cmpd="sng" algn="ctr">
-                      <a:solidFill>
-                        <a:srgbClr val="E3EDE6"/>
-                      </a:solidFill>
-                      <a:prstDash val="solid"/>
-                      <a:round/>
-                      <a:headEnd type="none" w="med" len="med"/>
-                      <a:tailEnd type="none" w="med" len="med"/>
-                    </a:lnB>
-                    <a:solidFill>
-                      <a:schemeClr val="bg1"/>
-                    </a:solidFill>
-                  </a:tcPr>
-                </a:tc>
-                <a:tc>
-                  <a:txBody>
-                    <a:bodyPr/>
-                    <a:lstStyle/>
-                    <a:p>
-                      <a:pPr indent="0" marL="0">
-                        <a:buNone/>
-                      </a:pPr>
-                      <a:r>
-                        <a:rPr lang="en-US" sz="1000" dirty="0">
-                          <a:solidFill>
-                            <a:schemeClr val="tx2"/>
-                          </a:solidFill>
-                        </a:rPr>
-                        <a:t>980</a:t>
-                      </a:r>
-                      <a:endParaRPr lang="en-US" sz="1000" dirty="0"/>
-                    </a:p>
-                  </a:txBody>
-                  <a:tcPr marL="128016" marR="128016" marT="54864" marB="54864" anchor="ctr">
-                    <a:lnL w="9525" cap="flat" cmpd="sng" algn="ctr">
-                      <a:solidFill>
-                        <a:srgbClr val="E3EDE6"/>
-                      </a:solidFill>
-                      <a:prstDash val="solid"/>
-                      <a:round/>
-                      <a:headEnd type="none" w="med" len="med"/>
-                      <a:tailEnd type="none" w="med" len="med"/>
-                    </a:lnL>
-                    <a:lnR w="9525" cap="flat" cmpd="sng" algn="ctr">
-                      <a:solidFill>
-                        <a:srgbClr val="E3EDE6"/>
-                      </a:solidFill>
-                      <a:prstDash val="solid"/>
-                      <a:round/>
-                      <a:headEnd type="none" w="med" len="med"/>
-                      <a:tailEnd type="none" w="med" len="med"/>
-                    </a:lnR>
-                    <a:lnT w="9525" cap="flat" cmpd="sng" algn="ctr">
-                      <a:solidFill>
-                        <a:srgbClr val="E3EDE6"/>
-                      </a:solidFill>
-                      <a:prstDash val="solid"/>
-                      <a:round/>
-                      <a:headEnd type="none" w="med" len="med"/>
-                      <a:tailEnd type="none" w="med" len="med"/>
-                    </a:lnT>
-                    <a:lnB w="9525" cap="flat" cmpd="sng" algn="ctr">
-                      <a:solidFill>
-                        <a:srgbClr val="E3EDE6"/>
-                      </a:solidFill>
-                      <a:prstDash val="solid"/>
-                      <a:round/>
-                      <a:headEnd type="none" w="med" len="med"/>
-                      <a:tailEnd type="none" w="med" len="med"/>
-                    </a:lnB>
-                    <a:solidFill>
-                      <a:schemeClr val="bg1"/>
-                    </a:solidFill>
-                  </a:tcPr>
-                </a:tc>
-              </a:tr>
-              <a:tr h="274320">
-                <a:tc>
-                  <a:txBody>
-                    <a:bodyPr/>
-                    <a:lstStyle/>
-                    <a:p>
-                      <a:pPr indent="0" marL="0">
-                        <a:buNone/>
-                      </a:pPr>
-                      <a:r>
-                        <a:rPr lang="en-US" sz="1000" b="1" dirty="0">
-                          <a:solidFill>
-                            <a:schemeClr val="tx1"/>
-                          </a:solidFill>
-                        </a:rPr>
-                        <a:t>Créateur E</a:t>
-                      </a:r>
-                      <a:endParaRPr lang="en-US" sz="1000" dirty="0"/>
-                    </a:p>
-                  </a:txBody>
-                  <a:tcPr marL="128016" marR="128016" marT="54864" marB="54864" anchor="ctr">
-                    <a:lnL w="9525" cap="flat" cmpd="sng" algn="ctr">
-                      <a:solidFill>
-                        <a:srgbClr val="E3EDE6"/>
-                      </a:solidFill>
-                      <a:prstDash val="solid"/>
-                      <a:round/>
-                      <a:headEnd type="none" w="med" len="med"/>
-                      <a:tailEnd type="none" w="med" len="med"/>
-                    </a:lnL>
-                    <a:lnR w="9525" cap="flat" cmpd="sng" algn="ctr">
-                      <a:solidFill>
-                        <a:srgbClr val="E3EDE6"/>
-                      </a:solidFill>
-                      <a:prstDash val="solid"/>
-                      <a:round/>
-                      <a:headEnd type="none" w="med" len="med"/>
-                      <a:tailEnd type="none" w="med" len="med"/>
-                    </a:lnR>
-                    <a:lnT w="9525" cap="flat" cmpd="sng" algn="ctr">
-                      <a:solidFill>
-                        <a:srgbClr val="E3EDE6"/>
-                      </a:solidFill>
-                      <a:prstDash val="solid"/>
-                      <a:round/>
-                      <a:headEnd type="none" w="med" len="med"/>
-                      <a:tailEnd type="none" w="med" len="med"/>
-                    </a:lnT>
-                    <a:lnB w="9525" cap="flat" cmpd="sng" algn="ctr">
-                      <a:solidFill>
-                        <a:srgbClr val="E3EDE6"/>
-                      </a:solidFill>
-                      <a:prstDash val="solid"/>
-                      <a:round/>
-                      <a:headEnd type="none" w="med" len="med"/>
-                      <a:tailEnd type="none" w="med" len="med"/>
-                    </a:lnB>
-                    <a:solidFill>
-                      <a:schemeClr val="bg1"/>
-                    </a:solidFill>
-                  </a:tcPr>
-                </a:tc>
-                <a:tc>
-                  <a:txBody>
-                    <a:bodyPr/>
-                    <a:lstStyle/>
-                    <a:p>
-                      <a:pPr indent="0" marL="0">
-                        <a:buNone/>
-                      </a:pPr>
-                      <a:r>
-                        <a:rPr lang="en-US" sz="1000" dirty="0">
-                          <a:solidFill>
-                            <a:schemeClr val="tx2"/>
-                          </a:solidFill>
-                        </a:rPr>
-                        <a:t>3</a:t>
-                      </a:r>
-                      <a:endParaRPr lang="en-US" sz="1000" dirty="0"/>
-                    </a:p>
-                  </a:txBody>
-                  <a:tcPr marL="128016" marR="128016" marT="54864" marB="54864" anchor="ctr">
-                    <a:lnL w="9525" cap="flat" cmpd="sng" algn="ctr">
-                      <a:solidFill>
-                        <a:srgbClr val="E3EDE6"/>
-                      </a:solidFill>
-                      <a:prstDash val="solid"/>
-                      <a:round/>
-                      <a:headEnd type="none" w="med" len="med"/>
-                      <a:tailEnd type="none" w="med" len="med"/>
-                    </a:lnL>
-                    <a:lnR w="9525" cap="flat" cmpd="sng" algn="ctr">
-                      <a:solidFill>
-                        <a:srgbClr val="E3EDE6"/>
-                      </a:solidFill>
-                      <a:prstDash val="solid"/>
-                      <a:round/>
-                      <a:headEnd type="none" w="med" len="med"/>
-                      <a:tailEnd type="none" w="med" len="med"/>
-                    </a:lnR>
-                    <a:lnT w="9525" cap="flat" cmpd="sng" algn="ctr">
-                      <a:solidFill>
-                        <a:srgbClr val="E3EDE6"/>
-                      </a:solidFill>
-                      <a:prstDash val="solid"/>
-                      <a:round/>
-                      <a:headEnd type="none" w="med" len="med"/>
-                      <a:tailEnd type="none" w="med" len="med"/>
-                    </a:lnT>
-                    <a:lnB w="9525" cap="flat" cmpd="sng" algn="ctr">
-                      <a:solidFill>
-                        <a:srgbClr val="E3EDE6"/>
-                      </a:solidFill>
-                      <a:prstDash val="solid"/>
-                      <a:round/>
-                      <a:headEnd type="none" w="med" len="med"/>
-                      <a:tailEnd type="none" w="med" len="med"/>
-                    </a:lnB>
-                    <a:solidFill>
-                      <a:schemeClr val="bg1"/>
-                    </a:solidFill>
-                  </a:tcPr>
-                </a:tc>
-                <a:tc>
-                  <a:txBody>
-                    <a:bodyPr/>
-                    <a:lstStyle/>
-                    <a:p>
-                      <a:pPr indent="0" marL="0">
-                        <a:buNone/>
-                      </a:pPr>
-                      <a:r>
-                        <a:rPr lang="en-US" sz="1000" dirty="0">
-                          <a:solidFill>
-                            <a:schemeClr val="tx2"/>
-                          </a:solidFill>
-                        </a:rPr>
-                        <a:t>290 000</a:t>
-                      </a:r>
-                      <a:endParaRPr lang="en-US" sz="1000" dirty="0"/>
-                    </a:p>
-                  </a:txBody>
-                  <a:tcPr marL="128016" marR="128016" marT="54864" marB="54864" anchor="ctr">
-                    <a:lnL w="9525" cap="flat" cmpd="sng" algn="ctr">
-                      <a:solidFill>
-                        <a:srgbClr val="E3EDE6"/>
-                      </a:solidFill>
-                      <a:prstDash val="solid"/>
-                      <a:round/>
-                      <a:headEnd type="none" w="med" len="med"/>
-                      <a:tailEnd type="none" w="med" len="med"/>
-                    </a:lnL>
-                    <a:lnR w="9525" cap="flat" cmpd="sng" algn="ctr">
-                      <a:solidFill>
-                        <a:srgbClr val="E3EDE6"/>
-                      </a:solidFill>
-                      <a:prstDash val="solid"/>
-                      <a:round/>
-                      <a:headEnd type="none" w="med" len="med"/>
-                      <a:tailEnd type="none" w="med" len="med"/>
-                    </a:lnR>
-                    <a:lnT w="9525" cap="flat" cmpd="sng" algn="ctr">
-                      <a:solidFill>
-                        <a:srgbClr val="E3EDE6"/>
-                      </a:solidFill>
-                      <a:prstDash val="solid"/>
-                      <a:round/>
-                      <a:headEnd type="none" w="med" len="med"/>
-                      <a:tailEnd type="none" w="med" len="med"/>
-                    </a:lnT>
-                    <a:lnB w="9525" cap="flat" cmpd="sng" algn="ctr">
-                      <a:solidFill>
-                        <a:srgbClr val="E3EDE6"/>
-                      </a:solidFill>
-                      <a:prstDash val="solid"/>
-                      <a:round/>
-                      <a:headEnd type="none" w="med" len="med"/>
-                      <a:tailEnd type="none" w="med" len="med"/>
-                    </a:lnB>
-                    <a:solidFill>
-                      <a:schemeClr val="bg1"/>
-                    </a:solidFill>
-                  </a:tcPr>
-                </a:tc>
-                <a:tc>
-                  <a:txBody>
-                    <a:bodyPr/>
-                    <a:lstStyle/>
-                    <a:p>
-                      <a:pPr indent="0" marL="0">
-                        <a:buNone/>
-                      </a:pPr>
-                      <a:r>
-                        <a:rPr lang="en-US" sz="1000" dirty="0">
-                          <a:solidFill>
-                            <a:schemeClr val="tx2"/>
-                          </a:solidFill>
-                        </a:rPr>
-                        <a:t>22 100</a:t>
-                      </a:r>
-                      <a:endParaRPr lang="en-US" sz="1000" dirty="0"/>
-                    </a:p>
-                  </a:txBody>
-                  <a:tcPr marL="128016" marR="128016" marT="54864" marB="54864" anchor="ctr">
-                    <a:lnL w="9525" cap="flat" cmpd="sng" algn="ctr">
-                      <a:solidFill>
-                        <a:srgbClr val="E3EDE6"/>
-                      </a:solidFill>
-                      <a:prstDash val="solid"/>
-                      <a:round/>
-                      <a:headEnd type="none" w="med" len="med"/>
-                      <a:tailEnd type="none" w="med" len="med"/>
-                    </a:lnL>
-                    <a:lnR w="9525" cap="flat" cmpd="sng" algn="ctr">
-                      <a:solidFill>
-                        <a:srgbClr val="E3EDE6"/>
-                      </a:solidFill>
-                      <a:prstDash val="solid"/>
-                      <a:round/>
-                      <a:headEnd type="none" w="med" len="med"/>
-                      <a:tailEnd type="none" w="med" len="med"/>
-                    </a:lnR>
-                    <a:lnT w="9525" cap="flat" cmpd="sng" algn="ctr">
-                      <a:solidFill>
-                        <a:srgbClr val="E3EDE6"/>
-                      </a:solidFill>
-                      <a:prstDash val="solid"/>
-                      <a:round/>
-                      <a:headEnd type="none" w="med" len="med"/>
-                      <a:tailEnd type="none" w="med" len="med"/>
-                    </a:lnT>
-                    <a:lnB w="9525" cap="flat" cmpd="sng" algn="ctr">
-                      <a:solidFill>
-                        <a:srgbClr val="E3EDE6"/>
-                      </a:solidFill>
-                      <a:prstDash val="solid"/>
-                      <a:round/>
-                      <a:headEnd type="none" w="med" len="med"/>
-                      <a:tailEnd type="none" w="med" len="med"/>
-                    </a:lnB>
-                    <a:solidFill>
-                      <a:schemeClr val="bg1"/>
-                    </a:solidFill>
-                  </a:tcPr>
-                </a:tc>
-                <a:tc>
-                  <a:txBody>
-                    <a:bodyPr/>
-                    <a:lstStyle/>
-                    <a:p>
-                      <a:pPr indent="0" marL="0">
-                        <a:buNone/>
-                      </a:pPr>
-                      <a:r>
-                        <a:rPr lang="en-US" sz="1000" dirty="0">
-                          <a:solidFill>
-                            <a:schemeClr val="tx2"/>
-                          </a:solidFill>
-                        </a:rPr>
-                        <a:t>730</a:t>
-                      </a:r>
-                      <a:endParaRPr lang="en-US" sz="1000" dirty="0"/>
-                    </a:p>
-                  </a:txBody>
-                  <a:tcPr marL="128016" marR="128016" marT="54864" marB="54864" anchor="ctr">
-                    <a:lnL w="9525" cap="flat" cmpd="sng" algn="ctr">
-                      <a:solidFill>
-                        <a:srgbClr val="E3EDE6"/>
-                      </a:solidFill>
-                      <a:prstDash val="solid"/>
-                      <a:round/>
-                      <a:headEnd type="none" w="med" len="med"/>
-                      <a:tailEnd type="none" w="med" len="med"/>
-                    </a:lnL>
-                    <a:lnR w="9525" cap="flat" cmpd="sng" algn="ctr">
-                      <a:solidFill>
-                        <a:srgbClr val="E3EDE6"/>
-                      </a:solidFill>
-                      <a:prstDash val="solid"/>
-                      <a:round/>
-                      <a:headEnd type="none" w="med" len="med"/>
-                      <a:tailEnd type="none" w="med" len="med"/>
-                    </a:lnR>
-                    <a:lnT w="9525" cap="flat" cmpd="sng" algn="ctr">
-                      <a:solidFill>
-                        <a:srgbClr val="E3EDE6"/>
-                      </a:solidFill>
-                      <a:prstDash val="solid"/>
-                      <a:round/>
-                      <a:headEnd type="none" w="med" len="med"/>
-                      <a:tailEnd type="none" w="med" len="med"/>
-                    </a:lnT>
-                    <a:lnB w="9525" cap="flat" cmpd="sng" algn="ctr">
-                      <a:solidFill>
-                        <a:srgbClr val="E3EDE6"/>
-                      </a:solidFill>
-                      <a:prstDash val="solid"/>
-                      <a:round/>
-                      <a:headEnd type="none" w="med" len="med"/>
-                      <a:tailEnd type="none" w="med" len="med"/>
-                    </a:lnB>
-                    <a:solidFill>
-                      <a:schemeClr val="bg1"/>
-                    </a:solidFill>
-                  </a:tcPr>
-                </a:tc>
-              </a:tr>
-              <a:tr h="274320">
-                <a:tc>
-                  <a:txBody>
-                    <a:bodyPr/>
-                    <a:lstStyle/>
-                    <a:p>
-                      <a:pPr indent="0" marL="0">
-                        <a:buNone/>
-                      </a:pPr>
-                      <a:r>
-                        <a:rPr lang="en-US" sz="1000" b="1" dirty="0">
-                          <a:solidFill>
-                            <a:schemeClr val="tx1"/>
-                          </a:solidFill>
-                        </a:rPr>
-                        <a:t>13 autres créateurs</a:t>
-                      </a:r>
-                      <a:endParaRPr lang="en-US" sz="1000" dirty="0"/>
-                    </a:p>
-                  </a:txBody>
-                  <a:tcPr marL="128016" marR="128016" marT="54864" marB="54864" anchor="ctr">
-                    <a:lnL w="9525" cap="flat" cmpd="sng" algn="ctr">
-                      <a:solidFill>
-                        <a:srgbClr val="E3EDE6"/>
-                      </a:solidFill>
-                      <a:prstDash val="solid"/>
-                      <a:round/>
-                      <a:headEnd type="none" w="med" len="med"/>
-                      <a:tailEnd type="none" w="med" len="med"/>
-                    </a:lnL>
-                    <a:lnR w="9525" cap="flat" cmpd="sng" algn="ctr">
-                      <a:solidFill>
-                        <a:srgbClr val="E3EDE6"/>
-                      </a:solidFill>
-                      <a:prstDash val="solid"/>
-                      <a:round/>
-                      <a:headEnd type="none" w="med" len="med"/>
-                      <a:tailEnd type="none" w="med" len="med"/>
-                    </a:lnR>
-                    <a:lnT w="9525" cap="flat" cmpd="sng" algn="ctr">
-                      <a:solidFill>
-                        <a:srgbClr val="E3EDE6"/>
-                      </a:solidFill>
-                      <a:prstDash val="solid"/>
-                      <a:round/>
-                      <a:headEnd type="none" w="med" len="med"/>
-                      <a:tailEnd type="none" w="med" len="med"/>
-                    </a:lnT>
-                    <a:lnB w="9525" cap="flat" cmpd="sng" algn="ctr">
-                      <a:solidFill>
-                        <a:srgbClr val="E3EDE6"/>
-                      </a:solidFill>
-                      <a:prstDash val="solid"/>
-                      <a:round/>
-                      <a:headEnd type="none" w="med" len="med"/>
-                      <a:tailEnd type="none" w="med" len="med"/>
-                    </a:lnB>
-                    <a:solidFill>
-                      <a:schemeClr val="bg1"/>
-                    </a:solidFill>
-                  </a:tcPr>
-                </a:tc>
-                <a:tc>
-                  <a:txBody>
-                    <a:bodyPr/>
-                    <a:lstStyle/>
-                    <a:p>
-                      <a:pPr indent="0" marL="0">
-                        <a:buNone/>
-                      </a:pPr>
-                      <a:r>
-                        <a:rPr lang="en-US" sz="1000" dirty="0">
-                          <a:solidFill>
-                            <a:schemeClr val="tx2"/>
-                          </a:solidFill>
-                        </a:rPr>
-                        <a:t>42</a:t>
-                      </a:r>
-                      <a:endParaRPr lang="en-US" sz="1000" dirty="0"/>
-                    </a:p>
-                  </a:txBody>
-                  <a:tcPr marL="128016" marR="128016" marT="54864" marB="54864" anchor="ctr">
-                    <a:lnL w="9525" cap="flat" cmpd="sng" algn="ctr">
-                      <a:solidFill>
-                        <a:srgbClr val="E3EDE6"/>
-                      </a:solidFill>
-                      <a:prstDash val="solid"/>
-                      <a:round/>
-                      <a:headEnd type="none" w="med" len="med"/>
-                      <a:tailEnd type="none" w="med" len="med"/>
-                    </a:lnL>
-                    <a:lnR w="9525" cap="flat" cmpd="sng" algn="ctr">
-                      <a:solidFill>
-                        <a:srgbClr val="E3EDE6"/>
-                      </a:solidFill>
-                      <a:prstDash val="solid"/>
-                      <a:round/>
-                      <a:headEnd type="none" w="med" len="med"/>
-                      <a:tailEnd type="none" w="med" len="med"/>
-                    </a:lnR>
-                    <a:lnT w="9525" cap="flat" cmpd="sng" algn="ctr">
-                      <a:solidFill>
-                        <a:srgbClr val="E3EDE6"/>
-                      </a:solidFill>
-                      <a:prstDash val="solid"/>
-                      <a:round/>
-                      <a:headEnd type="none" w="med" len="med"/>
-                      <a:tailEnd type="none" w="med" len="med"/>
-                    </a:lnT>
-                    <a:lnB w="9525" cap="flat" cmpd="sng" algn="ctr">
-                      <a:solidFill>
-                        <a:srgbClr val="E3EDE6"/>
-                      </a:solidFill>
-                      <a:prstDash val="solid"/>
-                      <a:round/>
-                      <a:headEnd type="none" w="med" len="med"/>
-                      <a:tailEnd type="none" w="med" len="med"/>
-                    </a:lnB>
-                    <a:solidFill>
-                      <a:schemeClr val="bg1"/>
-                    </a:solidFill>
-                  </a:tcPr>
-                </a:tc>
-                <a:tc>
-                  <a:txBody>
-                    <a:bodyPr/>
-                    <a:lstStyle/>
-                    <a:p>
-                      <a:pPr indent="0" marL="0">
-                        <a:buNone/>
-                      </a:pPr>
-                      <a:r>
-                        <a:rPr lang="en-US" sz="1000" dirty="0">
-                          <a:solidFill>
-                            <a:schemeClr val="tx2"/>
-                          </a:solidFill>
-                        </a:rPr>
-                        <a:t>645 000</a:t>
-                      </a:r>
-                      <a:endParaRPr lang="en-US" sz="1000" dirty="0"/>
-                    </a:p>
-                  </a:txBody>
-                  <a:tcPr marL="128016" marR="128016" marT="54864" marB="54864" anchor="ctr">
-                    <a:lnL w="9525" cap="flat" cmpd="sng" algn="ctr">
-                      <a:solidFill>
-                        <a:srgbClr val="E3EDE6"/>
-                      </a:solidFill>
-                      <a:prstDash val="solid"/>
-                      <a:round/>
-                      <a:headEnd type="none" w="med" len="med"/>
-                      <a:tailEnd type="none" w="med" len="med"/>
-                    </a:lnL>
-                    <a:lnR w="9525" cap="flat" cmpd="sng" algn="ctr">
-                      <a:solidFill>
-                        <a:srgbClr val="E3EDE6"/>
-                      </a:solidFill>
-                      <a:prstDash val="solid"/>
-                      <a:round/>
-                      <a:headEnd type="none" w="med" len="med"/>
-                      <a:tailEnd type="none" w="med" len="med"/>
-                    </a:lnR>
-                    <a:lnT w="9525" cap="flat" cmpd="sng" algn="ctr">
-                      <a:solidFill>
-                        <a:srgbClr val="E3EDE6"/>
-                      </a:solidFill>
-                      <a:prstDash val="solid"/>
-                      <a:round/>
-                      <a:headEnd type="none" w="med" len="med"/>
-                      <a:tailEnd type="none" w="med" len="med"/>
-                    </a:lnT>
-                    <a:lnB w="9525" cap="flat" cmpd="sng" algn="ctr">
-                      <a:solidFill>
-                        <a:srgbClr val="E3EDE6"/>
-                      </a:solidFill>
-                      <a:prstDash val="solid"/>
-                      <a:round/>
-                      <a:headEnd type="none" w="med" len="med"/>
-                      <a:tailEnd type="none" w="med" len="med"/>
-                    </a:lnB>
-                    <a:solidFill>
-                      <a:schemeClr val="bg1"/>
-                    </a:solidFill>
-                  </a:tcPr>
-                </a:tc>
-                <a:tc>
-                  <a:txBody>
-                    <a:bodyPr/>
-                    <a:lstStyle/>
-                    <a:p>
-                      <a:pPr indent="0" marL="0">
-                        <a:buNone/>
-                      </a:pPr>
-                      <a:r>
-                        <a:rPr lang="en-US" sz="1000" dirty="0">
-                          <a:solidFill>
-                            <a:schemeClr val="tx2"/>
-                          </a:solidFill>
-                        </a:rPr>
-                        <a:t>51 400</a:t>
-                      </a:r>
-                      <a:endParaRPr lang="en-US" sz="1000" dirty="0"/>
-                    </a:p>
-                  </a:txBody>
-                  <a:tcPr marL="128016" marR="128016" marT="54864" marB="54864" anchor="ctr">
-                    <a:lnL w="9525" cap="flat" cmpd="sng" algn="ctr">
-                      <a:solidFill>
-                        <a:srgbClr val="E3EDE6"/>
-                      </a:solidFill>
-                      <a:prstDash val="solid"/>
-                      <a:round/>
-                      <a:headEnd type="none" w="med" len="med"/>
-                      <a:tailEnd type="none" w="med" len="med"/>
-                    </a:lnL>
-                    <a:lnR w="9525" cap="flat" cmpd="sng" algn="ctr">
-                      <a:solidFill>
-                        <a:srgbClr val="E3EDE6"/>
-                      </a:solidFill>
-                      <a:prstDash val="solid"/>
-                      <a:round/>
-                      <a:headEnd type="none" w="med" len="med"/>
-                      <a:tailEnd type="none" w="med" len="med"/>
-                    </a:lnR>
-                    <a:lnT w="9525" cap="flat" cmpd="sng" algn="ctr">
-                      <a:solidFill>
-                        <a:srgbClr val="E3EDE6"/>
-                      </a:solidFill>
-                      <a:prstDash val="solid"/>
-                      <a:round/>
-                      <a:headEnd type="none" w="med" len="med"/>
-                      <a:tailEnd type="none" w="med" len="med"/>
-                    </a:lnT>
-                    <a:lnB w="9525" cap="flat" cmpd="sng" algn="ctr">
-                      <a:solidFill>
-                        <a:srgbClr val="E3EDE6"/>
-                      </a:solidFill>
-                      <a:prstDash val="solid"/>
-                      <a:round/>
-                      <a:headEnd type="none" w="med" len="med"/>
-                      <a:tailEnd type="none" w="med" len="med"/>
-                    </a:lnB>
-                    <a:solidFill>
-                      <a:schemeClr val="bg1"/>
-                    </a:solidFill>
-                  </a:tcPr>
-                </a:tc>
-                <a:tc>
-                  <a:txBody>
-                    <a:bodyPr/>
-                    <a:lstStyle/>
-                    <a:p>
-                      <a:pPr indent="0" marL="0">
-                        <a:buNone/>
-                      </a:pPr>
-                      <a:r>
-                        <a:rPr lang="en-US" sz="1000" dirty="0">
-                          <a:solidFill>
-                            <a:schemeClr val="tx2"/>
-                          </a:solidFill>
-                        </a:rPr>
-                        <a:t>2 700</a:t>
-                      </a:r>
-                      <a:endParaRPr lang="en-US" sz="1000" dirty="0"/>
-                    </a:p>
-                  </a:txBody>
-                  <a:tcPr marL="128016" marR="128016" marT="54864" marB="54864" anchor="ctr">
-                    <a:lnL w="9525" cap="flat" cmpd="sng" algn="ctr">
-                      <a:solidFill>
-                        <a:srgbClr val="E3EDE6"/>
-                      </a:solidFill>
-                      <a:prstDash val="solid"/>
-                      <a:round/>
-                      <a:headEnd type="none" w="med" len="med"/>
-                      <a:tailEnd type="none" w="med" len="med"/>
-                    </a:lnL>
-                    <a:lnR w="9525" cap="flat" cmpd="sng" algn="ctr">
-                      <a:solidFill>
-                        <a:srgbClr val="E3EDE6"/>
-                      </a:solidFill>
-                      <a:prstDash val="solid"/>
-                      <a:round/>
-                      <a:headEnd type="none" w="med" len="med"/>
-                      <a:tailEnd type="none" w="med" len="med"/>
-                    </a:lnR>
-                    <a:lnT w="9525" cap="flat" cmpd="sng" algn="ctr">
-                      <a:solidFill>
-                        <a:srgbClr val="E3EDE6"/>
-                      </a:solidFill>
-                      <a:prstDash val="solid"/>
-                      <a:round/>
-                      <a:headEnd type="none" w="med" len="med"/>
-                      <a:tailEnd type="none" w="med" len="med"/>
-                    </a:lnT>
-                    <a:lnB w="9525" cap="flat" cmpd="sng" algn="ctr">
-                      <a:solidFill>
-                        <a:srgbClr val="E3EDE6"/>
-                      </a:solidFill>
-                      <a:prstDash val="solid"/>
-                      <a:round/>
-                      <a:headEnd type="none" w="med" len="med"/>
-                      <a:tailEnd type="none" w="med" len="med"/>
-                    </a:lnB>
-                    <a:solidFill>
-                      <a:schemeClr val="bg1"/>
-                    </a:solidFill>
-                  </a:tcPr>
-                </a:tc>
-              </a:tr>
-              <a:tr h="274320">
-                <a:tc>
-                  <a:txBody>
-                    <a:bodyPr/>
-                    <a:lstStyle/>
-                    <a:p>
-                      <a:pPr indent="0" marL="0">
-                        <a:buNone/>
-                      </a:pPr>
-                      <a:r>
-                        <a:rPr lang="en-US" sz="1000" b="1" dirty="0">
-                          <a:solidFill>
-                            <a:schemeClr val="tx1"/>
-                          </a:solidFill>
-                        </a:rPr>
-                        <a:t>Total</a:t>
-                      </a:r>
-                      <a:endParaRPr lang="en-US" sz="1000" dirty="0"/>
-                    </a:p>
-                  </a:txBody>
-                  <a:tcPr marL="128016" marR="128016" marT="54864" marB="54864" anchor="ctr">
-                    <a:lnL w="9525" cap="flat" cmpd="sng" algn="ctr">
-                      <a:solidFill>
-                        <a:srgbClr val="E3EDE6"/>
-                      </a:solidFill>
-                      <a:prstDash val="solid"/>
-                      <a:round/>
-                      <a:headEnd type="none" w="med" len="med"/>
-                      <a:tailEnd type="none" w="med" len="med"/>
-                    </a:lnL>
-                    <a:lnR w="9525" cap="flat" cmpd="sng" algn="ctr">
-                      <a:solidFill>
-                        <a:srgbClr val="E3EDE6"/>
-                      </a:solidFill>
-                      <a:prstDash val="solid"/>
-                      <a:round/>
-                      <a:headEnd type="none" w="med" len="med"/>
-                      <a:tailEnd type="none" w="med" len="med"/>
-                    </a:lnR>
-                    <a:lnT w="9525" cap="flat" cmpd="sng" algn="ctr">
-                      <a:solidFill>
-                        <a:srgbClr val="E3EDE6"/>
-                      </a:solidFill>
-                      <a:prstDash val="solid"/>
-                      <a:round/>
-                      <a:headEnd type="none" w="med" len="med"/>
-                      <a:tailEnd type="none" w="med" len="med"/>
-                    </a:lnT>
-                    <a:lnB w="9525" cap="flat" cmpd="sng" algn="ctr">
-                      <a:solidFill>
-                        <a:srgbClr val="E3EDE6"/>
-                      </a:solidFill>
-                      <a:prstDash val="solid"/>
-                      <a:round/>
-                      <a:headEnd type="none" w="med" len="med"/>
-                      <a:tailEnd type="none" w="med" len="med"/>
-                    </a:lnB>
-                    <a:solidFill>
-                      <a:schemeClr val="bg1"/>
-                    </a:solidFill>
-                  </a:tcPr>
-                </a:tc>
-                <a:tc>
-                  <a:txBody>
-                    <a:bodyPr/>
-                    <a:lstStyle/>
-                    <a:p>
-                      <a:pPr indent="0" marL="0">
-                        <a:buNone/>
-                      </a:pPr>
-                      <a:r>
-                        <a:rPr lang="en-US" sz="1000" dirty="0">
-                          <a:solidFill>
-                            <a:schemeClr val="tx2"/>
-                          </a:solidFill>
-                        </a:rPr>
-                        <a:t>64</a:t>
-                      </a:r>
-                      <a:endParaRPr lang="en-US" sz="1000" dirty="0"/>
-                    </a:p>
-                  </a:txBody>
-                  <a:tcPr marL="128016" marR="128016" marT="54864" marB="54864" anchor="ctr">
-                    <a:lnL w="9525" cap="flat" cmpd="sng" algn="ctr">
-                      <a:solidFill>
-                        <a:srgbClr val="E3EDE6"/>
-                      </a:solidFill>
-                      <a:prstDash val="solid"/>
-                      <a:round/>
-                      <a:headEnd type="none" w="med" len="med"/>
-                      <a:tailEnd type="none" w="med" len="med"/>
-                    </a:lnL>
-                    <a:lnR w="9525" cap="flat" cmpd="sng" algn="ctr">
-                      <a:solidFill>
-                        <a:srgbClr val="E3EDE6"/>
-                      </a:solidFill>
-                      <a:prstDash val="solid"/>
-                      <a:round/>
-                      <a:headEnd type="none" w="med" len="med"/>
-                      <a:tailEnd type="none" w="med" len="med"/>
-                    </a:lnR>
-                    <a:lnT w="9525" cap="flat" cmpd="sng" algn="ctr">
-                      <a:solidFill>
-                        <a:srgbClr val="E3EDE6"/>
-                      </a:solidFill>
-                      <a:prstDash val="solid"/>
-                      <a:round/>
-                      <a:headEnd type="none" w="med" len="med"/>
-                      <a:tailEnd type="none" w="med" len="med"/>
-                    </a:lnT>
-                    <a:lnB w="9525" cap="flat" cmpd="sng" algn="ctr">
-                      <a:solidFill>
-                        <a:srgbClr val="E3EDE6"/>
-                      </a:solidFill>
-                      <a:prstDash val="solid"/>
-                      <a:round/>
-                      <a:headEnd type="none" w="med" len="med"/>
-                      <a:tailEnd type="none" w="med" len="med"/>
-                    </a:lnB>
-                    <a:solidFill>
-                      <a:schemeClr val="bg1"/>
-                    </a:solidFill>
-                  </a:tcPr>
-                </a:tc>
-                <a:tc>
-                  <a:txBody>
-                    <a:bodyPr/>
-                    <a:lstStyle/>
-                    <a:p>
-                      <a:pPr indent="0" marL="0">
-                        <a:buNone/>
-                      </a:pPr>
-                      <a:r>
-                        <a:rPr lang="en-US" sz="1000" dirty="0">
-                          <a:solidFill>
-                            <a:schemeClr val="tx2"/>
-                          </a:solidFill>
-                        </a:rPr>
-                        <a:t>3 200 000</a:t>
-                      </a:r>
-                      <a:endParaRPr lang="en-US" sz="1000" dirty="0"/>
-                    </a:p>
-                  </a:txBody>
-                  <a:tcPr marL="128016" marR="128016" marT="54864" marB="54864" anchor="ctr">
-                    <a:lnL w="9525" cap="flat" cmpd="sng" algn="ctr">
-                      <a:solidFill>
-                        <a:srgbClr val="E3EDE6"/>
-                      </a:solidFill>
-                      <a:prstDash val="solid"/>
-                      <a:round/>
-                      <a:headEnd type="none" w="med" len="med"/>
-                      <a:tailEnd type="none" w="med" len="med"/>
-                    </a:lnL>
-                    <a:lnR w="9525" cap="flat" cmpd="sng" algn="ctr">
-                      <a:solidFill>
-                        <a:srgbClr val="E3EDE6"/>
-                      </a:solidFill>
-                      <a:prstDash val="solid"/>
-                      <a:round/>
-                      <a:headEnd type="none" w="med" len="med"/>
-                      <a:tailEnd type="none" w="med" len="med"/>
-                    </a:lnR>
-                    <a:lnT w="9525" cap="flat" cmpd="sng" algn="ctr">
-                      <a:solidFill>
-                        <a:srgbClr val="E3EDE6"/>
-                      </a:solidFill>
-                      <a:prstDash val="solid"/>
-                      <a:round/>
-                      <a:headEnd type="none" w="med" len="med"/>
-                      <a:tailEnd type="none" w="med" len="med"/>
-                    </a:lnT>
-                    <a:lnB w="9525" cap="flat" cmpd="sng" algn="ctr">
-                      <a:solidFill>
-                        <a:srgbClr val="E3EDE6"/>
-                      </a:solidFill>
-                      <a:prstDash val="solid"/>
-                      <a:round/>
-                      <a:headEnd type="none" w="med" len="med"/>
-                      <a:tailEnd type="none" w="med" len="med"/>
-                    </a:lnB>
-                    <a:solidFill>
-                      <a:schemeClr val="bg1"/>
-                    </a:solidFill>
-                  </a:tcPr>
-                </a:tc>
-                <a:tc>
-                  <a:txBody>
-                    <a:bodyPr/>
-                    <a:lstStyle/>
-                    <a:p>
-                      <a:pPr indent="0" marL="0">
-                        <a:buNone/>
-                      </a:pPr>
-                      <a:r>
-                        <a:rPr lang="en-US" sz="1000" dirty="0">
-                          <a:solidFill>
-                            <a:schemeClr val="tx2"/>
-                          </a:solidFill>
-                        </a:rPr>
-                        <a:t>250 000</a:t>
-                      </a:r>
-                      <a:endParaRPr lang="en-US" sz="1000" dirty="0"/>
-                    </a:p>
-                  </a:txBody>
-                  <a:tcPr marL="128016" marR="128016" marT="54864" marB="54864" anchor="ctr">
-                    <a:lnL w="9525" cap="flat" cmpd="sng" algn="ctr">
-                      <a:solidFill>
-                        <a:srgbClr val="E3EDE6"/>
-                      </a:solidFill>
-                      <a:prstDash val="solid"/>
-                      <a:round/>
-                      <a:headEnd type="none" w="med" len="med"/>
-                      <a:tailEnd type="none" w="med" len="med"/>
-                    </a:lnL>
-                    <a:lnR w="9525" cap="flat" cmpd="sng" algn="ctr">
-                      <a:solidFill>
-                        <a:srgbClr val="E3EDE6"/>
-                      </a:solidFill>
-                      <a:prstDash val="solid"/>
-                      <a:round/>
-                      <a:headEnd type="none" w="med" len="med"/>
-                      <a:tailEnd type="none" w="med" len="med"/>
-                    </a:lnR>
-                    <a:lnT w="9525" cap="flat" cmpd="sng" algn="ctr">
-                      <a:solidFill>
-                        <a:srgbClr val="E3EDE6"/>
-                      </a:solidFill>
-                      <a:prstDash val="solid"/>
-                      <a:round/>
-                      <a:headEnd type="none" w="med" len="med"/>
-                      <a:tailEnd type="none" w="med" len="med"/>
-                    </a:lnT>
-                    <a:lnB w="9525" cap="flat" cmpd="sng" algn="ctr">
-                      <a:solidFill>
-                        <a:srgbClr val="E3EDE6"/>
-                      </a:solidFill>
-                      <a:prstDash val="solid"/>
-                      <a:round/>
-                      <a:headEnd type="none" w="med" len="med"/>
-                      <a:tailEnd type="none" w="med" len="med"/>
-                    </a:lnB>
-                    <a:solidFill>
-                      <a:schemeClr val="bg1"/>
-                    </a:solidFill>
-                  </a:tcPr>
-                </a:tc>
-                <a:tc>
-                  <a:txBody>
-                    <a:bodyPr/>
-                    <a:lstStyle/>
-                    <a:p>
-                      <a:pPr indent="0" marL="0">
-                        <a:buNone/>
-                      </a:pPr>
-                      <a:r>
-                        <a:rPr lang="en-US" sz="1000" dirty="0">
-                          <a:solidFill>
-                            <a:schemeClr val="tx2"/>
-                          </a:solidFill>
-                        </a:rPr>
-                        <a:t>9 400</a:t>
-                      </a:r>
-                      <a:endParaRPr lang="en-US" sz="1000" dirty="0"/>
-                    </a:p>
-                  </a:txBody>
-                  <a:tcPr marL="128016" marR="128016" marT="54864" marB="54864" anchor="ctr">
-                    <a:lnL w="9525" cap="flat" cmpd="sng" algn="ctr">
-                      <a:solidFill>
-                        <a:srgbClr val="E3EDE6"/>
-                      </a:solidFill>
-                      <a:prstDash val="solid"/>
-                      <a:round/>
-                      <a:headEnd type="none" w="med" len="med"/>
-                      <a:tailEnd type="none" w="med" len="med"/>
-                    </a:lnL>
-                    <a:lnR w="9525" cap="flat" cmpd="sng" algn="ctr">
-                      <a:solidFill>
-                        <a:srgbClr val="E3EDE6"/>
-                      </a:solidFill>
-                      <a:prstDash val="solid"/>
-                      <a:round/>
-                      <a:headEnd type="none" w="med" len="med"/>
-                      <a:tailEnd type="none" w="med" len="med"/>
-                    </a:lnR>
-                    <a:lnT w="9525" cap="flat" cmpd="sng" algn="ctr">
-                      <a:solidFill>
-                        <a:srgbClr val="E3EDE6"/>
-                      </a:solidFill>
-                      <a:prstDash val="solid"/>
-                      <a:round/>
-                      <a:headEnd type="none" w="med" len="med"/>
-                      <a:tailEnd type="none" w="med" len="med"/>
-                    </a:lnT>
-                    <a:lnB w="9525" cap="flat" cmpd="sng" algn="ctr">
-                      <a:solidFill>
-                        <a:srgbClr val="E3EDE6"/>
-                      </a:solidFill>
-                      <a:prstDash val="solid"/>
-                      <a:round/>
-                      <a:headEnd type="none" w="med" len="med"/>
-                      <a:tailEnd type="none" w="med" len="med"/>
-                    </a:lnB>
-                    <a:solidFill>
-                      <a:schemeClr val="bg1"/>
-                    </a:solidFill>
-                  </a:tcPr>
-                </a:tc>
-              </a:tr>
-            </a:tbl>
-          </a:graphicData>
-        </a:graphic>
-      </p:graphicFrame>
-      <p:sp>
-        <p:nvSpPr>
-          <p:cNvPr id="15" name="Text 8"/>
-          <p:cNvSpPr txBox="1"/>
-          <p:nvPr/>
-        </p:nvSpPr>
-        <p:spPr>
-          <a:xfrm>
-            <a:off x="822960" y="5486400"/>
-            <a:ext cx="6309360" cy="384048"/>
-          </a:xfrm>
-          <a:prstGeom prst="rect">
-            <a:avLst/>
-          </a:prstGeom>
-          <a:noFill/>
-          <a:ln/>
-        </p:spPr>
-        <p:txBody>
-          <a:bodyPr wrap="square" lIns="0" tIns="0" rIns="0" bIns="0" rtlCol="0" anchor="t"/>
-          <a:lstStyle/>
-          <a:p>
-            <a:pPr indent="0" marL="0">
-              <a:buNone/>
-            </a:pPr>
-            <a:r>
-              <a:rPr lang="fr-FR" altLang="en-US" sz="1000" dirty="0">
-                <a:solidFill>
-                  <a:schemeClr val="tx2"/>
-                </a:solidFill>
-              </a:rPr>
-              <a:t>Le rapport complet liste aussi chaque publication et se termine par des recommandations. Chaque chiffre vient des statistiques des créateurs, des liens suivis ou de la billetterie.</a:t>
-            </a:r>
-            <a:endParaRPr lang="fr-FR" sz="1000" dirty="0"/>
-          </a:p>
-        </p:txBody>
-      </p:sp>
-      <p:sp>
-        <p:nvSpPr>
-          <p:cNvPr id="16" name="Text 9"/>
-          <p:cNvSpPr txBox="1"/>
-          <p:nvPr/>
-        </p:nvSpPr>
-        <p:spPr>
-          <a:xfrm>
-            <a:off x="7269480" y="2770632"/>
-            <a:ext cx="2743200" cy="256032"/>
-          </a:xfrm>
-          <a:prstGeom prst="rect">
-            <a:avLst/>
-          </a:prstGeom>
-          <a:noFill/>
-          <a:ln/>
-        </p:spPr>
-        <p:txBody>
-          <a:bodyPr wrap="square" lIns="0" tIns="0" rIns="0" bIns="0" rtlCol="0" anchor="t"/>
-          <a:lstStyle/>
-          <a:p>
-            <a:pPr indent="0" marL="0">
-              <a:buNone/>
-            </a:pPr>
-            <a:r>
-              <a:rPr lang="fr-FR" altLang="en-US" sz="1100" b="1" spc="300" kern="0" dirty="0">
-                <a:solidFill>
-                  <a:schemeClr val="accent3"/>
-                </a:solidFill>
-              </a:rPr>
-              <a:t>PUBLIC</a:t>
-            </a:r>
-            <a:endParaRPr lang="fr-FR" sz="1100" dirty="0"/>
-          </a:p>
-        </p:txBody>
-      </p:sp>
-      <p:sp>
-        <p:nvSpPr>
-          <p:cNvPr id="17" name="Text 10"/>
-          <p:cNvSpPr txBox="1"/>
-          <p:nvPr/>
-        </p:nvSpPr>
-        <p:spPr>
-          <a:xfrm>
-            <a:off x="7269480" y="3063240"/>
-            <a:ext cx="1417320" cy="219456"/>
-          </a:xfrm>
-          <a:prstGeom prst="rect">
-            <a:avLst/>
-          </a:prstGeom>
-          <a:noFill/>
-          <a:ln/>
-        </p:spPr>
-        <p:txBody>
-          <a:bodyPr wrap="square" lIns="0" tIns="0" rIns="0" bIns="0" rtlCol="0" anchor="ctr"/>
-          <a:lstStyle/>
-          <a:p>
-            <a:pPr indent="0" marL="0">
-              <a:buNone/>
-            </a:pPr>
-            <a:r>
-              <a:rPr lang="fr-FR" altLang="en-US" sz="1000" dirty="0">
-                <a:solidFill>
-                  <a:schemeClr val="tx2"/>
-                </a:solidFill>
-              </a:rPr>
-              <a:t>Côte d’Ivoire</a:t>
-            </a:r>
-            <a:endParaRPr lang="fr-FR" sz="1000" dirty="0"/>
-          </a:p>
-        </p:txBody>
-      </p:sp>
-      <p:sp>
-        <p:nvSpPr>
-          <p:cNvPr id="18" name="Shape 11"/>
-          <p:cNvSpPr/>
-          <p:nvPr/>
-        </p:nvSpPr>
-        <p:spPr>
-          <a:xfrm>
-            <a:off x="8732520" y="3099816"/>
-            <a:ext cx="1737360" cy="146304"/>
-          </a:xfrm>
-          <a:prstGeom prst="roundRect">
-            <a:avLst>
-              <a:gd name="adj" fmla="val 18750"/>
-            </a:avLst>
-          </a:prstGeom>
-          <a:solidFill>
-            <a:schemeClr val="accent2"/>
-          </a:solidFill>
-          <a:ln/>
-        </p:spPr>
-      </p:sp>
-      <p:sp>
-        <p:nvSpPr>
-          <p:cNvPr id="19" name="Text 12"/>
-          <p:cNvSpPr txBox="1"/>
-          <p:nvPr/>
-        </p:nvSpPr>
-        <p:spPr>
-          <a:xfrm>
-            <a:off x="10561320" y="3063240"/>
-            <a:ext cx="548640" cy="219456"/>
-          </a:xfrm>
-          <a:prstGeom prst="rect">
-            <a:avLst/>
-          </a:prstGeom>
-          <a:noFill/>
-          <a:ln/>
-        </p:spPr>
-        <p:txBody>
-          <a:bodyPr wrap="square" lIns="0" tIns="0" rIns="0" bIns="0" rtlCol="0" anchor="ctr"/>
-          <a:lstStyle/>
-          <a:p>
-            <a:pPr indent="0" marL="0">
-              <a:buNone/>
-            </a:pPr>
-            <a:r>
-              <a:rPr lang="fr-FR" altLang="en-US" sz="1000" b="1" dirty="0">
-                <a:solidFill>
-                  <a:schemeClr val="tx1"/>
-                </a:solidFill>
-              </a:rPr>
-              <a:t>58%</a:t>
-            </a:r>
-            <a:endParaRPr lang="fr-FR" sz="1000" dirty="0"/>
-          </a:p>
-        </p:txBody>
-      </p:sp>
-      <p:sp>
-        <p:nvSpPr>
-          <p:cNvPr id="20" name="Text 13"/>
-          <p:cNvSpPr txBox="1"/>
-          <p:nvPr/>
-        </p:nvSpPr>
-        <p:spPr>
-          <a:xfrm>
-            <a:off x="7269480" y="3374136"/>
-            <a:ext cx="1417320" cy="219456"/>
-          </a:xfrm>
-          <a:prstGeom prst="rect">
-            <a:avLst/>
-          </a:prstGeom>
-          <a:noFill/>
-          <a:ln/>
-        </p:spPr>
-        <p:txBody>
-          <a:bodyPr wrap="square" lIns="0" tIns="0" rIns="0" bIns="0" rtlCol="0" anchor="ctr"/>
-          <a:lstStyle/>
-          <a:p>
-            <a:pPr indent="0" marL="0">
-              <a:buNone/>
-            </a:pPr>
-            <a:r>
-              <a:rPr lang="fr-FR" altLang="en-US" sz="1000" dirty="0">
-                <a:solidFill>
-                  <a:schemeClr val="tx2"/>
-                </a:solidFill>
-              </a:rPr>
-              <a:t>Diaspora</a:t>
-            </a:r>
-            <a:endParaRPr lang="fr-FR" sz="1000" dirty="0"/>
-          </a:p>
-        </p:txBody>
-      </p:sp>
-      <p:sp>
-        <p:nvSpPr>
-          <p:cNvPr id="21" name="Shape 14"/>
-          <p:cNvSpPr/>
-          <p:nvPr/>
-        </p:nvSpPr>
-        <p:spPr>
-          <a:xfrm>
-            <a:off x="8732520" y="3410712"/>
-            <a:ext cx="718908" cy="146304"/>
-          </a:xfrm>
-          <a:prstGeom prst="roundRect">
-            <a:avLst>
-              <a:gd name="adj" fmla="val 18750"/>
-            </a:avLst>
-          </a:prstGeom>
-          <a:solidFill>
-            <a:schemeClr val="accent1"/>
-          </a:solidFill>
-          <a:ln/>
-        </p:spPr>
-      </p:sp>
-      <p:sp>
-        <p:nvSpPr>
-          <p:cNvPr id="22" name="Text 15"/>
-          <p:cNvSpPr txBox="1"/>
-          <p:nvPr/>
-        </p:nvSpPr>
-        <p:spPr>
-          <a:xfrm>
-            <a:off x="9542868" y="3374136"/>
-            <a:ext cx="548640" cy="219456"/>
-          </a:xfrm>
-          <a:prstGeom prst="rect">
-            <a:avLst/>
-          </a:prstGeom>
-          <a:noFill/>
-          <a:ln/>
-        </p:spPr>
-        <p:txBody>
-          <a:bodyPr wrap="square" lIns="0" tIns="0" rIns="0" bIns="0" rtlCol="0" anchor="ctr"/>
-          <a:lstStyle/>
-          <a:p>
-            <a:pPr indent="0" marL="0">
-              <a:buNone/>
-            </a:pPr>
-            <a:r>
-              <a:rPr lang="fr-FR" altLang="en-US" sz="1000" b="1" dirty="0">
-                <a:solidFill>
-                  <a:schemeClr val="tx1"/>
-                </a:solidFill>
-              </a:rPr>
-              <a:t>24%</a:t>
-            </a:r>
-            <a:endParaRPr lang="fr-FR" sz="1000" dirty="0"/>
-          </a:p>
-        </p:txBody>
-      </p:sp>
-      <p:sp>
-        <p:nvSpPr>
-          <p:cNvPr id="23" name="Text 16"/>
-          <p:cNvSpPr txBox="1"/>
-          <p:nvPr/>
-        </p:nvSpPr>
-        <p:spPr>
-          <a:xfrm>
-            <a:off x="7269480" y="3685032"/>
-            <a:ext cx="1417320" cy="219456"/>
-          </a:xfrm>
-          <a:prstGeom prst="rect">
-            <a:avLst/>
-          </a:prstGeom>
-          <a:noFill/>
-          <a:ln/>
-        </p:spPr>
-        <p:txBody>
-          <a:bodyPr wrap="square" lIns="0" tIns="0" rIns="0" bIns="0" rtlCol="0" anchor="ctr"/>
-          <a:lstStyle/>
-          <a:p>
-            <a:pPr indent="0" marL="0">
-              <a:buNone/>
-            </a:pPr>
-            <a:r>
-              <a:rPr lang="fr-FR" altLang="en-US" sz="1000" dirty="0">
-                <a:solidFill>
-                  <a:schemeClr val="tx2"/>
-                </a:solidFill>
-              </a:rPr>
-              <a:t>Reste de l’Afrique</a:t>
-            </a:r>
-            <a:endParaRPr lang="fr-FR" sz="1000" dirty="0"/>
-          </a:p>
-        </p:txBody>
-      </p:sp>
-      <p:sp>
-        <p:nvSpPr>
-          <p:cNvPr id="24" name="Shape 17"/>
-          <p:cNvSpPr/>
-          <p:nvPr/>
-        </p:nvSpPr>
-        <p:spPr>
-          <a:xfrm>
-            <a:off x="8732520" y="3721608"/>
-            <a:ext cx="539181" cy="146304"/>
-          </a:xfrm>
-          <a:prstGeom prst="roundRect">
-            <a:avLst>
-              <a:gd name="adj" fmla="val 18750"/>
-            </a:avLst>
-          </a:prstGeom>
-          <a:solidFill>
-            <a:schemeClr val="accent1"/>
-          </a:solidFill>
-          <a:ln/>
-        </p:spPr>
-      </p:sp>
-      <p:sp>
-        <p:nvSpPr>
-          <p:cNvPr id="25" name="Text 18"/>
-          <p:cNvSpPr txBox="1"/>
-          <p:nvPr/>
-        </p:nvSpPr>
-        <p:spPr>
-          <a:xfrm>
-            <a:off x="9363141" y="3685032"/>
-            <a:ext cx="548640" cy="219456"/>
-          </a:xfrm>
-          <a:prstGeom prst="rect">
-            <a:avLst/>
-          </a:prstGeom>
-          <a:noFill/>
-          <a:ln/>
-        </p:spPr>
-        <p:txBody>
-          <a:bodyPr wrap="square" lIns="0" tIns="0" rIns="0" bIns="0" rtlCol="0" anchor="ctr"/>
-          <a:lstStyle/>
-          <a:p>
-            <a:pPr indent="0" marL="0">
-              <a:buNone/>
-            </a:pPr>
-            <a:r>
-              <a:rPr lang="fr-FR" altLang="en-US" sz="1000" b="1" dirty="0">
-                <a:solidFill>
-                  <a:schemeClr val="tx1"/>
-                </a:solidFill>
-              </a:rPr>
-              <a:t>18%</a:t>
-            </a:r>
-            <a:endParaRPr lang="fr-FR" sz="1000" dirty="0"/>
-          </a:p>
-        </p:txBody>
-      </p:sp>
-      <p:sp>
-        <p:nvSpPr>
-          <p:cNvPr id="26" name="Text 19"/>
-          <p:cNvSpPr txBox="1"/>
-          <p:nvPr/>
-        </p:nvSpPr>
-        <p:spPr>
-          <a:xfrm>
-            <a:off x="7269480" y="4069080"/>
-            <a:ext cx="2743200" cy="256032"/>
-          </a:xfrm>
-          <a:prstGeom prst="rect">
-            <a:avLst/>
-          </a:prstGeom>
-          <a:noFill/>
-          <a:ln/>
-        </p:spPr>
-        <p:txBody>
-          <a:bodyPr wrap="square" lIns="0" tIns="0" rIns="0" bIns="0" rtlCol="0" anchor="t"/>
-          <a:lstStyle/>
-          <a:p>
-            <a:pPr indent="0" marL="0">
-              <a:buNone/>
-            </a:pPr>
-            <a:r>
-              <a:rPr lang="fr-FR" altLang="en-US" sz="1100" b="1" spc="300" kern="0" dirty="0">
-                <a:solidFill>
-                  <a:schemeClr val="accent3"/>
-                </a:solidFill>
-              </a:rPr>
-              <a:t>VALEUR SPONSORS</a:t>
-            </a:r>
-            <a:endParaRPr lang="fr-FR" sz="1100" dirty="0"/>
-          </a:p>
-        </p:txBody>
-      </p:sp>
-      <p:graphicFrame>
-        <p:nvGraphicFramePr>
-          <p:cNvPr id="25" name="Sample table by sponsor"/>
-          <p:cNvGraphicFramePr>
-            <a:graphicFrameLocks noGrp="1"/>
-          </p:cNvGraphicFramePr>
-          <p:nvPr>
-            <p:extLst>
-              <p:ext uri="{D42A27DB-BD31-4B8C-83A1-F6EECF244321}">
-                <p14:modId xmlns:p14="http://schemas.microsoft.com/office/powerpoint/2010/main" val="1579011935"/>
-              </p:ext>
-            </p:extLst>
-          </p:nvPr>
-        </p:nvGraphicFramePr>
-        <p:xfrm>
-          <a:off x="7269480" y="4343400"/>
-          <a:ext cx="4099255" cy="914400"/>
-        </p:xfrm>
-        <a:graphic>
-          <a:graphicData uri="http://schemas.openxmlformats.org/drawingml/2006/table">
-            <a:tbl>
-              <a:tblPr/>
-              <a:tblGrid>
-                <a:gridCol w="960120"/>
-                <a:gridCol w="868680"/>
-                <a:gridCol w="914400"/>
-                <a:gridCol w="1356055"/>
-              </a:tblGrid>
-              <a:tr h="274320">
-                <a:tc>
-                  <a:txBody>
-                    <a:bodyPr/>
-                    <a:lstStyle/>
-                    <a:p>
-                      <a:pPr indent="0" marL="0">
-                        <a:buNone/>
-                      </a:pPr>
-                      <a:r>
-                        <a:rPr lang="en-US" sz="1000" b="1" dirty="0">
-                          <a:solidFill>
-                            <a:schemeClr val="bg1"/>
-                          </a:solidFill>
-                        </a:rPr>
-                        <a:t>Marque</a:t>
-                      </a:r>
-                      <a:endParaRPr lang="en-US" sz="1000" dirty="0"/>
-                    </a:p>
-                  </a:txBody>
-                  <a:tcPr marL="128016" marR="128016" marT="54864" marB="54864" anchor="ctr">
-                    <a:lnL w="9525" cap="flat" cmpd="sng" algn="ctr">
-                      <a:solidFill>
-                        <a:srgbClr val="E3EDE6"/>
-                      </a:solidFill>
-                      <a:prstDash val="solid"/>
-                      <a:round/>
-                      <a:headEnd type="none" w="med" len="med"/>
-                      <a:tailEnd type="none" w="med" len="med"/>
-                    </a:lnL>
-                    <a:lnR w="9525" cap="flat" cmpd="sng" algn="ctr">
-                      <a:solidFill>
-                        <a:srgbClr val="E3EDE6"/>
-                      </a:solidFill>
-                      <a:prstDash val="solid"/>
-                      <a:round/>
-                      <a:headEnd type="none" w="med" len="med"/>
-                      <a:tailEnd type="none" w="med" len="med"/>
-                    </a:lnR>
-                    <a:lnT w="9525" cap="flat" cmpd="sng" algn="ctr">
-                      <a:solidFill>
-                        <a:srgbClr val="E3EDE6"/>
-                      </a:solidFill>
-                      <a:prstDash val="solid"/>
-                      <a:round/>
-                      <a:headEnd type="none" w="med" len="med"/>
-                      <a:tailEnd type="none" w="med" len="med"/>
-                    </a:lnT>
-                    <a:lnB w="9525" cap="flat" cmpd="sng" algn="ctr">
-                      <a:solidFill>
-                        <a:srgbClr val="E3EDE6"/>
-                      </a:solidFill>
-                      <a:prstDash val="solid"/>
-                      <a:round/>
-                      <a:headEnd type="none" w="med" len="med"/>
-                      <a:tailEnd type="none" w="med" len="med"/>
-                    </a:lnB>
-                    <a:solidFill>
-                      <a:schemeClr val="tx1"/>
-                    </a:solidFill>
-                  </a:tcPr>
-                </a:tc>
-                <a:tc>
-                  <a:txBody>
-                    <a:bodyPr/>
-                    <a:lstStyle/>
-                    <a:p>
-                      <a:pPr indent="0" marL="0">
-                        <a:buNone/>
-                      </a:pPr>
-                      <a:r>
-                        <a:rPr lang="en-US" sz="1000" b="1" dirty="0">
-                          <a:solidFill>
-                            <a:schemeClr val="bg1"/>
-                          </a:solidFill>
-                        </a:rPr>
-                        <a:t>Moments</a:t>
-                      </a:r>
-                      <a:endParaRPr lang="en-US" sz="1000" dirty="0"/>
-                    </a:p>
-                  </a:txBody>
-                  <a:tcPr marL="128016" marR="128016" marT="54864" marB="54864" anchor="ctr">
-                    <a:lnL w="9525" cap="flat" cmpd="sng" algn="ctr">
-                      <a:solidFill>
-                        <a:srgbClr val="E3EDE6"/>
-                      </a:solidFill>
-                      <a:prstDash val="solid"/>
-                      <a:round/>
-                      <a:headEnd type="none" w="med" len="med"/>
-                      <a:tailEnd type="none" w="med" len="med"/>
-                    </a:lnL>
-                    <a:lnR w="9525" cap="flat" cmpd="sng" algn="ctr">
-                      <a:solidFill>
-                        <a:srgbClr val="E3EDE6"/>
-                      </a:solidFill>
-                      <a:prstDash val="solid"/>
-                      <a:round/>
-                      <a:headEnd type="none" w="med" len="med"/>
-                      <a:tailEnd type="none" w="med" len="med"/>
-                    </a:lnR>
-                    <a:lnT w="9525" cap="flat" cmpd="sng" algn="ctr">
-                      <a:solidFill>
-                        <a:srgbClr val="E3EDE6"/>
-                      </a:solidFill>
-                      <a:prstDash val="solid"/>
-                      <a:round/>
-                      <a:headEnd type="none" w="med" len="med"/>
-                      <a:tailEnd type="none" w="med" len="med"/>
-                    </a:lnT>
-                    <a:lnB w="9525" cap="flat" cmpd="sng" algn="ctr">
-                      <a:solidFill>
-                        <a:srgbClr val="E3EDE6"/>
-                      </a:solidFill>
-                      <a:prstDash val="solid"/>
-                      <a:round/>
-                      <a:headEnd type="none" w="med" len="med"/>
-                      <a:tailEnd type="none" w="med" len="med"/>
-                    </a:lnB>
-                    <a:solidFill>
-                      <a:schemeClr val="tx1"/>
-                    </a:solidFill>
-                  </a:tcPr>
-                </a:tc>
-                <a:tc>
-                  <a:txBody>
-                    <a:bodyPr/>
-                    <a:lstStyle/>
-                    <a:p>
-                      <a:pPr indent="0" marL="0">
-                        <a:buNone/>
-                      </a:pPr>
-                      <a:r>
-                        <a:rPr lang="en-US" sz="1000" b="1" dirty="0">
-                          <a:solidFill>
-                            <a:schemeClr val="bg1"/>
-                          </a:solidFill>
-                        </a:rPr>
-                        <a:t>Temps à l’écran</a:t>
-                      </a:r>
-                      <a:endParaRPr lang="en-US" sz="1000" dirty="0"/>
-                    </a:p>
-                  </a:txBody>
-                  <a:tcPr marL="128016" marR="128016" marT="54864" marB="54864" anchor="ctr">
-                    <a:lnL w="9525" cap="flat" cmpd="sng" algn="ctr">
-                      <a:solidFill>
-                        <a:srgbClr val="E3EDE6"/>
-                      </a:solidFill>
-                      <a:prstDash val="solid"/>
-                      <a:round/>
-                      <a:headEnd type="none" w="med" len="med"/>
-                      <a:tailEnd type="none" w="med" len="med"/>
-                    </a:lnL>
-                    <a:lnR w="9525" cap="flat" cmpd="sng" algn="ctr">
-                      <a:solidFill>
-                        <a:srgbClr val="E3EDE6"/>
-                      </a:solidFill>
-                      <a:prstDash val="solid"/>
-                      <a:round/>
-                      <a:headEnd type="none" w="med" len="med"/>
-                      <a:tailEnd type="none" w="med" len="med"/>
-                    </a:lnR>
-                    <a:lnT w="9525" cap="flat" cmpd="sng" algn="ctr">
-                      <a:solidFill>
-                        <a:srgbClr val="E3EDE6"/>
-                      </a:solidFill>
-                      <a:prstDash val="solid"/>
-                      <a:round/>
-                      <a:headEnd type="none" w="med" len="med"/>
-                      <a:tailEnd type="none" w="med" len="med"/>
-                    </a:lnT>
-                    <a:lnB w="9525" cap="flat" cmpd="sng" algn="ctr">
-                      <a:solidFill>
-                        <a:srgbClr val="E3EDE6"/>
-                      </a:solidFill>
-                      <a:prstDash val="solid"/>
-                      <a:round/>
-                      <a:headEnd type="none" w="med" len="med"/>
-                      <a:tailEnd type="none" w="med" len="med"/>
-                    </a:lnB>
-                    <a:solidFill>
-                      <a:schemeClr val="tx1"/>
-                    </a:solidFill>
-                  </a:tcPr>
-                </a:tc>
-                <a:tc>
-                  <a:txBody>
-                    <a:bodyPr/>
-                    <a:lstStyle/>
-                    <a:p>
-                      <a:pPr indent="0" marL="0">
-                        <a:buNone/>
-                      </a:pPr>
-                      <a:r>
-                        <a:rPr lang="en-US" sz="1000" b="1" dirty="0">
-                          <a:solidFill>
-                            <a:schemeClr val="bg1"/>
-                          </a:solidFill>
-                        </a:rPr>
-                        <a:t>Valeur média, estimée</a:t>
-                      </a:r>
-                      <a:endParaRPr lang="en-US" sz="1000" dirty="0"/>
-                    </a:p>
-                  </a:txBody>
-                  <a:tcPr marL="128016" marR="128016" marT="54864" marB="54864" anchor="ctr">
-                    <a:lnL w="9525" cap="flat" cmpd="sng" algn="ctr">
-                      <a:solidFill>
-                        <a:srgbClr val="E3EDE6"/>
-                      </a:solidFill>
-                      <a:prstDash val="solid"/>
-                      <a:round/>
-                      <a:headEnd type="none" w="med" len="med"/>
-                      <a:tailEnd type="none" w="med" len="med"/>
-                    </a:lnL>
-                    <a:lnR w="9525" cap="flat" cmpd="sng" algn="ctr">
-                      <a:solidFill>
-                        <a:srgbClr val="E3EDE6"/>
-                      </a:solidFill>
-                      <a:prstDash val="solid"/>
-                      <a:round/>
-                      <a:headEnd type="none" w="med" len="med"/>
-                      <a:tailEnd type="none" w="med" len="med"/>
-                    </a:lnR>
-                    <a:lnT w="9525" cap="flat" cmpd="sng" algn="ctr">
-                      <a:solidFill>
-                        <a:srgbClr val="E3EDE6"/>
-                      </a:solidFill>
-                      <a:prstDash val="solid"/>
-                      <a:round/>
-                      <a:headEnd type="none" w="med" len="med"/>
-                      <a:tailEnd type="none" w="med" len="med"/>
-                    </a:lnT>
-                    <a:lnB w="9525" cap="flat" cmpd="sng" algn="ctr">
-                      <a:solidFill>
-                        <a:srgbClr val="E3EDE6"/>
-                      </a:solidFill>
-                      <a:prstDash val="solid"/>
-                      <a:round/>
-                      <a:headEnd type="none" w="med" len="med"/>
-                      <a:tailEnd type="none" w="med" len="med"/>
-                    </a:lnB>
-                    <a:solidFill>
-                      <a:schemeClr val="tx1"/>
-                    </a:solidFill>
-                  </a:tcPr>
-                </a:tc>
-              </a:tr>
-              <a:tr h="274320">
-                <a:tc>
-                  <a:txBody>
-                    <a:bodyPr/>
-                    <a:lstStyle/>
-                    <a:p>
-                      <a:pPr indent="0" marL="0">
-                        <a:buNone/>
-                      </a:pPr>
-                      <a:r>
-                        <a:rPr lang="en-US" sz="1000" b="1" dirty="0">
-                          <a:solidFill>
-                            <a:schemeClr val="tx1"/>
-                          </a:solidFill>
-                        </a:rPr>
-                        <a:t>Marque A</a:t>
-                      </a:r>
-                      <a:endParaRPr lang="en-US" sz="1000" dirty="0"/>
-                    </a:p>
-                  </a:txBody>
-                  <a:tcPr marL="128016" marR="128016" marT="54864" marB="54864" anchor="ctr">
-                    <a:lnL w="9525" cap="flat" cmpd="sng" algn="ctr">
-                      <a:solidFill>
-                        <a:srgbClr val="E3EDE6"/>
-                      </a:solidFill>
-                      <a:prstDash val="solid"/>
-                      <a:round/>
-                      <a:headEnd type="none" w="med" len="med"/>
-                      <a:tailEnd type="none" w="med" len="med"/>
-                    </a:lnL>
-                    <a:lnR w="9525" cap="flat" cmpd="sng" algn="ctr">
-                      <a:solidFill>
-                        <a:srgbClr val="E3EDE6"/>
-                      </a:solidFill>
-                      <a:prstDash val="solid"/>
-                      <a:round/>
-                      <a:headEnd type="none" w="med" len="med"/>
-                      <a:tailEnd type="none" w="med" len="med"/>
-                    </a:lnR>
-                    <a:lnT w="9525" cap="flat" cmpd="sng" algn="ctr">
-                      <a:solidFill>
-                        <a:srgbClr val="E3EDE6"/>
-                      </a:solidFill>
-                      <a:prstDash val="solid"/>
-                      <a:round/>
-                      <a:headEnd type="none" w="med" len="med"/>
-                      <a:tailEnd type="none" w="med" len="med"/>
-                    </a:lnT>
-                    <a:lnB w="9525" cap="flat" cmpd="sng" algn="ctr">
-                      <a:solidFill>
-                        <a:srgbClr val="E3EDE6"/>
-                      </a:solidFill>
-                      <a:prstDash val="solid"/>
-                      <a:round/>
-                      <a:headEnd type="none" w="med" len="med"/>
-                      <a:tailEnd type="none" w="med" len="med"/>
-                    </a:lnB>
-                    <a:solidFill>
-                      <a:schemeClr val="bg1"/>
-                    </a:solidFill>
-                  </a:tcPr>
-                </a:tc>
-                <a:tc>
-                  <a:txBody>
-                    <a:bodyPr/>
-                    <a:lstStyle/>
-                    <a:p>
-                      <a:pPr indent="0" marL="0">
-                        <a:buNone/>
-                      </a:pPr>
-                      <a:r>
-                        <a:rPr lang="en-US" sz="1000" dirty="0">
-                          <a:solidFill>
-                            <a:schemeClr val="tx2"/>
-                          </a:solidFill>
-                        </a:rPr>
-                        <a:t>42</a:t>
-                      </a:r>
-                      <a:endParaRPr lang="en-US" sz="1000" dirty="0"/>
-                    </a:p>
-                  </a:txBody>
-                  <a:tcPr marL="128016" marR="128016" marT="54864" marB="54864" anchor="ctr">
-                    <a:lnL w="9525" cap="flat" cmpd="sng" algn="ctr">
-                      <a:solidFill>
-                        <a:srgbClr val="E3EDE6"/>
-                      </a:solidFill>
-                      <a:prstDash val="solid"/>
-                      <a:round/>
-                      <a:headEnd type="none" w="med" len="med"/>
-                      <a:tailEnd type="none" w="med" len="med"/>
-                    </a:lnL>
-                    <a:lnR w="9525" cap="flat" cmpd="sng" algn="ctr">
-                      <a:solidFill>
-                        <a:srgbClr val="E3EDE6"/>
-                      </a:solidFill>
-                      <a:prstDash val="solid"/>
-                      <a:round/>
-                      <a:headEnd type="none" w="med" len="med"/>
-                      <a:tailEnd type="none" w="med" len="med"/>
-                    </a:lnR>
-                    <a:lnT w="9525" cap="flat" cmpd="sng" algn="ctr">
-                      <a:solidFill>
-                        <a:srgbClr val="E3EDE6"/>
-                      </a:solidFill>
-                      <a:prstDash val="solid"/>
-                      <a:round/>
-                      <a:headEnd type="none" w="med" len="med"/>
-                      <a:tailEnd type="none" w="med" len="med"/>
-                    </a:lnT>
-                    <a:lnB w="9525" cap="flat" cmpd="sng" algn="ctr">
-                      <a:solidFill>
-                        <a:srgbClr val="E3EDE6"/>
-                      </a:solidFill>
-                      <a:prstDash val="solid"/>
-                      <a:round/>
-                      <a:headEnd type="none" w="med" len="med"/>
-                      <a:tailEnd type="none" w="med" len="med"/>
-                    </a:lnB>
-                    <a:solidFill>
-                      <a:schemeClr val="bg1"/>
-                    </a:solidFill>
-                  </a:tcPr>
-                </a:tc>
-                <a:tc>
-                  <a:txBody>
-                    <a:bodyPr/>
-                    <a:lstStyle/>
-                    <a:p>
-                      <a:pPr indent="0" marL="0">
-                        <a:buNone/>
-                      </a:pPr>
-                      <a:r>
-                        <a:rPr lang="en-US" sz="1000" dirty="0">
-                          <a:solidFill>
-                            <a:schemeClr val="tx2"/>
-                          </a:solidFill>
-                        </a:rPr>
-                        <a:t>6 min 10 s</a:t>
-                      </a:r>
-                      <a:endParaRPr lang="en-US" sz="1000" dirty="0"/>
-                    </a:p>
-                  </a:txBody>
-                  <a:tcPr marL="128016" marR="128016" marT="54864" marB="54864" anchor="ctr">
-                    <a:lnL w="9525" cap="flat" cmpd="sng" algn="ctr">
-                      <a:solidFill>
-                        <a:srgbClr val="E3EDE6"/>
-                      </a:solidFill>
-                      <a:prstDash val="solid"/>
-                      <a:round/>
-                      <a:headEnd type="none" w="med" len="med"/>
-                      <a:tailEnd type="none" w="med" len="med"/>
-                    </a:lnL>
-                    <a:lnR w="9525" cap="flat" cmpd="sng" algn="ctr">
-                      <a:solidFill>
-                        <a:srgbClr val="E3EDE6"/>
-                      </a:solidFill>
-                      <a:prstDash val="solid"/>
-                      <a:round/>
-                      <a:headEnd type="none" w="med" len="med"/>
-                      <a:tailEnd type="none" w="med" len="med"/>
-                    </a:lnR>
-                    <a:lnT w="9525" cap="flat" cmpd="sng" algn="ctr">
-                      <a:solidFill>
-                        <a:srgbClr val="E3EDE6"/>
-                      </a:solidFill>
-                      <a:prstDash val="solid"/>
-                      <a:round/>
-                      <a:headEnd type="none" w="med" len="med"/>
-                      <a:tailEnd type="none" w="med" len="med"/>
-                    </a:lnT>
-                    <a:lnB w="9525" cap="flat" cmpd="sng" algn="ctr">
-                      <a:solidFill>
-                        <a:srgbClr val="E3EDE6"/>
-                      </a:solidFill>
-                      <a:prstDash val="solid"/>
-                      <a:round/>
-                      <a:headEnd type="none" w="med" len="med"/>
-                      <a:tailEnd type="none" w="med" len="med"/>
-                    </a:lnB>
-                    <a:solidFill>
-                      <a:schemeClr val="bg1"/>
-                    </a:solidFill>
-                  </a:tcPr>
-                </a:tc>
-                <a:tc>
-                  <a:txBody>
-                    <a:bodyPr/>
-                    <a:lstStyle/>
-                    <a:p>
-                      <a:pPr indent="0" marL="0">
-                        <a:buNone/>
-                      </a:pPr>
-                      <a:r>
-                        <a:rPr lang="en-US" sz="1000" dirty="0">
-                          <a:solidFill>
-                            <a:schemeClr val="tx2"/>
-                          </a:solidFill>
-                        </a:rPr>
-                        <a:t>18,5 M FCFA</a:t>
-                      </a:r>
-                      <a:endParaRPr lang="en-US" sz="1000" dirty="0"/>
-                    </a:p>
-                  </a:txBody>
-                  <a:tcPr marL="128016" marR="128016" marT="54864" marB="54864" anchor="ctr">
-                    <a:lnL w="9525" cap="flat" cmpd="sng" algn="ctr">
-                      <a:solidFill>
-                        <a:srgbClr val="E3EDE6"/>
-                      </a:solidFill>
-                      <a:prstDash val="solid"/>
-                      <a:round/>
-                      <a:headEnd type="none" w="med" len="med"/>
-                      <a:tailEnd type="none" w="med" len="med"/>
-                    </a:lnL>
-                    <a:lnR w="9525" cap="flat" cmpd="sng" algn="ctr">
-                      <a:solidFill>
-                        <a:srgbClr val="E3EDE6"/>
-                      </a:solidFill>
-                      <a:prstDash val="solid"/>
-                      <a:round/>
-                      <a:headEnd type="none" w="med" len="med"/>
-                      <a:tailEnd type="none" w="med" len="med"/>
-                    </a:lnR>
-                    <a:lnT w="9525" cap="flat" cmpd="sng" algn="ctr">
-                      <a:solidFill>
-                        <a:srgbClr val="E3EDE6"/>
-                      </a:solidFill>
-                      <a:prstDash val="solid"/>
-                      <a:round/>
-                      <a:headEnd type="none" w="med" len="med"/>
-                      <a:tailEnd type="none" w="med" len="med"/>
-                    </a:lnT>
-                    <a:lnB w="9525" cap="flat" cmpd="sng" algn="ctr">
-                      <a:solidFill>
-                        <a:srgbClr val="E3EDE6"/>
-                      </a:solidFill>
-                      <a:prstDash val="solid"/>
-                      <a:round/>
-                      <a:headEnd type="none" w="med" len="med"/>
-                      <a:tailEnd type="none" w="med" len="med"/>
-                    </a:lnB>
-                    <a:solidFill>
-                      <a:schemeClr val="bg1"/>
-                    </a:solidFill>
-                  </a:tcPr>
-                </a:tc>
-              </a:tr>
-              <a:tr h="274320">
-                <a:tc>
-                  <a:txBody>
-                    <a:bodyPr/>
-                    <a:lstStyle/>
-                    <a:p>
-                      <a:pPr indent="0" marL="0">
-                        <a:buNone/>
-                      </a:pPr>
-                      <a:r>
-                        <a:rPr lang="en-US" sz="1000" b="1" dirty="0">
-                          <a:solidFill>
-                            <a:schemeClr val="tx1"/>
-                          </a:solidFill>
-                        </a:rPr>
-                        <a:t>Marque B</a:t>
-                      </a:r>
-                      <a:endParaRPr lang="en-US" sz="1000" dirty="0"/>
-                    </a:p>
-                  </a:txBody>
-                  <a:tcPr marL="128016" marR="128016" marT="54864" marB="54864" anchor="ctr">
-                    <a:lnL w="9525" cap="flat" cmpd="sng" algn="ctr">
-                      <a:solidFill>
-                        <a:srgbClr val="E3EDE6"/>
-                      </a:solidFill>
-                      <a:prstDash val="solid"/>
-                      <a:round/>
-                      <a:headEnd type="none" w="med" len="med"/>
-                      <a:tailEnd type="none" w="med" len="med"/>
-                    </a:lnL>
-                    <a:lnR w="9525" cap="flat" cmpd="sng" algn="ctr">
-                      <a:solidFill>
-                        <a:srgbClr val="E3EDE6"/>
-                      </a:solidFill>
-                      <a:prstDash val="solid"/>
-                      <a:round/>
-                      <a:headEnd type="none" w="med" len="med"/>
-                      <a:tailEnd type="none" w="med" len="med"/>
-                    </a:lnR>
-                    <a:lnT w="9525" cap="flat" cmpd="sng" algn="ctr">
-                      <a:solidFill>
-                        <a:srgbClr val="E3EDE6"/>
-                      </a:solidFill>
-                      <a:prstDash val="solid"/>
-                      <a:round/>
-                      <a:headEnd type="none" w="med" len="med"/>
-                      <a:tailEnd type="none" w="med" len="med"/>
-                    </a:lnT>
-                    <a:lnB w="9525" cap="flat" cmpd="sng" algn="ctr">
-                      <a:solidFill>
-                        <a:srgbClr val="E3EDE6"/>
-                      </a:solidFill>
-                      <a:prstDash val="solid"/>
-                      <a:round/>
-                      <a:headEnd type="none" w="med" len="med"/>
-                      <a:tailEnd type="none" w="med" len="med"/>
-                    </a:lnB>
-                    <a:solidFill>
-                      <a:schemeClr val="bg1"/>
-                    </a:solidFill>
-                  </a:tcPr>
-                </a:tc>
-                <a:tc>
-                  <a:txBody>
-                    <a:bodyPr/>
-                    <a:lstStyle/>
-                    <a:p>
-                      <a:pPr indent="0" marL="0">
-                        <a:buNone/>
-                      </a:pPr>
-                      <a:r>
-                        <a:rPr lang="en-US" sz="1000" dirty="0">
-                          <a:solidFill>
-                            <a:schemeClr val="tx2"/>
-                          </a:solidFill>
-                        </a:rPr>
-                        <a:t>31</a:t>
-                      </a:r>
-                      <a:endParaRPr lang="en-US" sz="1000" dirty="0"/>
-                    </a:p>
-                  </a:txBody>
-                  <a:tcPr marL="128016" marR="128016" marT="54864" marB="54864" anchor="ctr">
-                    <a:lnL w="9525" cap="flat" cmpd="sng" algn="ctr">
-                      <a:solidFill>
-                        <a:srgbClr val="E3EDE6"/>
-                      </a:solidFill>
-                      <a:prstDash val="solid"/>
-                      <a:round/>
-                      <a:headEnd type="none" w="med" len="med"/>
-                      <a:tailEnd type="none" w="med" len="med"/>
-                    </a:lnL>
-                    <a:lnR w="9525" cap="flat" cmpd="sng" algn="ctr">
-                      <a:solidFill>
-                        <a:srgbClr val="E3EDE6"/>
-                      </a:solidFill>
-                      <a:prstDash val="solid"/>
-                      <a:round/>
-                      <a:headEnd type="none" w="med" len="med"/>
-                      <a:tailEnd type="none" w="med" len="med"/>
-                    </a:lnR>
-                    <a:lnT w="9525" cap="flat" cmpd="sng" algn="ctr">
-                      <a:solidFill>
-                        <a:srgbClr val="E3EDE6"/>
-                      </a:solidFill>
-                      <a:prstDash val="solid"/>
-                      <a:round/>
-                      <a:headEnd type="none" w="med" len="med"/>
-                      <a:tailEnd type="none" w="med" len="med"/>
-                    </a:lnT>
-                    <a:lnB w="9525" cap="flat" cmpd="sng" algn="ctr">
-                      <a:solidFill>
-                        <a:srgbClr val="E3EDE6"/>
-                      </a:solidFill>
-                      <a:prstDash val="solid"/>
-                      <a:round/>
-                      <a:headEnd type="none" w="med" len="med"/>
-                      <a:tailEnd type="none" w="med" len="med"/>
-                    </a:lnB>
-                    <a:solidFill>
-                      <a:schemeClr val="bg1"/>
-                    </a:solidFill>
-                  </a:tcPr>
-                </a:tc>
-                <a:tc>
-                  <a:txBody>
-                    <a:bodyPr/>
-                    <a:lstStyle/>
-                    <a:p>
-                      <a:pPr indent="0" marL="0">
-                        <a:buNone/>
-                      </a:pPr>
-                      <a:r>
-                        <a:rPr lang="en-US" sz="1000" dirty="0">
-                          <a:solidFill>
-                            <a:schemeClr val="tx2"/>
-                          </a:solidFill>
-                        </a:rPr>
-                        <a:t>4 min 25 s</a:t>
-                      </a:r>
-                      <a:endParaRPr lang="en-US" sz="1000" dirty="0"/>
-                    </a:p>
-                  </a:txBody>
-                  <a:tcPr marL="128016" marR="128016" marT="54864" marB="54864" anchor="ctr">
-                    <a:lnL w="9525" cap="flat" cmpd="sng" algn="ctr">
-                      <a:solidFill>
-                        <a:srgbClr val="E3EDE6"/>
-                      </a:solidFill>
-                      <a:prstDash val="solid"/>
-                      <a:round/>
-                      <a:headEnd type="none" w="med" len="med"/>
-                      <a:tailEnd type="none" w="med" len="med"/>
-                    </a:lnL>
-                    <a:lnR w="9525" cap="flat" cmpd="sng" algn="ctr">
-                      <a:solidFill>
-                        <a:srgbClr val="E3EDE6"/>
-                      </a:solidFill>
-                      <a:prstDash val="solid"/>
-                      <a:round/>
-                      <a:headEnd type="none" w="med" len="med"/>
-                      <a:tailEnd type="none" w="med" len="med"/>
-                    </a:lnR>
-                    <a:lnT w="9525" cap="flat" cmpd="sng" algn="ctr">
-                      <a:solidFill>
-                        <a:srgbClr val="E3EDE6"/>
-                      </a:solidFill>
-                      <a:prstDash val="solid"/>
-                      <a:round/>
-                      <a:headEnd type="none" w="med" len="med"/>
-                      <a:tailEnd type="none" w="med" len="med"/>
-                    </a:lnT>
-                    <a:lnB w="9525" cap="flat" cmpd="sng" algn="ctr">
-                      <a:solidFill>
-                        <a:srgbClr val="E3EDE6"/>
-                      </a:solidFill>
-                      <a:prstDash val="solid"/>
-                      <a:round/>
-                      <a:headEnd type="none" w="med" len="med"/>
-                      <a:tailEnd type="none" w="med" len="med"/>
-                    </a:lnB>
-                    <a:solidFill>
-                      <a:schemeClr val="bg1"/>
-                    </a:solidFill>
-                  </a:tcPr>
-                </a:tc>
-                <a:tc>
-                  <a:txBody>
-                    <a:bodyPr/>
-                    <a:lstStyle/>
-                    <a:p>
-                      <a:pPr indent="0" marL="0">
-                        <a:buNone/>
-                      </a:pPr>
-                      <a:r>
-                        <a:rPr lang="en-US" sz="1000" dirty="0">
-                          <a:solidFill>
-                            <a:schemeClr val="tx2"/>
-                          </a:solidFill>
-                        </a:rPr>
-                        <a:t>12,7 M FCFA</a:t>
-                      </a:r>
-                      <a:endParaRPr lang="en-US" sz="1000" dirty="0"/>
-                    </a:p>
-                  </a:txBody>
-                  <a:tcPr marL="128016" marR="128016" marT="54864" marB="54864" anchor="ctr">
-                    <a:lnL w="9525" cap="flat" cmpd="sng" algn="ctr">
-                      <a:solidFill>
-                        <a:srgbClr val="E3EDE6"/>
-                      </a:solidFill>
-                      <a:prstDash val="solid"/>
-                      <a:round/>
-                      <a:headEnd type="none" w="med" len="med"/>
-                      <a:tailEnd type="none" w="med" len="med"/>
-                    </a:lnL>
-                    <a:lnR w="9525" cap="flat" cmpd="sng" algn="ctr">
-                      <a:solidFill>
-                        <a:srgbClr val="E3EDE6"/>
-                      </a:solidFill>
-                      <a:prstDash val="solid"/>
-                      <a:round/>
-                      <a:headEnd type="none" w="med" len="med"/>
-                      <a:tailEnd type="none" w="med" len="med"/>
-                    </a:lnR>
-                    <a:lnT w="9525" cap="flat" cmpd="sng" algn="ctr">
-                      <a:solidFill>
-                        <a:srgbClr val="E3EDE6"/>
-                      </a:solidFill>
-                      <a:prstDash val="solid"/>
-                      <a:round/>
-                      <a:headEnd type="none" w="med" len="med"/>
-                      <a:tailEnd type="none" w="med" len="med"/>
-                    </a:lnT>
-                    <a:lnB w="9525" cap="flat" cmpd="sng" algn="ctr">
-                      <a:solidFill>
-                        <a:srgbClr val="E3EDE6"/>
-                      </a:solidFill>
-                      <a:prstDash val="solid"/>
-                      <a:round/>
-                      <a:headEnd type="none" w="med" len="med"/>
-                      <a:tailEnd type="none" w="med" len="med"/>
-                    </a:lnB>
-                    <a:solidFill>
-                      <a:schemeClr val="bg1"/>
-                    </a:solidFill>
-                  </a:tcPr>
-                </a:tc>
-              </a:tr>
-              <a:tr h="274320">
-                <a:tc>
-                  <a:txBody>
-                    <a:bodyPr/>
-                    <a:lstStyle/>
-                    <a:p>
-                      <a:pPr indent="0" marL="0">
-                        <a:buNone/>
-                      </a:pPr>
-                      <a:r>
-                        <a:rPr lang="en-US" sz="1000" b="1" dirty="0">
-                          <a:solidFill>
-                            <a:schemeClr val="tx1"/>
-                          </a:solidFill>
-                        </a:rPr>
-                        <a:t>Marque C</a:t>
-                      </a:r>
-                      <a:endParaRPr lang="en-US" sz="1000" dirty="0"/>
-                    </a:p>
-                  </a:txBody>
-                  <a:tcPr marL="128016" marR="128016" marT="54864" marB="54864" anchor="ctr">
-                    <a:lnL w="9525" cap="flat" cmpd="sng" algn="ctr">
-                      <a:solidFill>
-                        <a:srgbClr val="E3EDE6"/>
-                      </a:solidFill>
-                      <a:prstDash val="solid"/>
-                      <a:round/>
-                      <a:headEnd type="none" w="med" len="med"/>
-                      <a:tailEnd type="none" w="med" len="med"/>
-                    </a:lnL>
-                    <a:lnR w="9525" cap="flat" cmpd="sng" algn="ctr">
-                      <a:solidFill>
-                        <a:srgbClr val="E3EDE6"/>
-                      </a:solidFill>
-                      <a:prstDash val="solid"/>
-                      <a:round/>
-                      <a:headEnd type="none" w="med" len="med"/>
-                      <a:tailEnd type="none" w="med" len="med"/>
-                    </a:lnR>
-                    <a:lnT w="9525" cap="flat" cmpd="sng" algn="ctr">
-                      <a:solidFill>
-                        <a:srgbClr val="E3EDE6"/>
-                      </a:solidFill>
-                      <a:prstDash val="solid"/>
-                      <a:round/>
-                      <a:headEnd type="none" w="med" len="med"/>
-                      <a:tailEnd type="none" w="med" len="med"/>
-                    </a:lnT>
-                    <a:lnB w="9525" cap="flat" cmpd="sng" algn="ctr">
-                      <a:solidFill>
-                        <a:srgbClr val="E3EDE6"/>
-                      </a:solidFill>
-                      <a:prstDash val="solid"/>
-                      <a:round/>
-                      <a:headEnd type="none" w="med" len="med"/>
-                      <a:tailEnd type="none" w="med" len="med"/>
-                    </a:lnB>
-                    <a:solidFill>
-                      <a:schemeClr val="bg1"/>
-                    </a:solidFill>
-                  </a:tcPr>
-                </a:tc>
-                <a:tc>
-                  <a:txBody>
-                    <a:bodyPr/>
-                    <a:lstStyle/>
-                    <a:p>
-                      <a:pPr indent="0" marL="0">
-                        <a:buNone/>
-                      </a:pPr>
-                      <a:r>
-                        <a:rPr lang="en-US" sz="1000" dirty="0">
-                          <a:solidFill>
-                            <a:schemeClr val="tx2"/>
-                          </a:solidFill>
-                        </a:rPr>
-                        <a:t>18</a:t>
-                      </a:r>
-                      <a:endParaRPr lang="en-US" sz="1000" dirty="0"/>
-                    </a:p>
-                  </a:txBody>
-                  <a:tcPr marL="128016" marR="128016" marT="54864" marB="54864" anchor="ctr">
-                    <a:lnL w="9525" cap="flat" cmpd="sng" algn="ctr">
-                      <a:solidFill>
-                        <a:srgbClr val="E3EDE6"/>
-                      </a:solidFill>
-                      <a:prstDash val="solid"/>
-                      <a:round/>
-                      <a:headEnd type="none" w="med" len="med"/>
-                      <a:tailEnd type="none" w="med" len="med"/>
-                    </a:lnL>
-                    <a:lnR w="9525" cap="flat" cmpd="sng" algn="ctr">
-                      <a:solidFill>
-                        <a:srgbClr val="E3EDE6"/>
-                      </a:solidFill>
-                      <a:prstDash val="solid"/>
-                      <a:round/>
-                      <a:headEnd type="none" w="med" len="med"/>
-                      <a:tailEnd type="none" w="med" len="med"/>
-                    </a:lnR>
-                    <a:lnT w="9525" cap="flat" cmpd="sng" algn="ctr">
-                      <a:solidFill>
-                        <a:srgbClr val="E3EDE6"/>
-                      </a:solidFill>
-                      <a:prstDash val="solid"/>
-                      <a:round/>
-                      <a:headEnd type="none" w="med" len="med"/>
-                      <a:tailEnd type="none" w="med" len="med"/>
-                    </a:lnT>
-                    <a:lnB w="9525" cap="flat" cmpd="sng" algn="ctr">
-                      <a:solidFill>
-                        <a:srgbClr val="E3EDE6"/>
-                      </a:solidFill>
-                      <a:prstDash val="solid"/>
-                      <a:round/>
-                      <a:headEnd type="none" w="med" len="med"/>
-                      <a:tailEnd type="none" w="med" len="med"/>
-                    </a:lnB>
-                    <a:solidFill>
-                      <a:schemeClr val="bg1"/>
-                    </a:solidFill>
-                  </a:tcPr>
-                </a:tc>
-                <a:tc>
-                  <a:txBody>
-                    <a:bodyPr/>
-                    <a:lstStyle/>
-                    <a:p>
-                      <a:pPr indent="0" marL="0">
-                        <a:buNone/>
-                      </a:pPr>
-                      <a:r>
-                        <a:rPr lang="en-US" sz="1000" dirty="0">
-                          <a:solidFill>
-                            <a:schemeClr val="tx2"/>
-                          </a:solidFill>
-                        </a:rPr>
-                        <a:t>2 min 40 s</a:t>
-                      </a:r>
-                      <a:endParaRPr lang="en-US" sz="1000" dirty="0"/>
-                    </a:p>
-                  </a:txBody>
-                  <a:tcPr marL="128016" marR="128016" marT="54864" marB="54864" anchor="ctr">
-                    <a:lnL w="9525" cap="flat" cmpd="sng" algn="ctr">
-                      <a:solidFill>
-                        <a:srgbClr val="E3EDE6"/>
-                      </a:solidFill>
-                      <a:prstDash val="solid"/>
-                      <a:round/>
-                      <a:headEnd type="none" w="med" len="med"/>
-                      <a:tailEnd type="none" w="med" len="med"/>
-                    </a:lnL>
-                    <a:lnR w="9525" cap="flat" cmpd="sng" algn="ctr">
-                      <a:solidFill>
-                        <a:srgbClr val="E3EDE6"/>
-                      </a:solidFill>
-                      <a:prstDash val="solid"/>
-                      <a:round/>
-                      <a:headEnd type="none" w="med" len="med"/>
-                      <a:tailEnd type="none" w="med" len="med"/>
-                    </a:lnR>
-                    <a:lnT w="9525" cap="flat" cmpd="sng" algn="ctr">
-                      <a:solidFill>
-                        <a:srgbClr val="E3EDE6"/>
-                      </a:solidFill>
-                      <a:prstDash val="solid"/>
-                      <a:round/>
-                      <a:headEnd type="none" w="med" len="med"/>
-                      <a:tailEnd type="none" w="med" len="med"/>
-                    </a:lnT>
-                    <a:lnB w="9525" cap="flat" cmpd="sng" algn="ctr">
-                      <a:solidFill>
-                        <a:srgbClr val="E3EDE6"/>
-                      </a:solidFill>
-                      <a:prstDash val="solid"/>
-                      <a:round/>
-                      <a:headEnd type="none" w="med" len="med"/>
-                      <a:tailEnd type="none" w="med" len="med"/>
-                    </a:lnB>
-                    <a:solidFill>
-                      <a:schemeClr val="bg1"/>
-                    </a:solidFill>
-                  </a:tcPr>
-                </a:tc>
-                <a:tc>
-                  <a:txBody>
-                    <a:bodyPr/>
-                    <a:lstStyle/>
-                    <a:p>
-                      <a:pPr indent="0" marL="0">
-                        <a:buNone/>
-                      </a:pPr>
-                      <a:r>
-                        <a:rPr lang="en-US" sz="1000" dirty="0">
-                          <a:solidFill>
-                            <a:schemeClr val="tx2"/>
-                          </a:solidFill>
-                        </a:rPr>
-                        <a:t>7,3 M FCFA</a:t>
-                      </a:r>
-                      <a:endParaRPr lang="en-US" sz="1000" dirty="0"/>
-                    </a:p>
-                  </a:txBody>
-                  <a:tcPr marL="128016" marR="128016" marT="54864" marB="54864" anchor="ctr">
-                    <a:lnL w="9525" cap="flat" cmpd="sng" algn="ctr">
-                      <a:solidFill>
-                        <a:srgbClr val="E3EDE6"/>
-                      </a:solidFill>
-                      <a:prstDash val="solid"/>
-                      <a:round/>
-                      <a:headEnd type="none" w="med" len="med"/>
-                      <a:tailEnd type="none" w="med" len="med"/>
-                    </a:lnL>
-                    <a:lnR w="9525" cap="flat" cmpd="sng" algn="ctr">
-                      <a:solidFill>
-                        <a:srgbClr val="E3EDE6"/>
-                      </a:solidFill>
-                      <a:prstDash val="solid"/>
-                      <a:round/>
-                      <a:headEnd type="none" w="med" len="med"/>
-                      <a:tailEnd type="none" w="med" len="med"/>
-                    </a:lnR>
-                    <a:lnT w="9525" cap="flat" cmpd="sng" algn="ctr">
-                      <a:solidFill>
-                        <a:srgbClr val="E3EDE6"/>
-                      </a:solidFill>
-                      <a:prstDash val="solid"/>
-                      <a:round/>
-                      <a:headEnd type="none" w="med" len="med"/>
-                      <a:tailEnd type="none" w="med" len="med"/>
-                    </a:lnT>
-                    <a:lnB w="9525" cap="flat" cmpd="sng" algn="ctr">
-                      <a:solidFill>
-                        <a:srgbClr val="E3EDE6"/>
-                      </a:solidFill>
-                      <a:prstDash val="solid"/>
-                      <a:round/>
-                      <a:headEnd type="none" w="med" len="med"/>
-                      <a:tailEnd type="none" w="med" len="med"/>
-                    </a:lnB>
-                    <a:solidFill>
-                      <a:schemeClr val="bg1"/>
-                    </a:solidFill>
-                  </a:tcPr>
-                </a:tc>
-              </a:tr>
-            </a:tbl>
-          </a:graphicData>
-        </a:graphic>
-      </p:graphicFrame>
-      <p:sp>
-        <p:nvSpPr>
-          <p:cNvPr id="28" name="Text 20"/>
-          <p:cNvSpPr txBox="1"/>
-          <p:nvPr/>
-        </p:nvSpPr>
-        <p:spPr>
-          <a:xfrm>
-            <a:off x="822960" y="5925312"/>
-            <a:ext cx="3657600" cy="219456"/>
-          </a:xfrm>
-          <a:prstGeom prst="rect">
-            <a:avLst/>
-          </a:prstGeom>
-          <a:noFill/>
-          <a:ln/>
-        </p:spPr>
-        <p:txBody>
-          <a:bodyPr wrap="square" lIns="0" tIns="0" rIns="0" bIns="0" rtlCol="0" anchor="t"/>
-          <a:lstStyle/>
-          <a:p>
-            <a:pPr indent="0" marL="0">
-              <a:buNone/>
-            </a:pPr>
-            <a:r>
-              <a:rPr lang="fr-FR" altLang="en-US" sz="1000" b="1" i="1" dirty="0">
-                <a:solidFill>
-                  <a:schemeClr val="accent3"/>
-                </a:solidFill>
-              </a:rPr>
-              <a:t>Exemple de mise en page. Chiffres fictifs.</a:t>
-            </a:r>
-            <a:endParaRPr lang="fr-FR" sz="1000" dirty="0"/>
-          </a:p>
-        </p:txBody>
-      </p:sp>
-      <p:sp>
-        <p:nvSpPr>
-          <p:cNvPr id="29" name="Text 21"/>
-          <p:cNvSpPr txBox="1"/>
-          <p:nvPr/>
-        </p:nvSpPr>
-        <p:spPr>
-          <a:xfrm>
-            <a:off x="9539935" y="5925312"/>
-            <a:ext cx="1828800" cy="219456"/>
-          </a:xfrm>
-          <a:prstGeom prst="rect">
-            <a:avLst/>
-          </a:prstGeom>
-          <a:noFill/>
-          <a:ln/>
-        </p:spPr>
-        <p:txBody>
-          <a:bodyPr wrap="square" lIns="0" tIns="0" rIns="0" bIns="0" rtlCol="0" anchor="t"/>
-          <a:lstStyle/>
-          <a:p>
-            <a:pPr algn="r" indent="0" marL="0">
-              <a:buNone/>
-            </a:pPr>
-            <a:r>
-              <a:rPr lang="fr-FR" altLang="en-US" sz="1000" b="1" u="sng" dirty="0">
-                <a:solidFill>
-                  <a:schemeClr val="accent3"/>
-                </a:solidFill>
-                <a:hlinkClick r:id="rId4" action="ppaction://hlinksldjump" tooltip="Retour au rapport">
-                  <a:extLst>
-                    <a:ext uri="{A12FA001-AC4F-418D-AE19-62706E023703}">
-                      <ahyp:hlinkClr xmlns:ahyp="http://schemas.microsoft.com/office/drawing/2018/hyperlinkcolor" val="tx"/>
-                    </a:ext>
-                  </a:extLst>
-                </a:hlinkClick>
-              </a:rPr>
-              <a:t>←  Retour à la page 1</a:t>
-            </a:r>
-            <a:endParaRPr lang="fr-FR" sz="1000" dirty="0"/>
-          </a:p>
-        </p:txBody>
-      </p:sp>
-      <p:sp>
-        <p:nvSpPr>
-          <p:cNvPr id="25" name="Slide Number Placeholder 0"/>
-          <p:cNvSpPr>
-            <a:spLocks noGrp="1"/>
-          </p:cNvSpPr>
-          <p:nvPr>
-            <p:ph type="sldNum" sz="quarter" idx="4294967295"/>
-          </p:nvPr>
-        </p:nvSpPr>
-        <p:spPr>
-          <a:xfrm>
-            <a:off x="11094415" y="6437376"/>
-            <a:ext cx="548640" cy="237744"/>
-          </a:xfrm>
-          <a:prstGeom prst="rect">
-            <a:avLst/>
-          </a:prstGeom>
-          <a:extLst>
-            <a:ext uri="{C572A759-6A51-4108-AA02-DFA0A04FC94B}">
-              <ma14:wrappingTextBoxFlag xmlns:ma14="http://schemas.microsoft.com/office/mac/drawingml/2011/main" val="0"/>
-            </a:ext>
-          </a:extLst>
-        </p:spPr>
-        <p:txBody>
-          <a:bodyPr lIns="0" tIns="0" rIns="0" bIns="0"/>
-          <a:lstStyle>
-            <a:lvl1pPr>
-              <a:defRPr sz="1000">
-                <a:solidFill>
-                  <a:schemeClr val="tx2"/>
-                </a:solidFill>
-              </a:defRPr>
-            </a:lvl1pPr>
-          </a:lstStyle>
-          <a:p>
-            <a:pPr algn="r"/>
-            <a:fld id="{F7021451-1387-4CA6-816F-3879F97B5CBC}" type="slidenum">
-              <a:rPr b="0" lang="en-US"/>
-              <a:t>12</a:t>
-            </a:fld>
-            <a:endParaRPr lang="en-US"/>
-          </a:p>
-        </p:txBody>
-      </p:sp>
     </p:spTree>
   </p:cSld>
   <p:clrMapOvr>
@@ -9694,7 +5010,7 @@
                   <a:schemeClr val="tx1"/>
                 </a:solidFill>
               </a:rPr>
-              <a:t>Après quatre éditions, ce qui fonctionne déjà</a:t>
+              <a:t>Après 4 éditions, le modèle économique fonctionne déjà</a:t>
             </a:r>
             <a:endParaRPr lang="fr-FR" sz="3800" dirty="0"/>
           </a:p>
@@ -17986,7 +13302,7 @@
                 <a:ea typeface="+mj-lt" pitchFamily="34" charset="-122"/>
                 <a:cs typeface="+mj-lt" pitchFamily="34" charset="-120"/>
               </a:rPr>
-              <a:t>Point hebdomadaire</a:t>
+              <a:t>Suivi dès la première publication</a:t>
             </a:r>
             <a:endParaRPr lang="fr-FR" sz="2200" dirty="0"/>
           </a:p>
@@ -18022,7 +13338,7 @@
                   <a:schemeClr val="accent3"/>
                 </a:solidFill>
               </a:rPr>
-              <a:t>CHAQUE LUNDI AVANT LE FESTIVAL</a:t>
+              <a:t>AVANT LE FESTIVAL</a:t>
             </a:r>
             <a:endParaRPr lang="fr-FR" sz="1100" dirty="0"/>
           </a:p>
@@ -18058,7 +13374,7 @@
                   <a:schemeClr val="tx2"/>
                 </a:solidFill>
               </a:rPr>
-              <a:t>Une page : publications, vues, meilleurs créateurs, liens utilisés et ajustements.</a:t>
+              <a:t>Chaque publication avant le festival est suivie : le rapport couvre aussi les semaines d’avant.</a:t>
             </a:r>
             <a:endParaRPr lang="fr-FR" sz="1400" dirty="0"/>
           </a:p>
@@ -18376,41 +13692,72 @@
       </p:sp>
       <p:sp>
         <p:nvSpPr>
-          <p:cNvPr id="23" name="Shape 15"/>
+          <p:cNvPr id="23" name="Text 15"/>
+          <p:cNvSpPr txBox="1"/>
+          <p:nvPr/>
+        </p:nvSpPr>
+        <p:spPr>
+          <a:xfrm>
+            <a:off x="1371600" y="5596128"/>
+            <a:ext cx="5120640" cy="457200"/>
+          </a:xfrm>
+          <a:prstGeom prst="rect">
+            <a:avLst/>
+          </a:prstGeom>
+          <a:noFill/>
+          <a:ln/>
+        </p:spPr>
+        <p:txBody>
+          <a:bodyPr wrap="square" lIns="0" tIns="0" rIns="0" bIns="0" rtlCol="0" anchor="t"/>
+          <a:lstStyle/>
+          <a:p>
+            <a:pPr indent="0" marL="0">
+              <a:buNone/>
+            </a:pPr>
+            <a:r>
+              <a:rPr lang="fr-FR" altLang="en-US" sz="1200" b="1" dirty="0">
+                <a:solidFill>
+                  <a:schemeClr val="accent3"/>
+                </a:solidFill>
+              </a:rPr>
+              <a:t>Le rapport complet compte plusieurs pages : chaque créateur, chaque publication, les publics et une page par sponsor.</a:t>
+            </a:r>
+            <a:endParaRPr lang="fr-FR" sz="1200" dirty="0"/>
+          </a:p>
+        </p:txBody>
+      </p:sp>
+      <p:sp>
+        <p:nvSpPr>
+          <p:cNvPr id="24" name="Shape 16"/>
           <p:cNvSpPr/>
           <p:nvPr/>
         </p:nvSpPr>
         <p:spPr>
           <a:xfrm>
-            <a:off x="1371600" y="5833872"/>
-            <a:ext cx="4114800" cy="384048"/>
+            <a:off x="6812280" y="1737360"/>
+            <a:ext cx="4690872" cy="365760"/>
           </a:xfrm>
           <a:prstGeom prst="roundRect">
             <a:avLst>
-              <a:gd name="adj" fmla="val 50000"/>
+              <a:gd name="adj" fmla="val 15000"/>
             </a:avLst>
           </a:prstGeom>
           <a:solidFill>
-            <a:schemeClr val="bg1"/>
+            <a:schemeClr val="accent2"/>
           </a:solidFill>
-          <a:ln w="12700">
-            <a:solidFill>
-              <a:schemeClr val="accent3"/>
-            </a:solidFill>
-            <a:prstDash val="solid"/>
-          </a:ln>
-        </p:spPr>
-      </p:sp>
-      <p:sp>
-        <p:nvSpPr>
-          <p:cNvPr id="24" name="Text 16"/>
-          <p:cNvSpPr txBox="1"/>
-          <p:nvPr/>
-        </p:nvSpPr>
-        <p:spPr>
-          <a:xfrm>
-            <a:off x="1371600" y="5833872"/>
-            <a:ext cx="4114800" cy="384048"/>
+          <a:ln/>
+        </p:spPr>
+      </p:sp>
+      <p:sp>
+        <p:nvSpPr>
+          <p:cNvPr id="25" name="Text 17"/>
+          <p:cNvSpPr txBox="1"/>
+          <p:nvPr/>
+        </p:nvSpPr>
+        <p:spPr>
+          <a:xfrm>
+            <a:off x="6812280" y="1737360"/>
+            <a:ext cx="4690872" cy="365760"/>
           </a:xfrm>
           <a:prstGeom prst="rect">
             <a:avLst/>
@@ -18426,38 +13773,31 @@
               <a:buNone/>
             </a:pPr>
             <a:r>
-              <a:rPr lang="fr-FR" altLang="en-US" sz="1200" b="1" u="sng" dirty="0">
-                <a:solidFill>
-                  <a:schemeClr val="accent3"/>
-                </a:solidFill>
-                <a:hlinkClick r:id="rId6" action="ppaction://hlinksldjump" tooltip="Exemple de rapport, page 2">
-                  <a:extLst>
-                    <a:ext uri="{A12FA001-AC4F-418D-AE19-62706E023703}">
-                      <ahyp:hlinkClr xmlns:ahyp="http://schemas.microsoft.com/office/drawing/2018/hyperlinkcolor" val="tx"/>
-                    </a:ext>
-                  </a:extLst>
-                </a:hlinkClick>
-              </a:rPr>
-              <a:t>Voir la page 2 : le détail complet  →</a:t>
-            </a:r>
-            <a:endParaRPr lang="fr-FR" sz="1200" dirty="0"/>
-          </a:p>
-        </p:txBody>
-      </p:sp>
-      <p:sp>
-        <p:nvSpPr>
-          <p:cNvPr id="25" name="Sample report page 2"/>
+              <a:rPr lang="fr-FR" altLang="en-US" sz="1000" b="1" spc="100" kern="0" dirty="0">
+                <a:solidFill>
+                  <a:schemeClr val="tx1"/>
+                </a:solidFill>
+              </a:rPr>
+              <a:t>EXEMPLE DE MISE EN PAGE  ·  CHIFFRES FICTIFS</a:t>
+            </a:r>
+            <a:endParaRPr lang="fr-FR" sz="1000" dirty="0"/>
+          </a:p>
+        </p:txBody>
+      </p:sp>
+      <p:sp>
+        <p:nvSpPr>
+          <p:cNvPr id="26" name="Sample report page 2"/>
           <p:cNvSpPr/>
           <p:nvPr/>
         </p:nvSpPr>
         <p:spPr>
           <a:xfrm>
-            <a:off x="6949440" y="1874520"/>
-            <a:ext cx="4690872" cy="4343400"/>
+            <a:off x="6922008" y="2322576"/>
+            <a:ext cx="4690872" cy="3931920"/>
           </a:xfrm>
           <a:prstGeom prst="roundRect">
             <a:avLst>
-              <a:gd name="adj" fmla="val 1684"/>
+              <a:gd name="adj" fmla="val 1860"/>
             </a:avLst>
           </a:prstGeom>
           <a:solidFill>
@@ -18475,18 +13815,18 @@
       </p:sp>
       <p:sp>
         <p:nvSpPr>
-          <p:cNvPr id="26" name="Shape 18"/>
+          <p:cNvPr id="27" name="Shape 19"/>
           <p:cNvSpPr/>
           <p:nvPr/>
         </p:nvSpPr>
         <p:spPr>
           <a:xfrm>
-            <a:off x="6812280" y="1737360"/>
-            <a:ext cx="4690872" cy="4343400"/>
+            <a:off x="6812280" y="2212848"/>
+            <a:ext cx="4690872" cy="3931920"/>
           </a:xfrm>
           <a:prstGeom prst="roundRect">
             <a:avLst>
-              <a:gd name="adj" fmla="val 1684"/>
+              <a:gd name="adj" fmla="val 1860"/>
             </a:avLst>
           </a:prstGeom>
           <a:solidFill>
@@ -18511,13 +13851,13 @@
       </p:sp>
       <p:sp>
         <p:nvSpPr>
-          <p:cNvPr id="27" name="Text 19"/>
-          <p:cNvSpPr txBox="1"/>
-          <p:nvPr/>
-        </p:nvSpPr>
-        <p:spPr>
-          <a:xfrm>
-            <a:off x="7086600" y="1965960"/>
+          <p:cNvPr id="28" name="Text 20"/>
+          <p:cNvSpPr txBox="1"/>
+          <p:nvPr/>
+        </p:nvSpPr>
+        <p:spPr>
+          <a:xfrm>
+            <a:off x="7086600" y="2414016"/>
             <a:ext cx="3291840" cy="201168"/>
           </a:xfrm>
           <a:prstGeom prst="rect">
@@ -18547,13 +13887,13 @@
       </p:sp>
       <p:sp>
         <p:nvSpPr>
-          <p:cNvPr id="28" name="Text 20"/>
-          <p:cNvSpPr txBox="1"/>
-          <p:nvPr/>
-        </p:nvSpPr>
-        <p:spPr>
-          <a:xfrm>
-            <a:off x="7086600" y="2167128"/>
+          <p:cNvPr id="29" name="Text 21"/>
+          <p:cNvSpPr txBox="1"/>
+          <p:nvPr/>
+        </p:nvSpPr>
+        <p:spPr>
+          <a:xfrm>
+            <a:off x="7086600" y="2596896"/>
             <a:ext cx="3657600" cy="365760"/>
           </a:xfrm>
           <a:prstGeom prst="rect">
@@ -18586,21 +13926,21 @@
       </p:sp>
       <p:pic>
         <p:nvPicPr>
-          <p:cNvPr id="29" name="Image 5" descr="Mother Africa Festival">    </p:cNvPr>
+          <p:cNvPr id="30" name="Image 5" descr="Mother Africa Festival">    </p:cNvPr>
           <p:cNvPicPr>
             <a:picLocks noChangeAspect="1"/>
           </p:cNvPicPr>
           <p:nvPr/>
         </p:nvPicPr>
         <p:blipFill>
-          <a:blip r:embed="rId7"/>
+          <a:blip r:embed="rId6"/>
           <a:stretch>
             <a:fillRect/>
           </a:stretch>
         </p:blipFill>
         <p:spPr>
           <a:xfrm>
-            <a:off x="10725912" y="1965960"/>
+            <a:off x="10725912" y="2395728"/>
             <a:ext cx="541249" cy="384048"/>
           </a:xfrm>
           <a:prstGeom prst="rect">
@@ -18610,13 +13950,13 @@
       </p:pic>
       <p:sp>
         <p:nvSpPr>
-          <p:cNvPr id="30" name="Shape 21"/>
+          <p:cNvPr id="31" name="Shape 22"/>
           <p:cNvSpPr/>
           <p:nvPr/>
         </p:nvSpPr>
         <p:spPr>
           <a:xfrm>
-            <a:off x="7086600" y="2606040"/>
+            <a:off x="7086600" y="3017520"/>
             <a:ext cx="4142232" cy="0"/>
           </a:xfrm>
           <a:prstGeom prst="line">
@@ -18633,18 +13973,18 @@
       </p:sp>
       <p:sp>
         <p:nvSpPr>
-          <p:cNvPr id="31" name="Shape 22"/>
+          <p:cNvPr id="32" name="Shape 23"/>
           <p:cNvSpPr/>
           <p:nvPr/>
         </p:nvSpPr>
         <p:spPr>
           <a:xfrm>
-            <a:off x="7086600" y="2788920"/>
-            <a:ext cx="2011680" cy="731520"/>
+            <a:off x="7086600" y="3145536"/>
+            <a:ext cx="2011680" cy="713232"/>
           </a:xfrm>
           <a:prstGeom prst="roundRect">
             <a:avLst>
-              <a:gd name="adj" fmla="val 7500"/>
+              <a:gd name="adj" fmla="val 7692"/>
             </a:avLst>
           </a:prstGeom>
           <a:solidFill>
@@ -18655,13 +13995,13 @@
       </p:sp>
       <p:sp>
         <p:nvSpPr>
-          <p:cNvPr id="32" name="Text 23"/>
-          <p:cNvSpPr txBox="1"/>
-          <p:nvPr/>
-        </p:nvSpPr>
-        <p:spPr>
-          <a:xfrm>
-            <a:off x="7251192" y="2862072"/>
+          <p:cNvPr id="33" name="Text 24"/>
+          <p:cNvSpPr txBox="1"/>
+          <p:nvPr/>
+        </p:nvSpPr>
+        <p:spPr>
+          <a:xfrm>
+            <a:off x="7251192" y="3209544"/>
             <a:ext cx="1737360" cy="347472"/>
           </a:xfrm>
           <a:prstGeom prst="rect">
@@ -18691,13 +14031,13 @@
       </p:sp>
       <p:sp>
         <p:nvSpPr>
-          <p:cNvPr id="33" name="Text 24"/>
-          <p:cNvSpPr txBox="1"/>
-          <p:nvPr/>
-        </p:nvSpPr>
-        <p:spPr>
-          <a:xfrm>
-            <a:off x="7251192" y="3227832"/>
+          <p:cNvPr id="34" name="Text 25"/>
+          <p:cNvSpPr txBox="1"/>
+          <p:nvPr/>
+        </p:nvSpPr>
+        <p:spPr>
+          <a:xfrm>
+            <a:off x="7251192" y="3566160"/>
             <a:ext cx="1783080" cy="201168"/>
           </a:xfrm>
           <a:prstGeom prst="rect">
@@ -18727,18 +14067,18 @@
       </p:sp>
       <p:sp>
         <p:nvSpPr>
-          <p:cNvPr id="34" name="Shape 25"/>
+          <p:cNvPr id="35" name="Shape 26"/>
           <p:cNvSpPr/>
           <p:nvPr/>
         </p:nvSpPr>
         <p:spPr>
           <a:xfrm>
-            <a:off x="9208008" y="2788920"/>
-            <a:ext cx="2011680" cy="731520"/>
+            <a:off x="9208008" y="3145536"/>
+            <a:ext cx="2011680" cy="713232"/>
           </a:xfrm>
           <a:prstGeom prst="roundRect">
             <a:avLst>
-              <a:gd name="adj" fmla="val 7500"/>
+              <a:gd name="adj" fmla="val 7692"/>
             </a:avLst>
           </a:prstGeom>
           <a:solidFill>
@@ -18749,13 +14089,13 @@
       </p:sp>
       <p:sp>
         <p:nvSpPr>
-          <p:cNvPr id="35" name="Text 26"/>
-          <p:cNvSpPr txBox="1"/>
-          <p:nvPr/>
-        </p:nvSpPr>
-        <p:spPr>
-          <a:xfrm>
-            <a:off x="9372600" y="2862072"/>
+          <p:cNvPr id="36" name="Text 27"/>
+          <p:cNvSpPr txBox="1"/>
+          <p:nvPr/>
+        </p:nvSpPr>
+        <p:spPr>
+          <a:xfrm>
+            <a:off x="9372600" y="3209544"/>
             <a:ext cx="1737360" cy="347472"/>
           </a:xfrm>
           <a:prstGeom prst="rect">
@@ -18785,13 +14125,13 @@
       </p:sp>
       <p:sp>
         <p:nvSpPr>
-          <p:cNvPr id="36" name="Text 27"/>
-          <p:cNvSpPr txBox="1"/>
-          <p:nvPr/>
-        </p:nvSpPr>
-        <p:spPr>
-          <a:xfrm>
-            <a:off x="9372600" y="3227832"/>
+          <p:cNvPr id="37" name="Text 28"/>
+          <p:cNvSpPr txBox="1"/>
+          <p:nvPr/>
+        </p:nvSpPr>
+        <p:spPr>
+          <a:xfrm>
+            <a:off x="9372600" y="3566160"/>
             <a:ext cx="1783080" cy="201168"/>
           </a:xfrm>
           <a:prstGeom prst="rect">
@@ -18821,18 +14161,18 @@
       </p:sp>
       <p:sp>
         <p:nvSpPr>
-          <p:cNvPr id="37" name="Shape 28"/>
+          <p:cNvPr id="38" name="Shape 29"/>
           <p:cNvSpPr/>
           <p:nvPr/>
         </p:nvSpPr>
         <p:spPr>
           <a:xfrm>
-            <a:off x="7086600" y="3657600"/>
-            <a:ext cx="2011680" cy="731520"/>
+            <a:off x="7086600" y="3950208"/>
+            <a:ext cx="2011680" cy="713232"/>
           </a:xfrm>
           <a:prstGeom prst="roundRect">
             <a:avLst>
-              <a:gd name="adj" fmla="val 7500"/>
+              <a:gd name="adj" fmla="val 7692"/>
             </a:avLst>
           </a:prstGeom>
           <a:solidFill>
@@ -18843,13 +14183,13 @@
       </p:sp>
       <p:sp>
         <p:nvSpPr>
-          <p:cNvPr id="38" name="Text 29"/>
-          <p:cNvSpPr txBox="1"/>
-          <p:nvPr/>
-        </p:nvSpPr>
-        <p:spPr>
-          <a:xfrm>
-            <a:off x="7251192" y="3730752"/>
+          <p:cNvPr id="39" name="Text 30"/>
+          <p:cNvSpPr txBox="1"/>
+          <p:nvPr/>
+        </p:nvSpPr>
+        <p:spPr>
+          <a:xfrm>
+            <a:off x="7251192" y="4014216"/>
             <a:ext cx="1737360" cy="347472"/>
           </a:xfrm>
           <a:prstGeom prst="rect">
@@ -18879,13 +14219,13 @@
       </p:sp>
       <p:sp>
         <p:nvSpPr>
-          <p:cNvPr id="39" name="Text 30"/>
-          <p:cNvSpPr txBox="1"/>
-          <p:nvPr/>
-        </p:nvSpPr>
-        <p:spPr>
-          <a:xfrm>
-            <a:off x="7251192" y="4096512"/>
+          <p:cNvPr id="40" name="Text 31"/>
+          <p:cNvSpPr txBox="1"/>
+          <p:nvPr/>
+        </p:nvSpPr>
+        <p:spPr>
+          <a:xfrm>
+            <a:off x="7251192" y="4370832"/>
             <a:ext cx="1783080" cy="201168"/>
           </a:xfrm>
           <a:prstGeom prst="rect">
@@ -18915,18 +14255,18 @@
       </p:sp>
       <p:sp>
         <p:nvSpPr>
-          <p:cNvPr id="40" name="Shape 31"/>
+          <p:cNvPr id="41" name="Shape 32"/>
           <p:cNvSpPr/>
           <p:nvPr/>
         </p:nvSpPr>
         <p:spPr>
           <a:xfrm>
-            <a:off x="9208008" y="3657600"/>
-            <a:ext cx="2011680" cy="731520"/>
+            <a:off x="9208008" y="3950208"/>
+            <a:ext cx="2011680" cy="713232"/>
           </a:xfrm>
           <a:prstGeom prst="roundRect">
             <a:avLst>
-              <a:gd name="adj" fmla="val 7500"/>
+              <a:gd name="adj" fmla="val 7692"/>
             </a:avLst>
           </a:prstGeom>
           <a:solidFill>
@@ -18937,13 +14277,13 @@
       </p:sp>
       <p:sp>
         <p:nvSpPr>
-          <p:cNvPr id="41" name="Text 32"/>
-          <p:cNvSpPr txBox="1"/>
-          <p:nvPr/>
-        </p:nvSpPr>
-        <p:spPr>
-          <a:xfrm>
-            <a:off x="9372600" y="3730752"/>
+          <p:cNvPr id="42" name="Text 33"/>
+          <p:cNvSpPr txBox="1"/>
+          <p:nvPr/>
+        </p:nvSpPr>
+        <p:spPr>
+          <a:xfrm>
+            <a:off x="9372600" y="4014216"/>
             <a:ext cx="1737360" cy="347472"/>
           </a:xfrm>
           <a:prstGeom prst="rect">
@@ -18973,13 +14313,13 @@
       </p:sp>
       <p:sp>
         <p:nvSpPr>
-          <p:cNvPr id="42" name="Text 33"/>
-          <p:cNvSpPr txBox="1"/>
-          <p:nvPr/>
-        </p:nvSpPr>
-        <p:spPr>
-          <a:xfrm>
-            <a:off x="9372600" y="4096512"/>
+          <p:cNvPr id="43" name="Text 34"/>
+          <p:cNvSpPr txBox="1"/>
+          <p:nvPr/>
+        </p:nvSpPr>
+        <p:spPr>
+          <a:xfrm>
+            <a:off x="9372600" y="4370832"/>
             <a:ext cx="1783080" cy="201168"/>
           </a:xfrm>
           <a:prstGeom prst="rect">
@@ -19009,13 +14349,13 @@
       </p:sp>
       <p:sp>
         <p:nvSpPr>
-          <p:cNvPr id="43" name="Text 34"/>
-          <p:cNvSpPr txBox="1"/>
-          <p:nvPr/>
-        </p:nvSpPr>
-        <p:spPr>
-          <a:xfrm>
-            <a:off x="7086600" y="4572000"/>
+          <p:cNvPr id="44" name="Text 35"/>
+          <p:cNvSpPr txBox="1"/>
+          <p:nvPr/>
+        </p:nvSpPr>
+        <p:spPr>
+          <a:xfrm>
+            <a:off x="7086600" y="4828032"/>
             <a:ext cx="2743200" cy="201168"/>
           </a:xfrm>
           <a:prstGeom prst="rect">
@@ -19045,13 +14385,13 @@
       </p:sp>
       <p:sp>
         <p:nvSpPr>
-          <p:cNvPr id="44" name="Text 35"/>
-          <p:cNvSpPr txBox="1"/>
-          <p:nvPr/>
-        </p:nvSpPr>
-        <p:spPr>
-          <a:xfrm>
-            <a:off x="7086600" y="4864608"/>
+          <p:cNvPr id="45" name="Text 36"/>
+          <p:cNvSpPr txBox="1"/>
+          <p:nvPr/>
+        </p:nvSpPr>
+        <p:spPr>
+          <a:xfrm>
+            <a:off x="7086600" y="5102352"/>
             <a:ext cx="1005840" cy="219456"/>
           </a:xfrm>
           <a:prstGeom prst="rect">
@@ -19081,13 +14421,13 @@
       </p:sp>
       <p:sp>
         <p:nvSpPr>
-          <p:cNvPr id="45" name="Shape 36"/>
+          <p:cNvPr id="46" name="Shape 37"/>
           <p:cNvSpPr/>
           <p:nvPr/>
         </p:nvSpPr>
         <p:spPr>
           <a:xfrm>
-            <a:off x="8138160" y="4901184"/>
+            <a:off x="8138160" y="5138928"/>
             <a:ext cx="2468880" cy="146304"/>
           </a:xfrm>
           <a:prstGeom prst="roundRect">
@@ -19103,13 +14443,13 @@
       </p:sp>
       <p:sp>
         <p:nvSpPr>
-          <p:cNvPr id="46" name="Text 37"/>
-          <p:cNvSpPr txBox="1"/>
-          <p:nvPr/>
-        </p:nvSpPr>
-        <p:spPr>
-          <a:xfrm>
-            <a:off x="10698480" y="4864608"/>
+          <p:cNvPr id="47" name="Text 38"/>
+          <p:cNvSpPr txBox="1"/>
+          <p:nvPr/>
+        </p:nvSpPr>
+        <p:spPr>
+          <a:xfrm>
+            <a:off x="10698480" y="5102352"/>
             <a:ext cx="548640" cy="219456"/>
           </a:xfrm>
           <a:prstGeom prst="rect">
@@ -19139,13 +14479,13 @@
       </p:sp>
       <p:sp>
         <p:nvSpPr>
-          <p:cNvPr id="47" name="Text 38"/>
-          <p:cNvSpPr txBox="1"/>
-          <p:nvPr/>
-        </p:nvSpPr>
-        <p:spPr>
-          <a:xfrm>
-            <a:off x="7086600" y="5193792"/>
+          <p:cNvPr id="48" name="Text 39"/>
+          <p:cNvSpPr txBox="1"/>
+          <p:nvPr/>
+        </p:nvSpPr>
+        <p:spPr>
+          <a:xfrm>
+            <a:off x="7086600" y="5394960"/>
             <a:ext cx="1005840" cy="219456"/>
           </a:xfrm>
           <a:prstGeom prst="rect">
@@ -19175,13 +14515,13 @@
       </p:sp>
       <p:sp>
         <p:nvSpPr>
-          <p:cNvPr id="48" name="Shape 39"/>
+          <p:cNvPr id="49" name="Shape 40"/>
           <p:cNvSpPr/>
           <p:nvPr/>
         </p:nvSpPr>
         <p:spPr>
           <a:xfrm>
-            <a:off x="8138160" y="5230368"/>
+            <a:off x="8138160" y="5431536"/>
             <a:ext cx="1804182" cy="146304"/>
           </a:xfrm>
           <a:prstGeom prst="roundRect">
@@ -19197,13 +14537,13 @@
       </p:sp>
       <p:sp>
         <p:nvSpPr>
-          <p:cNvPr id="49" name="Text 40"/>
-          <p:cNvSpPr txBox="1"/>
-          <p:nvPr/>
-        </p:nvSpPr>
-        <p:spPr>
-          <a:xfrm>
-            <a:off x="10033782" y="5193792"/>
+          <p:cNvPr id="50" name="Text 41"/>
+          <p:cNvSpPr txBox="1"/>
+          <p:nvPr/>
+        </p:nvSpPr>
+        <p:spPr>
+          <a:xfrm>
+            <a:off x="10033782" y="5394960"/>
             <a:ext cx="548640" cy="219456"/>
           </a:xfrm>
           <a:prstGeom prst="rect">
@@ -19233,13 +14573,13 @@
       </p:sp>
       <p:sp>
         <p:nvSpPr>
-          <p:cNvPr id="50" name="Text 41"/>
-          <p:cNvSpPr txBox="1"/>
-          <p:nvPr/>
-        </p:nvSpPr>
-        <p:spPr>
-          <a:xfrm>
-            <a:off x="7086600" y="5522976"/>
+          <p:cNvPr id="51" name="Text 42"/>
+          <p:cNvSpPr txBox="1"/>
+          <p:nvPr/>
+        </p:nvSpPr>
+        <p:spPr>
+          <a:xfrm>
+            <a:off x="7086600" y="5687568"/>
             <a:ext cx="1005840" cy="219456"/>
           </a:xfrm>
           <a:prstGeom prst="rect">
@@ -19269,13 +14609,13 @@
       </p:sp>
       <p:sp>
         <p:nvSpPr>
-          <p:cNvPr id="51" name="Shape 42"/>
+          <p:cNvPr id="52" name="Shape 43"/>
           <p:cNvSpPr/>
           <p:nvPr/>
         </p:nvSpPr>
         <p:spPr>
           <a:xfrm>
-            <a:off x="8138160" y="5559552"/>
+            <a:off x="8138160" y="5724144"/>
             <a:ext cx="474785" cy="146304"/>
           </a:xfrm>
           <a:prstGeom prst="roundRect">
@@ -19291,13 +14631,13 @@
       </p:sp>
       <p:sp>
         <p:nvSpPr>
-          <p:cNvPr id="52" name="Text 43"/>
-          <p:cNvSpPr txBox="1"/>
-          <p:nvPr/>
-        </p:nvSpPr>
-        <p:spPr>
-          <a:xfrm>
-            <a:off x="8704385" y="5522976"/>
+          <p:cNvPr id="53" name="Text 44"/>
+          <p:cNvSpPr txBox="1"/>
+          <p:nvPr/>
+        </p:nvSpPr>
+        <p:spPr>
+          <a:xfrm>
+            <a:off x="8704385" y="5687568"/>
             <a:ext cx="548640" cy="219456"/>
           </a:xfrm>
           <a:prstGeom prst="rect">
@@ -19320,85 +14660,6 @@
                 </a:solidFill>
               </a:rPr>
               <a:t>10%</a:t>
-            </a:r>
-            <a:endParaRPr lang="fr-FR" sz="1000" dirty="0"/>
-          </a:p>
-        </p:txBody>
-      </p:sp>
-      <p:sp>
-        <p:nvSpPr>
-          <p:cNvPr id="53" name="Text 44"/>
-          <p:cNvSpPr txBox="1"/>
-          <p:nvPr/>
-        </p:nvSpPr>
-        <p:spPr>
-          <a:xfrm>
-            <a:off x="7086600" y="5779008"/>
-            <a:ext cx="2926080" cy="201168"/>
-          </a:xfrm>
-          <a:prstGeom prst="rect">
-            <a:avLst/>
-          </a:prstGeom>
-          <a:noFill/>
-          <a:ln/>
-        </p:spPr>
-        <p:txBody>
-          <a:bodyPr wrap="square" lIns="0" tIns="0" rIns="0" bIns="0" rtlCol="0" anchor="t"/>
-          <a:lstStyle/>
-          <a:p>
-            <a:pPr indent="0" marL="0">
-              <a:buNone/>
-            </a:pPr>
-            <a:r>
-              <a:rPr lang="fr-FR" altLang="en-US" sz="1000" b="1" i="1" dirty="0">
-                <a:solidFill>
-                  <a:schemeClr val="accent3"/>
-                </a:solidFill>
-              </a:rPr>
-              <a:t>Exemple de mise en page. Chiffres fictifs.</a:t>
-            </a:r>
-            <a:endParaRPr lang="fr-FR" sz="1000" dirty="0"/>
-          </a:p>
-        </p:txBody>
-      </p:sp>
-      <p:sp>
-        <p:nvSpPr>
-          <p:cNvPr id="54" name="Text 45"/>
-          <p:cNvSpPr txBox="1"/>
-          <p:nvPr/>
-        </p:nvSpPr>
-        <p:spPr>
-          <a:xfrm>
-            <a:off x="10222992" y="5779008"/>
-            <a:ext cx="1005840" cy="201168"/>
-          </a:xfrm>
-          <a:prstGeom prst="rect">
-            <a:avLst/>
-          </a:prstGeom>
-          <a:noFill/>
-          <a:ln/>
-        </p:spPr>
-        <p:txBody>
-          <a:bodyPr wrap="square" lIns="0" tIns="0" rIns="0" bIns="0" rtlCol="0" anchor="t"/>
-          <a:lstStyle/>
-          <a:p>
-            <a:pPr algn="r" indent="0" marL="0">
-              <a:buNone/>
-            </a:pPr>
-            <a:r>
-              <a:rPr lang="fr-FR" altLang="en-US" sz="1000" b="1" u="sng" dirty="0">
-                <a:solidFill>
-                  <a:schemeClr val="accent3"/>
-                </a:solidFill>
-                <a:hlinkClick r:id="rId8" action="ppaction://hlinksldjump" tooltip="Exemple de rapport, page 2">
-                  <a:extLst>
-                    <a:ext uri="{A12FA001-AC4F-418D-AE19-62706E023703}">
-                      <ahyp:hlinkClr xmlns:ahyp="http://schemas.microsoft.com/office/drawing/2018/hyperlinkcolor" val="tx"/>
-                    </a:ext>
-                  </a:extLst>
-                </a:hlinkClick>
-              </a:rPr>
-              <a:t>Page 2  →</a:t>
             </a:r>
             <a:endParaRPr lang="fr-FR" sz="1000" dirty="0"/>
           </a:p>
@@ -19643,7 +14904,7 @@
         <p:spPr>
           <a:xfrm>
             <a:off x="548640" y="1783080"/>
-            <a:ext cx="6492240" cy="868680"/>
+            <a:ext cx="6492240" cy="731520"/>
           </a:xfrm>
           <a:prstGeom prst="rect">
             <a:avLst/>
@@ -19662,14 +14923,14 @@
               <a:buNone/>
             </a:pPr>
             <a:r>
-              <a:rPr lang="fr-FR" altLang="en-US" sz="1600" dirty="0">
+              <a:rPr lang="fr-FR" altLang="en-US" sz="1500" dirty="0">
                 <a:solidFill>
                   <a:schemeClr val="tx2"/>
                 </a:solidFill>
               </a:rPr>
-              <a:t>AToure gère l’activation des créateurs pour la 5e édition et livre un rapport de visibilité complet sur le festival, conçu pour être présenté aux sponsors et aux partenaires.</a:t>
-            </a:r>
-            <a:endParaRPr lang="fr-FR" sz="1600" dirty="0"/>
+              <a:t>AToure travaille avec les créateurs que Mother Africa a déjà, ajoute ceux qui manquent, et livre un rapport de visibilité complet, conçu pour les sponsors et les partenaires.</a:t>
+            </a:r>
+            <a:endParaRPr lang="fr-FR" sz="1500" dirty="0"/>
           </a:p>
         </p:txBody>
       </p:sp>
@@ -19681,8 +14942,8 @@
         </p:nvSpPr>
         <p:spPr>
           <a:xfrm>
-            <a:off x="548640" y="2834640"/>
-            <a:ext cx="6492240" cy="384048"/>
+            <a:off x="548640" y="2606040"/>
+            <a:ext cx="6492240" cy="347472"/>
           </a:xfrm>
           <a:prstGeom prst="rect">
             <a:avLst/>
@@ -19701,8 +14962,8 @@
         </p:nvSpPr>
         <p:spPr>
           <a:xfrm>
-            <a:off x="777240" y="2834640"/>
-            <a:ext cx="6035040" cy="384048"/>
+            <a:off x="777240" y="2606040"/>
+            <a:ext cx="6035040" cy="347472"/>
           </a:xfrm>
           <a:prstGeom prst="rect">
             <a:avLst/>
@@ -19718,14 +14979,14 @@
               <a:buNone/>
             </a:pPr>
             <a:r>
-              <a:rPr lang="fr-FR" altLang="en-US" sz="1200" b="1" spc="300" kern="0" dirty="0">
+              <a:rPr lang="fr-FR" altLang="en-US" sz="1150" b="1" spc="300" kern="0" dirty="0">
                 <a:solidFill>
                   <a:schemeClr val="tx1"/>
                 </a:solidFill>
               </a:rPr>
-              <a:t>L’ACTIVATION</a:t>
-            </a:r>
-            <a:endParaRPr lang="fr-FR" sz="1200" dirty="0"/>
+              <a:t>CRÉATEURS DÉJÀ ENGAGÉS</a:t>
+            </a:r>
+            <a:endParaRPr lang="fr-FR" sz="1150" dirty="0"/>
           </a:p>
         </p:txBody>
       </p:sp>
@@ -19737,8 +14998,8 @@
         </p:nvSpPr>
         <p:spPr>
           <a:xfrm>
-            <a:off x="548640" y="3218688"/>
-            <a:ext cx="6492240" cy="777240"/>
+            <a:off x="548640" y="2953512"/>
+            <a:ext cx="6492240" cy="621792"/>
           </a:xfrm>
           <a:prstGeom prst="rect">
             <a:avLst/>
@@ -19764,8 +15025,8 @@
         </p:nvSpPr>
         <p:spPr>
           <a:xfrm>
-            <a:off x="777240" y="3291840"/>
-            <a:ext cx="6035040" cy="640080"/>
+            <a:off x="777240" y="3017520"/>
+            <a:ext cx="6035040" cy="512064"/>
           </a:xfrm>
           <a:prstGeom prst="rect">
             <a:avLst/>
@@ -19781,14 +15042,14 @@
               <a:buNone/>
             </a:pPr>
             <a:r>
-              <a:rPr lang="fr-FR" altLang="en-US" sz="1500" dirty="0">
+              <a:rPr lang="fr-FR" altLang="en-US" sz="1400" dirty="0">
                 <a:solidFill>
                   <a:schemeClr val="tx1"/>
                 </a:solidFill>
               </a:rPr>
-              <a:t>Des créateurs adaptés aux publics du festival, gérés sur le terrain avant, pendant et après les 27 et 28 décembre.</a:t>
-            </a:r>
-            <a:endParaRPr lang="fr-FR" sz="1500" dirty="0"/>
+              <a:t>Les créateurs que le festival a déjà activés restent. AToure les gère sur le terrain, avec les nouveaux.</a:t>
+            </a:r>
+            <a:endParaRPr lang="fr-FR" sz="1400" dirty="0"/>
           </a:p>
         </p:txBody>
       </p:sp>
@@ -19800,14 +15061,14 @@
         </p:nvSpPr>
         <p:spPr>
           <a:xfrm>
-            <a:off x="548640" y="4160520"/>
-            <a:ext cx="6492240" cy="384048"/>
+            <a:off x="548640" y="3685032"/>
+            <a:ext cx="6492240" cy="347472"/>
           </a:xfrm>
           <a:prstGeom prst="rect">
             <a:avLst/>
           </a:prstGeom>
           <a:solidFill>
-            <a:schemeClr val="accent2"/>
+            <a:schemeClr val="accent1"/>
           </a:solidFill>
           <a:ln/>
         </p:spPr>
@@ -19820,8 +15081,8 @@
         </p:nvSpPr>
         <p:spPr>
           <a:xfrm>
-            <a:off x="777240" y="4160520"/>
-            <a:ext cx="6035040" cy="384048"/>
+            <a:off x="777240" y="3685032"/>
+            <a:ext cx="6035040" cy="347472"/>
           </a:xfrm>
           <a:prstGeom prst="rect">
             <a:avLst/>
@@ -19837,14 +15098,14 @@
               <a:buNone/>
             </a:pPr>
             <a:r>
-              <a:rPr lang="fr-FR" altLang="en-US" sz="1200" b="1" spc="300" kern="0" dirty="0">
+              <a:rPr lang="fr-FR" altLang="en-US" sz="1150" b="1" spc="300" kern="0" dirty="0">
                 <a:solidFill>
                   <a:schemeClr val="tx1"/>
                 </a:solidFill>
               </a:rPr>
-              <a:t>LE RAPPORT</a:t>
-            </a:r>
-            <a:endParaRPr lang="fr-FR" sz="1200" dirty="0"/>
+              <a:t>UN CONTRAT AVEC DES LIVRABLES</a:t>
+            </a:r>
+            <a:endParaRPr lang="fr-FR" sz="1150" dirty="0"/>
           </a:p>
         </p:txBody>
       </p:sp>
@@ -19856,8 +15117,8 @@
         </p:nvSpPr>
         <p:spPr>
           <a:xfrm>
-            <a:off x="548640" y="4544568"/>
-            <a:ext cx="6492240" cy="777240"/>
+            <a:off x="548640" y="4032504"/>
+            <a:ext cx="6492240" cy="621792"/>
           </a:xfrm>
           <a:prstGeom prst="rect">
             <a:avLst/>
@@ -19883,8 +15144,8 @@
         </p:nvSpPr>
         <p:spPr>
           <a:xfrm>
-            <a:off x="777240" y="4617720"/>
-            <a:ext cx="6035040" cy="640080"/>
+            <a:off x="777240" y="4096512"/>
+            <a:ext cx="6035040" cy="512064"/>
           </a:xfrm>
           <a:prstGeom prst="rect">
             <a:avLst/>
@@ -19900,27 +15161,146 @@
               <a:buNone/>
             </a:pPr>
             <a:r>
-              <a:rPr lang="fr-FR" altLang="en-US" sz="1500" dirty="0">
+              <a:rPr lang="fr-FR" altLang="en-US" sz="1400" dirty="0">
                 <a:solidFill>
                   <a:schemeClr val="tx1"/>
                 </a:solidFill>
               </a:rPr>
-              <a:t>Un point à 48 heures et le rapport complet au 14e jour, conçu pour l’équipe du festival et pour chaque sponsor.</a:t>
-            </a:r>
-            <a:endParaRPr lang="fr-FR" sz="1500" dirty="0"/>
-          </a:p>
-        </p:txBody>
-      </p:sp>
-      <p:sp>
-        <p:nvSpPr>
-          <p:cNvPr id="17" name="Text 12"/>
-          <p:cNvSpPr txBox="1"/>
-          <p:nvPr/>
-        </p:nvSpPr>
-        <p:spPr>
-          <a:xfrm>
-            <a:off x="548640" y="5532120"/>
-            <a:ext cx="6492240" cy="502920"/>
+              <a:t>Chaque créateur sous contrat pour l’événement : publications, plateformes, calendrier et lien de billetterie, fixés par écrit.</a:t>
+            </a:r>
+            <a:endParaRPr lang="fr-FR" sz="1400" dirty="0"/>
+          </a:p>
+        </p:txBody>
+      </p:sp>
+      <p:sp>
+        <p:nvSpPr>
+          <p:cNvPr id="17" name="Shape 12"/>
+          <p:cNvSpPr/>
+          <p:nvPr/>
+        </p:nvSpPr>
+        <p:spPr>
+          <a:xfrm>
+            <a:off x="548640" y="4764024"/>
+            <a:ext cx="6492240" cy="347472"/>
+          </a:xfrm>
+          <a:prstGeom prst="rect">
+            <a:avLst/>
+          </a:prstGeom>
+          <a:solidFill>
+            <a:schemeClr val="accent2"/>
+          </a:solidFill>
+          <a:ln/>
+        </p:spPr>
+      </p:sp>
+      <p:sp>
+        <p:nvSpPr>
+          <p:cNvPr id="18" name="Text 13"/>
+          <p:cNvSpPr txBox="1"/>
+          <p:nvPr/>
+        </p:nvSpPr>
+        <p:spPr>
+          <a:xfrm>
+            <a:off x="777240" y="4764024"/>
+            <a:ext cx="6035040" cy="347472"/>
+          </a:xfrm>
+          <a:prstGeom prst="rect">
+            <a:avLst/>
+          </a:prstGeom>
+          <a:noFill/>
+          <a:ln/>
+        </p:spPr>
+        <p:txBody>
+          <a:bodyPr wrap="square" lIns="0" tIns="0" rIns="0" bIns="0" rtlCol="0" anchor="ctr"/>
+          <a:lstStyle/>
+          <a:p>
+            <a:pPr indent="0" marL="0">
+              <a:buNone/>
+            </a:pPr>
+            <a:r>
+              <a:rPr lang="fr-FR" altLang="en-US" sz="1150" b="1" spc="300" kern="0" dirty="0">
+                <a:solidFill>
+                  <a:schemeClr val="tx1"/>
+                </a:solidFill>
+              </a:rPr>
+              <a:t>LE RAPPORT</a:t>
+            </a:r>
+            <a:endParaRPr lang="fr-FR" sz="1150" dirty="0"/>
+          </a:p>
+        </p:txBody>
+      </p:sp>
+      <p:sp>
+        <p:nvSpPr>
+          <p:cNvPr id="19" name="Shape 14"/>
+          <p:cNvSpPr/>
+          <p:nvPr/>
+        </p:nvSpPr>
+        <p:spPr>
+          <a:xfrm>
+            <a:off x="548640" y="5111496"/>
+            <a:ext cx="6492240" cy="621792"/>
+          </a:xfrm>
+          <a:prstGeom prst="rect">
+            <a:avLst/>
+          </a:prstGeom>
+          <a:solidFill>
+            <a:schemeClr val="bg1"/>
+          </a:solidFill>
+          <a:ln w="9525">
+            <a:solidFill>
+              <a:schemeClr val="tx2">
+                <a:alpha val="28000"/>
+              </a:schemeClr>
+            </a:solidFill>
+            <a:prstDash val="solid"/>
+          </a:ln>
+        </p:spPr>
+      </p:sp>
+      <p:sp>
+        <p:nvSpPr>
+          <p:cNvPr id="20" name="Text 15"/>
+          <p:cNvSpPr txBox="1"/>
+          <p:nvPr/>
+        </p:nvSpPr>
+        <p:spPr>
+          <a:xfrm>
+            <a:off x="777240" y="5175504"/>
+            <a:ext cx="6035040" cy="512064"/>
+          </a:xfrm>
+          <a:prstGeom prst="rect">
+            <a:avLst/>
+          </a:prstGeom>
+          <a:noFill/>
+          <a:ln/>
+        </p:spPr>
+        <p:txBody>
+          <a:bodyPr wrap="square" lIns="0" tIns="0" rIns="0" bIns="0" rtlCol="0" anchor="t"/>
+          <a:lstStyle/>
+          <a:p>
+            <a:pPr indent="0" marL="0">
+              <a:buNone/>
+            </a:pPr>
+            <a:r>
+              <a:rPr lang="fr-FR" altLang="en-US" sz="1400" dirty="0">
+                <a:solidFill>
+                  <a:schemeClr val="tx1"/>
+                </a:solidFill>
+              </a:rPr>
+              <a:t>Chaque publication suivie dès l’avant festival, un point à 48 heures et le rapport complet au 14e jour.</a:t>
+            </a:r>
+            <a:endParaRPr lang="fr-FR" sz="1400" dirty="0"/>
+          </a:p>
+        </p:txBody>
+      </p:sp>
+      <p:sp>
+        <p:nvSpPr>
+          <p:cNvPr id="21" name="Text 16"/>
+          <p:cNvSpPr txBox="1"/>
+          <p:nvPr/>
+        </p:nvSpPr>
+        <p:spPr>
+          <a:xfrm>
+            <a:off x="548640" y="5852160"/>
+            <a:ext cx="6492240" cy="384048"/>
           </a:xfrm>
           <a:prstGeom prst="rect">
             <a:avLst/>
@@ -19944,7 +15324,7 @@
                 <a:ea typeface="+mj-lt" pitchFamily="34" charset="-122"/>
                 <a:cs typeface="+mj-lt" pitchFamily="34" charset="-120"/>
               </a:rPr>
-              <a:t>Un essai, pas un engagement long. C’est ce qui ouvre la discussion sur 2027.</a:t>
+              <a:t>Un essai, pas un engagement long.</a:t>
             </a:r>
             <a:endParaRPr lang="fr-FR" sz="1900" dirty="0"/>
           </a:p>
@@ -19952,7 +15332,7 @@
       </p:sp>
       <p:pic>
         <p:nvPicPr>
-          <p:cNvPr id="18" name="Photo ai_pass" descr="Illustration : un pass d’accréditation créateur Mother Africa Festival, sur son cordon">    </p:cNvPr>
+          <p:cNvPr id="22" name="Photo ai_pass" descr="Illustration : un pass d’accréditation créateur Mother Africa Festival, sur son cordon">    </p:cNvPr>
           <p:cNvPicPr>
             <a:picLocks noChangeAspect="1"/>
           </p:cNvPicPr>
@@ -19976,7 +15356,7 @@
       </p:pic>
       <p:sp>
         <p:nvSpPr>
-          <p:cNvPr id="19" name="Shape 13"/>
+          <p:cNvPr id="23" name="Shape 17"/>
           <p:cNvSpPr/>
           <p:nvPr/>
         </p:nvSpPr>
@@ -19998,7 +15378,7 @@
       </p:sp>
       <p:pic>
         <p:nvPicPr>
-          <p:cNvPr id="20" name="Image 3" descr="Mother Africa Festival">    </p:cNvPr>
+          <p:cNvPr id="24" name="Image 3" descr="Mother Africa Festival">    </p:cNvPr>
           <p:cNvPicPr>
             <a:picLocks noChangeAspect="1"/>
           </p:cNvPicPr>
@@ -20022,7 +15402,7 @@
       </p:pic>
       <p:sp>
         <p:nvSpPr>
-          <p:cNvPr id="21" name="Text 14"/>
+          <p:cNvPr id="25" name="Text 18"/>
           <p:cNvSpPr txBox="1"/>
           <p:nvPr/>
         </p:nvSpPr>
@@ -20058,7 +15438,7 @@
       </p:sp>
       <p:pic>
         <p:nvPicPr>
-          <p:cNvPr id="22" name="Image 4" descr="AToure Management &amp; Consulting">    </p:cNvPr>
+          <p:cNvPr id="26" name="Image 4" descr="AToure Management &amp; Consulting">    </p:cNvPr>
           <p:cNvPicPr>
             <a:picLocks noChangeAspect="1"/>
           </p:cNvPicPr>
